--- a/Academic Documents/Final Panel Presentation/Final Panel Slides 1.1 - DS.pptx
+++ b/Academic Documents/Final Panel Presentation/Final Panel Slides 1.1 - DS.pptx
@@ -119,18 +119,13 @@
       </a:defRPr>
     </a:lvl9pPr>
   </p:defaultTextStyle>
-  <p:extLst>
-    <p:ext uri="{EFAFB233-063F-42B5-8137-9DF3F51BA10A}">
-      <p15:sldGuideLst xmlns:p15="http://schemas.microsoft.com/office/powerpoint/2012/main"/>
-    </p:ext>
-  </p:extLst>
 </p:presentation>
 </file>
 
 <file path=ppt/revisionInfo.xml><?xml version="1.0" encoding="utf-8"?>
 <p1510:revInfo xmlns:a="http://schemas.openxmlformats.org/drawingml/2006/main" xmlns:r="http://schemas.openxmlformats.org/officeDocument/2006/relationships" xmlns:p1510="http://schemas.microsoft.com/office/powerpoint/2015/10/main">
   <p1510:revLst>
-    <p1510:client id="{3378A5B4-34A5-42AF-8162-FCA3941F24F2}" v="18" dt="2026-10-09T06:20:24.447"/>
+    <p1510:client id="{3378A5B4-34A5-42AF-8162-FCA3941F24F2}" v="46" dt="2026-10-25T20:13:46.619"/>
   </p1510:revLst>
 </p1510:revInfo>
 </file>
@@ -140,7 +135,7 @@
   <pc:docChgLst>
     <pc:chgData name="Dave Sushames" userId="ce71797e-895c-47df-af8e-c160254d5cef" providerId="ADAL" clId="{067FCE3D-3D41-4548-936F-F0A348C85C95}"/>
     <pc:docChg chg="undo custSel addSld modSld sldOrd addMainMaster delMainMaster modMainMaster">
-      <pc:chgData name="Dave Sushames" userId="ce71797e-895c-47df-af8e-c160254d5cef" providerId="ADAL" clId="{067FCE3D-3D41-4548-936F-F0A348C85C95}" dt="2026-10-09T06:20:29.622" v="434"/>
+      <pc:chgData name="Dave Sushames" userId="ce71797e-895c-47df-af8e-c160254d5cef" providerId="ADAL" clId="{067FCE3D-3D41-4548-936F-F0A348C85C95}" dt="2026-10-25T20:26:32.758" v="471" actId="1076"/>
       <pc:docMkLst>
         <pc:docMk/>
       </pc:docMkLst>
@@ -168,7 +163,7 @@
         </pc:spChg>
       </pc:sldChg>
       <pc:sldChg chg="modSp mod modClrScheme chgLayout">
-        <pc:chgData name="Dave Sushames" userId="ce71797e-895c-47df-af8e-c160254d5cef" providerId="ADAL" clId="{067FCE3D-3D41-4548-936F-F0A348C85C95}" dt="2026-10-09T05:49:05.674" v="131" actId="700"/>
+        <pc:chgData name="Dave Sushames" userId="ce71797e-895c-47df-af8e-c160254d5cef" providerId="ADAL" clId="{067FCE3D-3D41-4548-936F-F0A348C85C95}" dt="2026-10-25T05:37:19.750" v="458" actId="20577"/>
         <pc:sldMkLst>
           <pc:docMk/>
           <pc:sldMk cId="3469609952" sldId="257"/>
@@ -182,7 +177,7 @@
           </ac:spMkLst>
         </pc:spChg>
         <pc:spChg chg="mod ord">
-          <ac:chgData name="Dave Sushames" userId="ce71797e-895c-47df-af8e-c160254d5cef" providerId="ADAL" clId="{067FCE3D-3D41-4548-936F-F0A348C85C95}" dt="2026-10-09T05:49:05.674" v="131" actId="700"/>
+          <ac:chgData name="Dave Sushames" userId="ce71797e-895c-47df-af8e-c160254d5cef" providerId="ADAL" clId="{067FCE3D-3D41-4548-936F-F0A348C85C95}" dt="2026-10-25T05:37:19.750" v="458" actId="20577"/>
           <ac:spMkLst>
             <pc:docMk/>
             <pc:sldMk cId="3469609952" sldId="257"/>
@@ -191,7 +186,7 @@
         </pc:spChg>
       </pc:sldChg>
       <pc:sldChg chg="addSp delSp modSp mod modClrScheme chgLayout">
-        <pc:chgData name="Dave Sushames" userId="ce71797e-895c-47df-af8e-c160254d5cef" providerId="ADAL" clId="{067FCE3D-3D41-4548-936F-F0A348C85C95}" dt="2026-10-09T05:45:58.550" v="106" actId="700"/>
+        <pc:chgData name="Dave Sushames" userId="ce71797e-895c-47df-af8e-c160254d5cef" providerId="ADAL" clId="{067FCE3D-3D41-4548-936F-F0A348C85C95}" dt="2026-10-25T05:37:36.961" v="459" actId="20577"/>
         <pc:sldMkLst>
           <pc:docMk/>
           <pc:sldMk cId="2914373187" sldId="258"/>
@@ -205,83 +200,11 @@
           </ac:spMkLst>
         </pc:spChg>
         <pc:spChg chg="mod ord">
-          <ac:chgData name="Dave Sushames" userId="ce71797e-895c-47df-af8e-c160254d5cef" providerId="ADAL" clId="{067FCE3D-3D41-4548-936F-F0A348C85C95}" dt="2026-10-09T05:45:58.550" v="106" actId="700"/>
+          <ac:chgData name="Dave Sushames" userId="ce71797e-895c-47df-af8e-c160254d5cef" providerId="ADAL" clId="{067FCE3D-3D41-4548-936F-F0A348C85C95}" dt="2026-10-25T05:37:36.961" v="459" actId="20577"/>
           <ac:spMkLst>
             <pc:docMk/>
             <pc:sldMk cId="2914373187" sldId="258"/>
             <ac:spMk id="3" creationId="{4CA4FAD2-2AC0-60FF-6FA2-9F801ED04B8C}"/>
-          </ac:spMkLst>
-        </pc:spChg>
-        <pc:spChg chg="add del mod ord">
-          <ac:chgData name="Dave Sushames" userId="ce71797e-895c-47df-af8e-c160254d5cef" providerId="ADAL" clId="{067FCE3D-3D41-4548-936F-F0A348C85C95}" dt="2026-10-09T05:44:20.180" v="92" actId="700"/>
-          <ac:spMkLst>
-            <pc:docMk/>
-            <pc:sldMk cId="2914373187" sldId="258"/>
-            <ac:spMk id="4" creationId="{897A7BAF-A798-1225-9C63-61C0285AF65A}"/>
-          </ac:spMkLst>
-        </pc:spChg>
-        <pc:spChg chg="add del mod ord">
-          <ac:chgData name="Dave Sushames" userId="ce71797e-895c-47df-af8e-c160254d5cef" providerId="ADAL" clId="{067FCE3D-3D41-4548-936F-F0A348C85C95}" dt="2026-10-09T05:44:20.180" v="92" actId="700"/>
-          <ac:spMkLst>
-            <pc:docMk/>
-            <pc:sldMk cId="2914373187" sldId="258"/>
-            <ac:spMk id="5" creationId="{8500FC36-06DB-4C1E-A370-8399E3FA4F48}"/>
-          </ac:spMkLst>
-        </pc:spChg>
-        <pc:spChg chg="add del mod ord">
-          <ac:chgData name="Dave Sushames" userId="ce71797e-895c-47df-af8e-c160254d5cef" providerId="ADAL" clId="{067FCE3D-3D41-4548-936F-F0A348C85C95}" dt="2026-10-09T05:44:20.180" v="92" actId="700"/>
-          <ac:spMkLst>
-            <pc:docMk/>
-            <pc:sldMk cId="2914373187" sldId="258"/>
-            <ac:spMk id="7" creationId="{DEEF62A2-6CCD-2A65-54D1-D075DC6892E1}"/>
-          </ac:spMkLst>
-        </pc:spChg>
-        <pc:spChg chg="add del mod ord">
-          <ac:chgData name="Dave Sushames" userId="ce71797e-895c-47df-af8e-c160254d5cef" providerId="ADAL" clId="{067FCE3D-3D41-4548-936F-F0A348C85C95}" dt="2026-10-09T05:44:20.180" v="92" actId="700"/>
-          <ac:spMkLst>
-            <pc:docMk/>
-            <pc:sldMk cId="2914373187" sldId="258"/>
-            <ac:spMk id="8" creationId="{36E7F77B-F670-DF16-A6E1-F71BA69C5645}"/>
-          </ac:spMkLst>
-        </pc:spChg>
-        <pc:spChg chg="add del mod ord">
-          <ac:chgData name="Dave Sushames" userId="ce71797e-895c-47df-af8e-c160254d5cef" providerId="ADAL" clId="{067FCE3D-3D41-4548-936F-F0A348C85C95}" dt="2026-10-09T05:44:20.180" v="92" actId="700"/>
-          <ac:spMkLst>
-            <pc:docMk/>
-            <pc:sldMk cId="2914373187" sldId="258"/>
-            <ac:spMk id="9" creationId="{D2C049EE-D08A-4151-28E4-8877B7876DB1}"/>
-          </ac:spMkLst>
-        </pc:spChg>
-        <pc:spChg chg="add del mod ord">
-          <ac:chgData name="Dave Sushames" userId="ce71797e-895c-47df-af8e-c160254d5cef" providerId="ADAL" clId="{067FCE3D-3D41-4548-936F-F0A348C85C95}" dt="2026-10-09T05:44:20.180" v="92" actId="700"/>
-          <ac:spMkLst>
-            <pc:docMk/>
-            <pc:sldMk cId="2914373187" sldId="258"/>
-            <ac:spMk id="10" creationId="{6AEC5869-C5D0-4BDA-03B7-C493A0E4A0EB}"/>
-          </ac:spMkLst>
-        </pc:spChg>
-        <pc:spChg chg="add del mod ord">
-          <ac:chgData name="Dave Sushames" userId="ce71797e-895c-47df-af8e-c160254d5cef" providerId="ADAL" clId="{067FCE3D-3D41-4548-936F-F0A348C85C95}" dt="2026-10-09T05:44:20.180" v="92" actId="700"/>
-          <ac:spMkLst>
-            <pc:docMk/>
-            <pc:sldMk cId="2914373187" sldId="258"/>
-            <ac:spMk id="12" creationId="{66FED964-2A53-70C1-45CF-DA6D75759A61}"/>
-          </ac:spMkLst>
-        </pc:spChg>
-        <pc:spChg chg="add del mod ord">
-          <ac:chgData name="Dave Sushames" userId="ce71797e-895c-47df-af8e-c160254d5cef" providerId="ADAL" clId="{067FCE3D-3D41-4548-936F-F0A348C85C95}" dt="2026-10-09T05:44:20.180" v="92" actId="700"/>
-          <ac:spMkLst>
-            <pc:docMk/>
-            <pc:sldMk cId="2914373187" sldId="258"/>
-            <ac:spMk id="13" creationId="{53D7B4C3-5761-A97C-9CB2-8C1721F62434}"/>
-          </ac:spMkLst>
-        </pc:spChg>
-        <pc:spChg chg="add del mod ord">
-          <ac:chgData name="Dave Sushames" userId="ce71797e-895c-47df-af8e-c160254d5cef" providerId="ADAL" clId="{067FCE3D-3D41-4548-936F-F0A348C85C95}" dt="2026-10-09T05:44:20.180" v="92" actId="700"/>
-          <ac:spMkLst>
-            <pc:docMk/>
-            <pc:sldMk cId="2914373187" sldId="258"/>
-            <ac:spMk id="15" creationId="{7FE4D918-D058-270C-575B-FE06BF8F3CA6}"/>
           </ac:spMkLst>
         </pc:spChg>
       </pc:sldChg>
@@ -307,14 +230,6 @@
             <ac:spMk id="3" creationId="{052098D0-DD9A-E09A-83DC-15F697CC3E8F}"/>
           </ac:spMkLst>
         </pc:spChg>
-        <pc:picChg chg="add del mod">
-          <ac:chgData name="Dave Sushames" userId="ce71797e-895c-47df-af8e-c160254d5cef" providerId="ADAL" clId="{067FCE3D-3D41-4548-936F-F0A348C85C95}" dt="2026-10-09T05:55:58.188" v="137" actId="22"/>
-          <ac:picMkLst>
-            <pc:docMk/>
-            <pc:sldMk cId="1873885871" sldId="259"/>
-            <ac:picMk id="5" creationId="{54861C4A-F27F-4F03-98B9-9CDC9DC548E4}"/>
-          </ac:picMkLst>
-        </pc:picChg>
       </pc:sldChg>
       <pc:sldChg chg="modSp mod modClrScheme chgLayout">
         <pc:chgData name="Dave Sushames" userId="ce71797e-895c-47df-af8e-c160254d5cef" providerId="ADAL" clId="{067FCE3D-3D41-4548-936F-F0A348C85C95}" dt="2026-10-09T05:46:07.836" v="108" actId="700"/>
@@ -523,62 +438,6 @@
             <ac:spMk id="3" creationId="{18550B0F-1C8E-3094-093D-9DEBE70E0AB9}"/>
           </ac:spMkLst>
         </pc:spChg>
-        <pc:spChg chg="add del mod ord">
-          <ac:chgData name="Dave Sushames" userId="ce71797e-895c-47df-af8e-c160254d5cef" providerId="ADAL" clId="{067FCE3D-3D41-4548-936F-F0A348C85C95}" dt="2026-10-09T06:01:41.436" v="167" actId="700"/>
-          <ac:spMkLst>
-            <pc:docMk/>
-            <pc:sldMk cId="1154527499" sldId="272"/>
-            <ac:spMk id="4" creationId="{997046C0-3F82-AE77-B9D8-9AEC42AE2E61}"/>
-          </ac:spMkLst>
-        </pc:spChg>
-        <pc:spChg chg="add mod ord">
-          <ac:chgData name="Dave Sushames" userId="ce71797e-895c-47df-af8e-c160254d5cef" providerId="ADAL" clId="{067FCE3D-3D41-4548-936F-F0A348C85C95}" dt="2026-10-09T05:49:16.368" v="132" actId="700"/>
-          <ac:spMkLst>
-            <pc:docMk/>
-            <pc:sldMk cId="1154527499" sldId="272"/>
-            <ac:spMk id="5" creationId="{727D2EF8-CB66-DE97-BDC7-52A3FF9A99C1}"/>
-          </ac:spMkLst>
-        </pc:spChg>
-        <pc:spChg chg="add mod ord">
-          <ac:chgData name="Dave Sushames" userId="ce71797e-895c-47df-af8e-c160254d5cef" providerId="ADAL" clId="{067FCE3D-3D41-4548-936F-F0A348C85C95}" dt="2026-10-09T05:49:16.368" v="132" actId="700"/>
-          <ac:spMkLst>
-            <pc:docMk/>
-            <pc:sldMk cId="1154527499" sldId="272"/>
-            <ac:spMk id="6" creationId="{3C668BC7-E3E4-7022-BC06-AC9DAB55EFB6}"/>
-          </ac:spMkLst>
-        </pc:spChg>
-        <pc:spChg chg="add mod ord">
-          <ac:chgData name="Dave Sushames" userId="ce71797e-895c-47df-af8e-c160254d5cef" providerId="ADAL" clId="{067FCE3D-3D41-4548-936F-F0A348C85C95}" dt="2026-10-09T05:49:16.368" v="132" actId="700"/>
-          <ac:spMkLst>
-            <pc:docMk/>
-            <pc:sldMk cId="1154527499" sldId="272"/>
-            <ac:spMk id="7" creationId="{62CF6C6B-2DC2-5220-598B-4AC91829D8A3}"/>
-          </ac:spMkLst>
-        </pc:spChg>
-        <pc:spChg chg="add del mod ord">
-          <ac:chgData name="Dave Sushames" userId="ce71797e-895c-47df-af8e-c160254d5cef" providerId="ADAL" clId="{067FCE3D-3D41-4548-936F-F0A348C85C95}" dt="2026-10-09T06:01:41.436" v="167" actId="700"/>
-          <ac:spMkLst>
-            <pc:docMk/>
-            <pc:sldMk cId="1154527499" sldId="272"/>
-            <ac:spMk id="8" creationId="{495F4D30-85DE-ACB4-3293-5E78D99E90FC}"/>
-          </ac:spMkLst>
-        </pc:spChg>
-        <pc:spChg chg="add del mod ord">
-          <ac:chgData name="Dave Sushames" userId="ce71797e-895c-47df-af8e-c160254d5cef" providerId="ADAL" clId="{067FCE3D-3D41-4548-936F-F0A348C85C95}" dt="2026-10-09T06:01:41.436" v="167" actId="700"/>
-          <ac:spMkLst>
-            <pc:docMk/>
-            <pc:sldMk cId="1154527499" sldId="272"/>
-            <ac:spMk id="9" creationId="{76B21AA2-30BF-DFCD-7856-3BFEF3772C83}"/>
-          </ac:spMkLst>
-        </pc:spChg>
-        <pc:spChg chg="add del mod ord">
-          <ac:chgData name="Dave Sushames" userId="ce71797e-895c-47df-af8e-c160254d5cef" providerId="ADAL" clId="{067FCE3D-3D41-4548-936F-F0A348C85C95}" dt="2026-10-09T06:01:41.436" v="167" actId="700"/>
-          <ac:spMkLst>
-            <pc:docMk/>
-            <pc:sldMk cId="1154527499" sldId="272"/>
-            <ac:spMk id="10" creationId="{ED206AEF-4128-8C4E-2911-381B25EA285C}"/>
-          </ac:spMkLst>
-        </pc:spChg>
         <pc:spChg chg="add mod ord">
           <ac:chgData name="Dave Sushames" userId="ce71797e-895c-47df-af8e-c160254d5cef" providerId="ADAL" clId="{067FCE3D-3D41-4548-936F-F0A348C85C95}" dt="2026-10-09T06:11:15.448" v="343" actId="20577"/>
           <ac:spMkLst>
@@ -626,14 +485,6 @@
           <pc:docMk/>
           <pc:sldMk cId="4059292594" sldId="273"/>
         </pc:sldMkLst>
-        <pc:spChg chg="del mod ord">
-          <ac:chgData name="Dave Sushames" userId="ce71797e-895c-47df-af8e-c160254d5cef" providerId="ADAL" clId="{067FCE3D-3D41-4548-936F-F0A348C85C95}" dt="2026-10-09T05:48:23.214" v="125" actId="700"/>
-          <ac:spMkLst>
-            <pc:docMk/>
-            <pc:sldMk cId="4059292594" sldId="273"/>
-            <ac:spMk id="3" creationId="{426C1F42-3331-417E-E9C6-801AF04B9969}"/>
-          </ac:spMkLst>
-        </pc:spChg>
         <pc:spChg chg="add mod ord">
           <ac:chgData name="Dave Sushames" userId="ce71797e-895c-47df-af8e-c160254d5cef" providerId="ADAL" clId="{067FCE3D-3D41-4548-936F-F0A348C85C95}" dt="2026-10-09T05:48:25.795" v="130" actId="20577"/>
           <ac:spMkLst>
@@ -721,30 +572,6 @@
             <ac:spMk id="2" creationId="{6213921F-C378-5717-8F84-82274B401ACD}"/>
           </ac:spMkLst>
         </pc:spChg>
-        <pc:spChg chg="add del mod ord">
-          <ac:chgData name="Dave Sushames" userId="ce71797e-895c-47df-af8e-c160254d5cef" providerId="ADAL" clId="{067FCE3D-3D41-4548-936F-F0A348C85C95}" dt="2026-10-09T06:10:33.940" v="242" actId="22"/>
-          <ac:spMkLst>
-            <pc:docMk/>
-            <pc:sldMk cId="2793174502" sldId="274"/>
-            <ac:spMk id="3" creationId="{36090533-0EBD-E28C-CD35-7D2E3897188E}"/>
-          </ac:spMkLst>
-        </pc:spChg>
-        <pc:spChg chg="del">
-          <ac:chgData name="Dave Sushames" userId="ce71797e-895c-47df-af8e-c160254d5cef" providerId="ADAL" clId="{067FCE3D-3D41-4548-936F-F0A348C85C95}" dt="2026-10-09T05:56:09.360" v="150" actId="700"/>
-          <ac:spMkLst>
-            <pc:docMk/>
-            <pc:sldMk cId="2793174502" sldId="274"/>
-            <ac:spMk id="3" creationId="{8C7F857D-10B8-324D-CC6D-959B04B6D84F}"/>
-          </ac:spMkLst>
-        </pc:spChg>
-        <pc:spChg chg="add del mod ord">
-          <ac:chgData name="Dave Sushames" userId="ce71797e-895c-47df-af8e-c160254d5cef" providerId="ADAL" clId="{067FCE3D-3D41-4548-936F-F0A348C85C95}" dt="2026-10-09T06:10:28.460" v="239" actId="700"/>
-          <ac:spMkLst>
-            <pc:docMk/>
-            <pc:sldMk cId="2793174502" sldId="274"/>
-            <ac:spMk id="4" creationId="{92424CFA-B944-CACE-7AA1-942103BA12D3}"/>
-          </ac:spMkLst>
-        </pc:spChg>
         <pc:spChg chg="add mod ord">
           <ac:chgData name="Dave Sushames" userId="ce71797e-895c-47df-af8e-c160254d5cef" providerId="ADAL" clId="{067FCE3D-3D41-4548-936F-F0A348C85C95}" dt="2026-10-09T06:15:57.252" v="427" actId="20577"/>
           <ac:spMkLst>
@@ -753,14 +580,6 @@
             <ac:spMk id="5" creationId="{F3E6C80E-6187-ECB8-33E1-ED7C9CD93D1C}"/>
           </ac:spMkLst>
         </pc:spChg>
-        <pc:picChg chg="add del mod">
-          <ac:chgData name="Dave Sushames" userId="ce71797e-895c-47df-af8e-c160254d5cef" providerId="ADAL" clId="{067FCE3D-3D41-4548-936F-F0A348C85C95}" dt="2026-10-09T06:10:31.857" v="241" actId="21"/>
-          <ac:picMkLst>
-            <pc:docMk/>
-            <pc:sldMk cId="2793174502" sldId="274"/>
-            <ac:picMk id="6" creationId="{221F55CF-B329-DB3D-6F0E-5BB6D7FDDE3C}"/>
-          </ac:picMkLst>
-        </pc:picChg>
         <pc:picChg chg="add mod">
           <ac:chgData name="Dave Sushames" userId="ce71797e-895c-47df-af8e-c160254d5cef" providerId="ADAL" clId="{067FCE3D-3D41-4548-936F-F0A348C85C95}" dt="2026-10-09T06:10:33.940" v="242" actId="22"/>
           <ac:picMkLst>
@@ -771,41 +590,17 @@
         </pc:picChg>
       </pc:sldChg>
       <pc:sldChg chg="addSp delSp modSp new mod modClrScheme chgLayout">
-        <pc:chgData name="Dave Sushames" userId="ce71797e-895c-47df-af8e-c160254d5cef" providerId="ADAL" clId="{067FCE3D-3D41-4548-936F-F0A348C85C95}" dt="2026-10-09T06:16:31.511" v="429" actId="1076"/>
+        <pc:chgData name="Dave Sushames" userId="ce71797e-895c-47df-af8e-c160254d5cef" providerId="ADAL" clId="{067FCE3D-3D41-4548-936F-F0A348C85C95}" dt="2026-10-25T20:13:48.873" v="463" actId="20577"/>
         <pc:sldMkLst>
           <pc:docMk/>
           <pc:sldMk cId="592013568" sldId="275"/>
         </pc:sldMkLst>
-        <pc:spChg chg="del mod ord">
-          <ac:chgData name="Dave Sushames" userId="ce71797e-895c-47df-af8e-c160254d5cef" providerId="ADAL" clId="{067FCE3D-3D41-4548-936F-F0A348C85C95}" dt="2026-10-09T06:02:37.123" v="172" actId="700"/>
-          <ac:spMkLst>
-            <pc:docMk/>
-            <pc:sldMk cId="592013568" sldId="275"/>
-            <ac:spMk id="2" creationId="{6F45554D-F7AB-8228-0C53-6EFE473553E3}"/>
-          </ac:spMkLst>
-        </pc:spChg>
-        <pc:spChg chg="del mod ord">
-          <ac:chgData name="Dave Sushames" userId="ce71797e-895c-47df-af8e-c160254d5cef" providerId="ADAL" clId="{067FCE3D-3D41-4548-936F-F0A348C85C95}" dt="2026-10-09T06:02:37.123" v="172" actId="700"/>
-          <ac:spMkLst>
-            <pc:docMk/>
-            <pc:sldMk cId="592013568" sldId="275"/>
-            <ac:spMk id="3" creationId="{3A07E54C-80DC-599B-C8B1-AC03217EDC80}"/>
-          </ac:spMkLst>
-        </pc:spChg>
         <pc:spChg chg="add mod ord">
           <ac:chgData name="Dave Sushames" userId="ce71797e-895c-47df-af8e-c160254d5cef" providerId="ADAL" clId="{067FCE3D-3D41-4548-936F-F0A348C85C95}" dt="2026-10-09T06:02:42.188" v="188" actId="20577"/>
           <ac:spMkLst>
             <pc:docMk/>
             <pc:sldMk cId="592013568" sldId="275"/>
             <ac:spMk id="4" creationId="{A1AA5498-5ACC-51F4-FFD4-E2279D7F9BBE}"/>
-          </ac:spMkLst>
-        </pc:spChg>
-        <pc:spChg chg="add del mod ord">
-          <ac:chgData name="Dave Sushames" userId="ce71797e-895c-47df-af8e-c160254d5cef" providerId="ADAL" clId="{067FCE3D-3D41-4548-936F-F0A348C85C95}" dt="2026-10-09T06:14:45.749" v="348"/>
-          <ac:spMkLst>
-            <pc:docMk/>
-            <pc:sldMk cId="592013568" sldId="275"/>
-            <ac:spMk id="5" creationId="{1200F148-900D-713A-B436-B60383629C3D}"/>
           </ac:spMkLst>
         </pc:spChg>
         <pc:spChg chg="add mod ord">
@@ -817,19 +612,11 @@
           </ac:spMkLst>
         </pc:spChg>
         <pc:spChg chg="add mod ord">
-          <ac:chgData name="Dave Sushames" userId="ce71797e-895c-47df-af8e-c160254d5cef" providerId="ADAL" clId="{067FCE3D-3D41-4548-936F-F0A348C85C95}" dt="2026-10-09T06:15:29.359" v="370" actId="20577"/>
+          <ac:chgData name="Dave Sushames" userId="ce71797e-895c-47df-af8e-c160254d5cef" providerId="ADAL" clId="{067FCE3D-3D41-4548-936F-F0A348C85C95}" dt="2026-10-25T20:13:15.760" v="460"/>
           <ac:spMkLst>
             <pc:docMk/>
             <pc:sldMk cId="592013568" sldId="275"/>
             <ac:spMk id="7" creationId="{264A6331-DE91-7A78-6150-8D6E0AA663A2}"/>
-          </ac:spMkLst>
-        </pc:spChg>
-        <pc:spChg chg="add del mod ord">
-          <ac:chgData name="Dave Sushames" userId="ce71797e-895c-47df-af8e-c160254d5cef" providerId="ADAL" clId="{067FCE3D-3D41-4548-936F-F0A348C85C95}" dt="2026-10-09T06:14:35.164" v="347" actId="22"/>
-          <ac:spMkLst>
-            <pc:docMk/>
-            <pc:sldMk cId="592013568" sldId="275"/>
-            <ac:spMk id="8" creationId="{B5E1D4A3-3F75-9EC3-62B5-49B8B3EA2CF9}"/>
           </ac:spMkLst>
         </pc:spChg>
         <pc:spChg chg="add mod ord">
@@ -841,19 +628,11 @@
           </ac:spMkLst>
         </pc:spChg>
         <pc:spChg chg="add mod ord">
-          <ac:chgData name="Dave Sushames" userId="ce71797e-895c-47df-af8e-c160254d5cef" providerId="ADAL" clId="{067FCE3D-3D41-4548-936F-F0A348C85C95}" dt="2026-10-09T06:15:36.781" v="395" actId="6549"/>
+          <ac:chgData name="Dave Sushames" userId="ce71797e-895c-47df-af8e-c160254d5cef" providerId="ADAL" clId="{067FCE3D-3D41-4548-936F-F0A348C85C95}" dt="2026-10-25T20:13:26.840" v="461"/>
           <ac:spMkLst>
             <pc:docMk/>
             <pc:sldMk cId="592013568" sldId="275"/>
             <ac:spMk id="10" creationId="{BC8EC63E-D4B2-BF88-FC3A-7BFEFE44B921}"/>
-          </ac:spMkLst>
-        </pc:spChg>
-        <pc:spChg chg="del">
-          <ac:chgData name="Dave Sushames" userId="ce71797e-895c-47df-af8e-c160254d5cef" providerId="ADAL" clId="{067FCE3D-3D41-4548-936F-F0A348C85C95}" dt="2026-10-09T06:15:10.970" v="349"/>
-          <ac:spMkLst>
-            <pc:docMk/>
-            <pc:sldMk cId="592013568" sldId="275"/>
-            <ac:spMk id="11" creationId="{A40DA5DB-CA71-26F6-4FD8-4FB3551A7D5C}"/>
           </ac:spMkLst>
         </pc:spChg>
         <pc:spChg chg="add mod ord">
@@ -865,21 +644,13 @@
           </ac:spMkLst>
         </pc:spChg>
         <pc:spChg chg="mod">
-          <ac:chgData name="Dave Sushames" userId="ce71797e-895c-47df-af8e-c160254d5cef" providerId="ADAL" clId="{067FCE3D-3D41-4548-936F-F0A348C85C95}" dt="2026-10-09T06:15:42.725" v="419" actId="20577"/>
+          <ac:chgData name="Dave Sushames" userId="ce71797e-895c-47df-af8e-c160254d5cef" providerId="ADAL" clId="{067FCE3D-3D41-4548-936F-F0A348C85C95}" dt="2026-10-25T20:13:48.873" v="463" actId="20577"/>
           <ac:spMkLst>
             <pc:docMk/>
             <pc:sldMk cId="592013568" sldId="275"/>
             <ac:spMk id="13" creationId="{C8C0282B-DD42-3641-8EC4-D2D894BBD3F4}"/>
           </ac:spMkLst>
         </pc:spChg>
-        <pc:picChg chg="add del">
-          <ac:chgData name="Dave Sushames" userId="ce71797e-895c-47df-af8e-c160254d5cef" providerId="ADAL" clId="{067FCE3D-3D41-4548-936F-F0A348C85C95}" dt="2026-10-09T06:14:32.584" v="346" actId="21"/>
-          <ac:picMkLst>
-            <pc:docMk/>
-            <pc:sldMk cId="592013568" sldId="275"/>
-            <ac:picMk id="14" creationId="{8ADBA604-AA20-8640-3DB5-7ACA5182062C}"/>
-          </ac:picMkLst>
-        </pc:picChg>
         <pc:picChg chg="add mod">
           <ac:chgData name="Dave Sushames" userId="ce71797e-895c-47df-af8e-c160254d5cef" providerId="ADAL" clId="{067FCE3D-3D41-4548-936F-F0A348C85C95}" dt="2026-10-09T06:14:35.164" v="347" actId="22"/>
           <ac:picMkLst>
@@ -905,476 +676,20 @@
           </ac:picMkLst>
         </pc:picChg>
       </pc:sldChg>
-      <pc:sldMasterChg chg="del delSldLayout">
-        <pc:chgData name="Dave Sushames" userId="ce71797e-895c-47df-af8e-c160254d5cef" providerId="ADAL" clId="{067FCE3D-3D41-4548-936F-F0A348C85C95}" dt="2026-10-09T05:47:56.178" v="121" actId="700"/>
-        <pc:sldMasterMkLst>
-          <pc:docMk/>
-          <pc:sldMasterMk cId="677282101" sldId="2147483648"/>
-        </pc:sldMasterMkLst>
-        <pc:sldLayoutChg chg="del">
-          <pc:chgData name="Dave Sushames" userId="ce71797e-895c-47df-af8e-c160254d5cef" providerId="ADAL" clId="{067FCE3D-3D41-4548-936F-F0A348C85C95}" dt="2026-10-09T05:47:56.178" v="121" actId="700"/>
-          <pc:sldLayoutMkLst>
-            <pc:docMk/>
-            <pc:sldMasterMk cId="677282101" sldId="2147483648"/>
-            <pc:sldLayoutMk cId="3830580774" sldId="2147483649"/>
-          </pc:sldLayoutMkLst>
-        </pc:sldLayoutChg>
-        <pc:sldLayoutChg chg="del">
-          <pc:chgData name="Dave Sushames" userId="ce71797e-895c-47df-af8e-c160254d5cef" providerId="ADAL" clId="{067FCE3D-3D41-4548-936F-F0A348C85C95}" dt="2026-10-09T05:47:56.178" v="121" actId="700"/>
-          <pc:sldLayoutMkLst>
-            <pc:docMk/>
-            <pc:sldMasterMk cId="677282101" sldId="2147483648"/>
-            <pc:sldLayoutMk cId="4040379774" sldId="2147483650"/>
-          </pc:sldLayoutMkLst>
-        </pc:sldLayoutChg>
-        <pc:sldLayoutChg chg="del">
-          <pc:chgData name="Dave Sushames" userId="ce71797e-895c-47df-af8e-c160254d5cef" providerId="ADAL" clId="{067FCE3D-3D41-4548-936F-F0A348C85C95}" dt="2026-10-09T05:47:56.178" v="121" actId="700"/>
-          <pc:sldLayoutMkLst>
-            <pc:docMk/>
-            <pc:sldMasterMk cId="677282101" sldId="2147483648"/>
-            <pc:sldLayoutMk cId="2749669535" sldId="2147483651"/>
-          </pc:sldLayoutMkLst>
-        </pc:sldLayoutChg>
-        <pc:sldLayoutChg chg="del">
-          <pc:chgData name="Dave Sushames" userId="ce71797e-895c-47df-af8e-c160254d5cef" providerId="ADAL" clId="{067FCE3D-3D41-4548-936F-F0A348C85C95}" dt="2026-10-09T05:47:56.178" v="121" actId="700"/>
-          <pc:sldLayoutMkLst>
-            <pc:docMk/>
-            <pc:sldMasterMk cId="677282101" sldId="2147483648"/>
-            <pc:sldLayoutMk cId="2419024222" sldId="2147483652"/>
-          </pc:sldLayoutMkLst>
-        </pc:sldLayoutChg>
-        <pc:sldLayoutChg chg="del">
-          <pc:chgData name="Dave Sushames" userId="ce71797e-895c-47df-af8e-c160254d5cef" providerId="ADAL" clId="{067FCE3D-3D41-4548-936F-F0A348C85C95}" dt="2026-10-09T05:47:56.178" v="121" actId="700"/>
-          <pc:sldLayoutMkLst>
-            <pc:docMk/>
-            <pc:sldMasterMk cId="677282101" sldId="2147483648"/>
-            <pc:sldLayoutMk cId="1866955294" sldId="2147483653"/>
-          </pc:sldLayoutMkLst>
-        </pc:sldLayoutChg>
-        <pc:sldLayoutChg chg="del">
-          <pc:chgData name="Dave Sushames" userId="ce71797e-895c-47df-af8e-c160254d5cef" providerId="ADAL" clId="{067FCE3D-3D41-4548-936F-F0A348C85C95}" dt="2026-10-09T05:47:56.178" v="121" actId="700"/>
-          <pc:sldLayoutMkLst>
-            <pc:docMk/>
-            <pc:sldMasterMk cId="677282101" sldId="2147483648"/>
-            <pc:sldLayoutMk cId="1262515453" sldId="2147483654"/>
-          </pc:sldLayoutMkLst>
-        </pc:sldLayoutChg>
-        <pc:sldLayoutChg chg="del">
-          <pc:chgData name="Dave Sushames" userId="ce71797e-895c-47df-af8e-c160254d5cef" providerId="ADAL" clId="{067FCE3D-3D41-4548-936F-F0A348C85C95}" dt="2026-10-09T05:47:56.178" v="121" actId="700"/>
-          <pc:sldLayoutMkLst>
-            <pc:docMk/>
-            <pc:sldMasterMk cId="677282101" sldId="2147483648"/>
-            <pc:sldLayoutMk cId="1318080238" sldId="2147483655"/>
-          </pc:sldLayoutMkLst>
-        </pc:sldLayoutChg>
-        <pc:sldLayoutChg chg="del">
-          <pc:chgData name="Dave Sushames" userId="ce71797e-895c-47df-af8e-c160254d5cef" providerId="ADAL" clId="{067FCE3D-3D41-4548-936F-F0A348C85C95}" dt="2026-10-09T05:47:56.178" v="121" actId="700"/>
-          <pc:sldLayoutMkLst>
-            <pc:docMk/>
-            <pc:sldMasterMk cId="677282101" sldId="2147483648"/>
-            <pc:sldLayoutMk cId="3867010873" sldId="2147483656"/>
-          </pc:sldLayoutMkLst>
-        </pc:sldLayoutChg>
-        <pc:sldLayoutChg chg="del">
-          <pc:chgData name="Dave Sushames" userId="ce71797e-895c-47df-af8e-c160254d5cef" providerId="ADAL" clId="{067FCE3D-3D41-4548-936F-F0A348C85C95}" dt="2026-10-09T05:47:56.178" v="121" actId="700"/>
-          <pc:sldLayoutMkLst>
-            <pc:docMk/>
-            <pc:sldMasterMk cId="677282101" sldId="2147483648"/>
-            <pc:sldLayoutMk cId="2516350719" sldId="2147483657"/>
-          </pc:sldLayoutMkLst>
-        </pc:sldLayoutChg>
-        <pc:sldLayoutChg chg="del">
-          <pc:chgData name="Dave Sushames" userId="ce71797e-895c-47df-af8e-c160254d5cef" providerId="ADAL" clId="{067FCE3D-3D41-4548-936F-F0A348C85C95}" dt="2026-10-09T05:47:56.178" v="121" actId="700"/>
-          <pc:sldLayoutMkLst>
-            <pc:docMk/>
-            <pc:sldMasterMk cId="677282101" sldId="2147483648"/>
-            <pc:sldLayoutMk cId="448609026" sldId="2147483658"/>
-          </pc:sldLayoutMkLst>
-        </pc:sldLayoutChg>
-        <pc:sldLayoutChg chg="del">
-          <pc:chgData name="Dave Sushames" userId="ce71797e-895c-47df-af8e-c160254d5cef" providerId="ADAL" clId="{067FCE3D-3D41-4548-936F-F0A348C85C95}" dt="2026-10-09T05:47:56.178" v="121" actId="700"/>
-          <pc:sldLayoutMkLst>
-            <pc:docMk/>
-            <pc:sldMasterMk cId="677282101" sldId="2147483648"/>
-            <pc:sldLayoutMk cId="2427831258" sldId="2147483659"/>
-          </pc:sldLayoutMkLst>
-        </pc:sldLayoutChg>
-      </pc:sldMasterChg>
-      <pc:sldMasterChg chg="new mod addSldLayout modSldLayout">
-        <pc:chgData name="Dave Sushames" userId="ce71797e-895c-47df-af8e-c160254d5cef" providerId="ADAL" clId="{067FCE3D-3D41-4548-936F-F0A348C85C95}" dt="2026-10-09T06:20:29.622" v="434"/>
+      <pc:sldMasterChg chg="addSp modSp new mod addSldLayout modSldLayout">
+        <pc:chgData name="Dave Sushames" userId="ce71797e-895c-47df-af8e-c160254d5cef" providerId="ADAL" clId="{067FCE3D-3D41-4548-936F-F0A348C85C95}" dt="2026-10-25T20:26:32.758" v="471" actId="1076"/>
         <pc:sldMasterMkLst>
           <pc:docMk/>
           <pc:sldMasterMk cId="3226123621" sldId="2147483660"/>
         </pc:sldMasterMkLst>
-        <pc:sldLayoutChg chg="new replId">
-          <pc:chgData name="Dave Sushames" userId="ce71797e-895c-47df-af8e-c160254d5cef" providerId="ADAL" clId="{067FCE3D-3D41-4548-936F-F0A348C85C95}" dt="2026-10-09T05:45:21.239" v="101" actId="6938"/>
-          <pc:sldLayoutMkLst>
+        <pc:picChg chg="add mod modCrop">
+          <ac:chgData name="Dave Sushames" userId="ce71797e-895c-47df-af8e-c160254d5cef" providerId="ADAL" clId="{067FCE3D-3D41-4548-936F-F0A348C85C95}" dt="2026-10-25T20:26:32.758" v="471" actId="1076"/>
+          <ac:picMkLst>
             <pc:docMk/>
             <pc:sldMasterMk cId="3226123621" sldId="2147483660"/>
-            <pc:sldLayoutMk cId="3131114804" sldId="2147483661"/>
-          </pc:sldLayoutMkLst>
-        </pc:sldLayoutChg>
-        <pc:sldLayoutChg chg="new replId">
-          <pc:chgData name="Dave Sushames" userId="ce71797e-895c-47df-af8e-c160254d5cef" providerId="ADAL" clId="{067FCE3D-3D41-4548-936F-F0A348C85C95}" dt="2026-10-09T05:45:21.239" v="101" actId="6938"/>
-          <pc:sldLayoutMkLst>
-            <pc:docMk/>
-            <pc:sldMasterMk cId="3226123621" sldId="2147483660"/>
-            <pc:sldLayoutMk cId="536891065" sldId="2147483662"/>
-          </pc:sldLayoutMkLst>
-        </pc:sldLayoutChg>
-        <pc:sldLayoutChg chg="addSp delSp modSp mod">
-          <pc:chgData name="Dave Sushames" userId="ce71797e-895c-47df-af8e-c160254d5cef" providerId="ADAL" clId="{067FCE3D-3D41-4548-936F-F0A348C85C95}" dt="2026-10-09T06:20:29.622" v="434"/>
-          <pc:sldLayoutMkLst>
-            <pc:docMk/>
-            <pc:sldMasterMk cId="3226123621" sldId="2147483660"/>
-            <pc:sldLayoutMk cId="2969111130" sldId="2147483662"/>
-          </pc:sldLayoutMkLst>
-          <pc:spChg chg="add del mod">
-            <ac:chgData name="Dave Sushames" userId="ce71797e-895c-47df-af8e-c160254d5cef" providerId="ADAL" clId="{067FCE3D-3D41-4548-936F-F0A348C85C95}" dt="2026-10-09T06:20:29.622" v="434"/>
-            <ac:spMkLst>
-              <pc:docMk/>
-              <pc:sldMasterMk cId="3226123621" sldId="2147483660"/>
-              <pc:sldLayoutMk cId="2969111130" sldId="2147483662"/>
-              <ac:spMk id="2" creationId="{565B7530-C79A-DA88-585B-BBEC549A064E}"/>
-            </ac:spMkLst>
-          </pc:spChg>
-        </pc:sldLayoutChg>
-        <pc:sldLayoutChg chg="new replId">
-          <pc:chgData name="Dave Sushames" userId="ce71797e-895c-47df-af8e-c160254d5cef" providerId="ADAL" clId="{067FCE3D-3D41-4548-936F-F0A348C85C95}" dt="2026-10-09T05:45:21.239" v="101" actId="6938"/>
-          <pc:sldLayoutMkLst>
-            <pc:docMk/>
-            <pc:sldMasterMk cId="3226123621" sldId="2147483660"/>
-            <pc:sldLayoutMk cId="3575317667" sldId="2147483663"/>
-          </pc:sldLayoutMkLst>
-        </pc:sldLayoutChg>
-        <pc:sldLayoutChg chg="new replId">
-          <pc:chgData name="Dave Sushames" userId="ce71797e-895c-47df-af8e-c160254d5cef" providerId="ADAL" clId="{067FCE3D-3D41-4548-936F-F0A348C85C95}" dt="2026-10-09T05:45:21.239" v="101" actId="6938"/>
-          <pc:sldLayoutMkLst>
-            <pc:docMk/>
-            <pc:sldMasterMk cId="3226123621" sldId="2147483660"/>
-            <pc:sldLayoutMk cId="2348893793" sldId="2147483664"/>
-          </pc:sldLayoutMkLst>
-        </pc:sldLayoutChg>
-        <pc:sldLayoutChg chg="new replId">
-          <pc:chgData name="Dave Sushames" userId="ce71797e-895c-47df-af8e-c160254d5cef" providerId="ADAL" clId="{067FCE3D-3D41-4548-936F-F0A348C85C95}" dt="2026-10-09T05:45:21.239" v="101" actId="6938"/>
-          <pc:sldLayoutMkLst>
-            <pc:docMk/>
-            <pc:sldMasterMk cId="3226123621" sldId="2147483660"/>
-            <pc:sldLayoutMk cId="439185683" sldId="2147483665"/>
-          </pc:sldLayoutMkLst>
-        </pc:sldLayoutChg>
-        <pc:sldLayoutChg chg="new replId">
-          <pc:chgData name="Dave Sushames" userId="ce71797e-895c-47df-af8e-c160254d5cef" providerId="ADAL" clId="{067FCE3D-3D41-4548-936F-F0A348C85C95}" dt="2026-10-09T05:45:21.239" v="101" actId="6938"/>
-          <pc:sldLayoutMkLst>
-            <pc:docMk/>
-            <pc:sldMasterMk cId="3226123621" sldId="2147483660"/>
-            <pc:sldLayoutMk cId="950775474" sldId="2147483666"/>
-          </pc:sldLayoutMkLst>
-        </pc:sldLayoutChg>
-        <pc:sldLayoutChg chg="new replId">
-          <pc:chgData name="Dave Sushames" userId="ce71797e-895c-47df-af8e-c160254d5cef" providerId="ADAL" clId="{067FCE3D-3D41-4548-936F-F0A348C85C95}" dt="2026-10-09T05:45:21.239" v="101" actId="6938"/>
-          <pc:sldLayoutMkLst>
-            <pc:docMk/>
-            <pc:sldMasterMk cId="3226123621" sldId="2147483660"/>
-            <pc:sldLayoutMk cId="1872892137" sldId="2147483667"/>
-          </pc:sldLayoutMkLst>
-        </pc:sldLayoutChg>
-        <pc:sldLayoutChg chg="new replId">
-          <pc:chgData name="Dave Sushames" userId="ce71797e-895c-47df-af8e-c160254d5cef" providerId="ADAL" clId="{067FCE3D-3D41-4548-936F-F0A348C85C95}" dt="2026-10-09T05:45:21.239" v="101" actId="6938"/>
-          <pc:sldLayoutMkLst>
-            <pc:docMk/>
-            <pc:sldMasterMk cId="3226123621" sldId="2147483660"/>
-            <pc:sldLayoutMk cId="3863960493" sldId="2147483668"/>
-          </pc:sldLayoutMkLst>
-        </pc:sldLayoutChg>
-        <pc:sldLayoutChg chg="new replId">
-          <pc:chgData name="Dave Sushames" userId="ce71797e-895c-47df-af8e-c160254d5cef" providerId="ADAL" clId="{067FCE3D-3D41-4548-936F-F0A348C85C95}" dt="2026-10-09T05:45:21.239" v="101" actId="6938"/>
-          <pc:sldLayoutMkLst>
-            <pc:docMk/>
-            <pc:sldMasterMk cId="3226123621" sldId="2147483660"/>
-            <pc:sldLayoutMk cId="3094074604" sldId="2147483669"/>
-          </pc:sldLayoutMkLst>
-        </pc:sldLayoutChg>
-        <pc:sldLayoutChg chg="new replId">
-          <pc:chgData name="Dave Sushames" userId="ce71797e-895c-47df-af8e-c160254d5cef" providerId="ADAL" clId="{067FCE3D-3D41-4548-936F-F0A348C85C95}" dt="2026-10-09T05:45:21.239" v="101" actId="6938"/>
-          <pc:sldLayoutMkLst>
-            <pc:docMk/>
-            <pc:sldMasterMk cId="3226123621" sldId="2147483660"/>
-            <pc:sldLayoutMk cId="3478001791" sldId="2147483670"/>
-          </pc:sldLayoutMkLst>
-        </pc:sldLayoutChg>
-        <pc:sldLayoutChg chg="new replId">
-          <pc:chgData name="Dave Sushames" userId="ce71797e-895c-47df-af8e-c160254d5cef" providerId="ADAL" clId="{067FCE3D-3D41-4548-936F-F0A348C85C95}" dt="2026-10-09T05:45:21.239" v="101" actId="6938"/>
-          <pc:sldLayoutMkLst>
-            <pc:docMk/>
-            <pc:sldMasterMk cId="3226123621" sldId="2147483660"/>
-            <pc:sldLayoutMk cId="2341676302" sldId="2147483671"/>
-          </pc:sldLayoutMkLst>
-        </pc:sldLayoutChg>
-        <pc:sldLayoutChg chg="addSp modSp mod">
-          <pc:chgData name="Dave Sushames" userId="ce71797e-895c-47df-af8e-c160254d5cef" providerId="ADAL" clId="{067FCE3D-3D41-4548-936F-F0A348C85C95}" dt="2026-10-09T06:19:43.457" v="430"/>
-          <pc:sldLayoutMkLst>
-            <pc:docMk/>
-            <pc:sldMasterMk cId="3226123621" sldId="2147483660"/>
-            <pc:sldLayoutMk cId="3003048432" sldId="2147483682"/>
-          </pc:sldLayoutMkLst>
-          <pc:spChg chg="mod">
-            <ac:chgData name="Dave Sushames" userId="ce71797e-895c-47df-af8e-c160254d5cef" providerId="ADAL" clId="{067FCE3D-3D41-4548-936F-F0A348C85C95}" dt="2026-10-09T06:05:18.092" v="228" actId="368"/>
-            <ac:spMkLst>
-              <pc:docMk/>
-              <pc:sldMasterMk cId="3226123621" sldId="2147483660"/>
-              <pc:sldLayoutMk cId="3003048432" sldId="2147483682"/>
-              <ac:spMk id="3" creationId="{00000000-0000-0000-0000-000000000000}"/>
-            </ac:spMkLst>
-          </pc:spChg>
-          <pc:spChg chg="mod">
-            <ac:chgData name="Dave Sushames" userId="ce71797e-895c-47df-af8e-c160254d5cef" providerId="ADAL" clId="{067FCE3D-3D41-4548-936F-F0A348C85C95}" dt="2026-10-09T06:09:47.887" v="238" actId="207"/>
-            <ac:spMkLst>
-              <pc:docMk/>
-              <pc:sldMasterMk cId="3226123621" sldId="2147483660"/>
-              <pc:sldLayoutMk cId="3003048432" sldId="2147483682"/>
-              <ac:spMk id="5" creationId="{00000000-0000-0000-0000-000000000000}"/>
-            </ac:spMkLst>
-          </pc:spChg>
-          <pc:spChg chg="mod">
-            <ac:chgData name="Dave Sushames" userId="ce71797e-895c-47df-af8e-c160254d5cef" providerId="ADAL" clId="{067FCE3D-3D41-4548-936F-F0A348C85C95}" dt="2026-10-09T06:06:18.142" v="233" actId="207"/>
-            <ac:spMkLst>
-              <pc:docMk/>
-              <pc:sldMasterMk cId="3226123621" sldId="2147483660"/>
-              <pc:sldLayoutMk cId="3003048432" sldId="2147483682"/>
-              <ac:spMk id="9" creationId="{00000000-0000-0000-0000-000000000000}"/>
-            </ac:spMkLst>
-          </pc:spChg>
-          <pc:spChg chg="mod">
-            <ac:chgData name="Dave Sushames" userId="ce71797e-895c-47df-af8e-c160254d5cef" providerId="ADAL" clId="{067FCE3D-3D41-4548-936F-F0A348C85C95}" dt="2026-10-09T06:06:30.801" v="234" actId="207"/>
-            <ac:spMkLst>
-              <pc:docMk/>
-              <pc:sldMasterMk cId="3226123621" sldId="2147483660"/>
-              <pc:sldLayoutMk cId="3003048432" sldId="2147483682"/>
-              <ac:spMk id="13" creationId="{00000000-0000-0000-0000-000000000000}"/>
-            </ac:spMkLst>
-          </pc:spChg>
-          <pc:spChg chg="add mod">
-            <ac:chgData name="Dave Sushames" userId="ce71797e-895c-47df-af8e-c160254d5cef" providerId="ADAL" clId="{067FCE3D-3D41-4548-936F-F0A348C85C95}" dt="2026-10-09T06:19:43.457" v="430"/>
-            <ac:spMkLst>
-              <pc:docMk/>
-              <pc:sldMasterMk cId="3226123621" sldId="2147483660"/>
-              <pc:sldLayoutMk cId="3003048432" sldId="2147483682"/>
-              <ac:spMk id="15" creationId="{67978A8F-F49F-A572-9900-598DB015BA08}"/>
-            </ac:spMkLst>
-          </pc:spChg>
-          <pc:spChg chg="add mod">
-            <ac:chgData name="Dave Sushames" userId="ce71797e-895c-47df-af8e-c160254d5cef" providerId="ADAL" clId="{067FCE3D-3D41-4548-936F-F0A348C85C95}" dt="2026-10-09T06:19:43.457" v="430"/>
-            <ac:spMkLst>
-              <pc:docMk/>
-              <pc:sldMasterMk cId="3226123621" sldId="2147483660"/>
-              <pc:sldLayoutMk cId="3003048432" sldId="2147483682"/>
-              <ac:spMk id="16" creationId="{42F6A671-B033-AB25-891E-BD4090C52A58}"/>
-            </ac:spMkLst>
-          </pc:spChg>
-          <pc:spChg chg="add mod">
-            <ac:chgData name="Dave Sushames" userId="ce71797e-895c-47df-af8e-c160254d5cef" providerId="ADAL" clId="{067FCE3D-3D41-4548-936F-F0A348C85C95}" dt="2026-10-09T06:19:43.457" v="430"/>
-            <ac:spMkLst>
-              <pc:docMk/>
-              <pc:sldMasterMk cId="3226123621" sldId="2147483660"/>
-              <pc:sldLayoutMk cId="3003048432" sldId="2147483682"/>
-              <ac:spMk id="17" creationId="{DD812283-161E-1E9E-19A4-FE9CC59C3478}"/>
-            </ac:spMkLst>
-          </pc:spChg>
-        </pc:sldLayoutChg>
-        <pc:sldLayoutChg chg="addSp modSp mod">
-          <pc:chgData name="Dave Sushames" userId="ce71797e-895c-47df-af8e-c160254d5cef" providerId="ADAL" clId="{067FCE3D-3D41-4548-936F-F0A348C85C95}" dt="2026-10-09T06:20:12.233" v="431"/>
-          <pc:sldLayoutMkLst>
-            <pc:docMk/>
-            <pc:sldMasterMk cId="3226123621" sldId="2147483660"/>
-            <pc:sldLayoutMk cId="3550624814" sldId="2147483683"/>
-          </pc:sldLayoutMkLst>
-          <pc:spChg chg="mod">
-            <ac:chgData name="Dave Sushames" userId="ce71797e-895c-47df-af8e-c160254d5cef" providerId="ADAL" clId="{067FCE3D-3D41-4548-936F-F0A348C85C95}" dt="2026-10-09T06:01:59.202" v="170" actId="14100"/>
-            <ac:spMkLst>
-              <pc:docMk/>
-              <pc:sldMasterMk cId="3226123621" sldId="2147483660"/>
-              <pc:sldLayoutMk cId="3550624814" sldId="2147483683"/>
-              <ac:spMk id="3" creationId="{00000000-0000-0000-0000-000000000000}"/>
-            </ac:spMkLst>
-          </pc:spChg>
-          <pc:spChg chg="mod">
-            <ac:chgData name="Dave Sushames" userId="ce71797e-895c-47df-af8e-c160254d5cef" providerId="ADAL" clId="{067FCE3D-3D41-4548-936F-F0A348C85C95}" dt="2026-10-09T06:00:49.274" v="160" actId="207"/>
-            <ac:spMkLst>
-              <pc:docMk/>
-              <pc:sldMasterMk cId="3226123621" sldId="2147483660"/>
-              <pc:sldLayoutMk cId="3550624814" sldId="2147483683"/>
-              <ac:spMk id="6" creationId="{00000000-0000-0000-0000-000000000000}"/>
-            </ac:spMkLst>
-          </pc:spChg>
-          <pc:spChg chg="mod">
-            <ac:chgData name="Dave Sushames" userId="ce71797e-895c-47df-af8e-c160254d5cef" providerId="ADAL" clId="{067FCE3D-3D41-4548-936F-F0A348C85C95}" dt="2026-10-09T06:00:52.846" v="161" actId="207"/>
-            <ac:spMkLst>
-              <pc:docMk/>
-              <pc:sldMasterMk cId="3226123621" sldId="2147483660"/>
-              <pc:sldLayoutMk cId="3550624814" sldId="2147483683"/>
-              <ac:spMk id="10" creationId="{00000000-0000-0000-0000-000000000000}"/>
-            </ac:spMkLst>
-          </pc:spChg>
-          <pc:spChg chg="mod">
-            <ac:chgData name="Dave Sushames" userId="ce71797e-895c-47df-af8e-c160254d5cef" providerId="ADAL" clId="{067FCE3D-3D41-4548-936F-F0A348C85C95}" dt="2026-10-09T06:00:55.854" v="162" actId="207"/>
-            <ac:spMkLst>
-              <pc:docMk/>
-              <pc:sldMasterMk cId="3226123621" sldId="2147483660"/>
-              <pc:sldLayoutMk cId="3550624814" sldId="2147483683"/>
-              <ac:spMk id="14" creationId="{00000000-0000-0000-0000-000000000000}"/>
-            </ac:spMkLst>
-          </pc:spChg>
-          <pc:spChg chg="mod">
-            <ac:chgData name="Dave Sushames" userId="ce71797e-895c-47df-af8e-c160254d5cef" providerId="ADAL" clId="{067FCE3D-3D41-4548-936F-F0A348C85C95}" dt="2026-10-09T06:01:05.386" v="164" actId="207"/>
-            <ac:spMkLst>
-              <pc:docMk/>
-              <pc:sldMasterMk cId="3226123621" sldId="2147483660"/>
-              <pc:sldLayoutMk cId="3550624814" sldId="2147483683"/>
-              <ac:spMk id="18" creationId="{00000000-0000-0000-0000-000000000000}"/>
-            </ac:spMkLst>
-          </pc:spChg>
-          <pc:spChg chg="mod">
-            <ac:chgData name="Dave Sushames" userId="ce71797e-895c-47df-af8e-c160254d5cef" providerId="ADAL" clId="{067FCE3D-3D41-4548-936F-F0A348C85C95}" dt="2026-10-09T06:01:22.308" v="165" actId="207"/>
-            <ac:spMkLst>
-              <pc:docMk/>
-              <pc:sldMasterMk cId="3226123621" sldId="2147483660"/>
-              <pc:sldLayoutMk cId="3550624814" sldId="2147483683"/>
-              <ac:spMk id="22" creationId="{00000000-0000-0000-0000-000000000000}"/>
-            </ac:spMkLst>
-          </pc:spChg>
-          <pc:spChg chg="mod">
-            <ac:chgData name="Dave Sushames" userId="ce71797e-895c-47df-af8e-c160254d5cef" providerId="ADAL" clId="{067FCE3D-3D41-4548-936F-F0A348C85C95}" dt="2026-10-09T06:01:25.916" v="166" actId="207"/>
-            <ac:spMkLst>
-              <pc:docMk/>
-              <pc:sldMasterMk cId="3226123621" sldId="2147483660"/>
-              <pc:sldLayoutMk cId="3550624814" sldId="2147483683"/>
-              <ac:spMk id="26" creationId="{00000000-0000-0000-0000-000000000000}"/>
-            </ac:spMkLst>
-          </pc:spChg>
-          <pc:spChg chg="add mod">
-            <ac:chgData name="Dave Sushames" userId="ce71797e-895c-47df-af8e-c160254d5cef" providerId="ADAL" clId="{067FCE3D-3D41-4548-936F-F0A348C85C95}" dt="2026-10-09T06:20:12.233" v="431"/>
-            <ac:spMkLst>
-              <pc:docMk/>
-              <pc:sldMasterMk cId="3226123621" sldId="2147483660"/>
-              <pc:sldLayoutMk cId="3550624814" sldId="2147483683"/>
-              <ac:spMk id="28" creationId="{6C145AEB-80F9-C4F5-AC29-9A3D5424324F}"/>
-            </ac:spMkLst>
-          </pc:spChg>
-          <pc:spChg chg="add mod">
-            <ac:chgData name="Dave Sushames" userId="ce71797e-895c-47df-af8e-c160254d5cef" providerId="ADAL" clId="{067FCE3D-3D41-4548-936F-F0A348C85C95}" dt="2026-10-09T06:20:12.233" v="431"/>
-            <ac:spMkLst>
-              <pc:docMk/>
-              <pc:sldMasterMk cId="3226123621" sldId="2147483660"/>
-              <pc:sldLayoutMk cId="3550624814" sldId="2147483683"/>
-              <ac:spMk id="29" creationId="{DB1EA73A-2FBB-C218-2234-3A2572BA00BE}"/>
-            </ac:spMkLst>
-          </pc:spChg>
-          <pc:spChg chg="add mod">
-            <ac:chgData name="Dave Sushames" userId="ce71797e-895c-47df-af8e-c160254d5cef" providerId="ADAL" clId="{067FCE3D-3D41-4548-936F-F0A348C85C95}" dt="2026-10-09T06:20:12.233" v="431"/>
-            <ac:spMkLst>
-              <pc:docMk/>
-              <pc:sldMasterMk cId="3226123621" sldId="2147483660"/>
-              <pc:sldLayoutMk cId="3550624814" sldId="2147483683"/>
-              <ac:spMk id="30" creationId="{36441B54-8151-9984-85CB-7CBD43F5E8C1}"/>
-            </ac:spMkLst>
-          </pc:spChg>
-        </pc:sldLayoutChg>
-      </pc:sldMasterChg>
-      <pc:sldMasterChg chg="new del mod addSldLayout delSldLayout">
-        <pc:chgData name="Dave Sushames" userId="ce71797e-895c-47df-af8e-c160254d5cef" providerId="ADAL" clId="{067FCE3D-3D41-4548-936F-F0A348C85C95}" dt="2026-10-09T05:45:02.963" v="95" actId="6938"/>
-        <pc:sldMasterMkLst>
-          <pc:docMk/>
-          <pc:sldMasterMk cId="461627781" sldId="2147483669"/>
-        </pc:sldMasterMkLst>
-        <pc:sldLayoutChg chg="new del replId">
-          <pc:chgData name="Dave Sushames" userId="ce71797e-895c-47df-af8e-c160254d5cef" providerId="ADAL" clId="{067FCE3D-3D41-4548-936F-F0A348C85C95}" dt="2026-10-09T05:45:02.963" v="95" actId="6938"/>
-          <pc:sldLayoutMkLst>
-            <pc:docMk/>
-            <pc:sldMasterMk cId="461627781" sldId="2147483669"/>
-            <pc:sldLayoutMk cId="2128692178" sldId="2147483670"/>
-          </pc:sldLayoutMkLst>
-        </pc:sldLayoutChg>
-        <pc:sldLayoutChg chg="new del replId">
-          <pc:chgData name="Dave Sushames" userId="ce71797e-895c-47df-af8e-c160254d5cef" providerId="ADAL" clId="{067FCE3D-3D41-4548-936F-F0A348C85C95}" dt="2026-10-09T05:45:02.963" v="95" actId="6938"/>
-          <pc:sldLayoutMkLst>
-            <pc:docMk/>
-            <pc:sldMasterMk cId="461627781" sldId="2147483669"/>
-            <pc:sldLayoutMk cId="3896079418" sldId="2147483671"/>
-          </pc:sldLayoutMkLst>
-        </pc:sldLayoutChg>
-        <pc:sldLayoutChg chg="new del replId">
-          <pc:chgData name="Dave Sushames" userId="ce71797e-895c-47df-af8e-c160254d5cef" providerId="ADAL" clId="{067FCE3D-3D41-4548-936F-F0A348C85C95}" dt="2026-10-09T05:45:02.963" v="95" actId="6938"/>
-          <pc:sldLayoutMkLst>
-            <pc:docMk/>
-            <pc:sldMasterMk cId="461627781" sldId="2147483669"/>
-            <pc:sldLayoutMk cId="3923259014" sldId="2147483672"/>
-          </pc:sldLayoutMkLst>
-        </pc:sldLayoutChg>
-        <pc:sldLayoutChg chg="new del replId">
-          <pc:chgData name="Dave Sushames" userId="ce71797e-895c-47df-af8e-c160254d5cef" providerId="ADAL" clId="{067FCE3D-3D41-4548-936F-F0A348C85C95}" dt="2026-10-09T05:45:02.963" v="95" actId="6938"/>
-          <pc:sldLayoutMkLst>
-            <pc:docMk/>
-            <pc:sldMasterMk cId="461627781" sldId="2147483669"/>
-            <pc:sldLayoutMk cId="2294290635" sldId="2147483673"/>
-          </pc:sldLayoutMkLst>
-        </pc:sldLayoutChg>
-        <pc:sldLayoutChg chg="new del replId">
-          <pc:chgData name="Dave Sushames" userId="ce71797e-895c-47df-af8e-c160254d5cef" providerId="ADAL" clId="{067FCE3D-3D41-4548-936F-F0A348C85C95}" dt="2026-10-09T05:45:02.963" v="95" actId="6938"/>
-          <pc:sldLayoutMkLst>
-            <pc:docMk/>
-            <pc:sldMasterMk cId="461627781" sldId="2147483669"/>
-            <pc:sldLayoutMk cId="3713957413" sldId="2147483674"/>
-          </pc:sldLayoutMkLst>
-        </pc:sldLayoutChg>
-        <pc:sldLayoutChg chg="new del replId">
-          <pc:chgData name="Dave Sushames" userId="ce71797e-895c-47df-af8e-c160254d5cef" providerId="ADAL" clId="{067FCE3D-3D41-4548-936F-F0A348C85C95}" dt="2026-10-09T05:45:02.963" v="95" actId="6938"/>
-          <pc:sldLayoutMkLst>
-            <pc:docMk/>
-            <pc:sldMasterMk cId="461627781" sldId="2147483669"/>
-            <pc:sldLayoutMk cId="884199586" sldId="2147483675"/>
-          </pc:sldLayoutMkLst>
-        </pc:sldLayoutChg>
-        <pc:sldLayoutChg chg="new del replId">
-          <pc:chgData name="Dave Sushames" userId="ce71797e-895c-47df-af8e-c160254d5cef" providerId="ADAL" clId="{067FCE3D-3D41-4548-936F-F0A348C85C95}" dt="2026-10-09T05:45:02.963" v="95" actId="6938"/>
-          <pc:sldLayoutMkLst>
-            <pc:docMk/>
-            <pc:sldMasterMk cId="461627781" sldId="2147483669"/>
-            <pc:sldLayoutMk cId="1753084440" sldId="2147483676"/>
-          </pc:sldLayoutMkLst>
-        </pc:sldLayoutChg>
-        <pc:sldLayoutChg chg="new del replId">
-          <pc:chgData name="Dave Sushames" userId="ce71797e-895c-47df-af8e-c160254d5cef" providerId="ADAL" clId="{067FCE3D-3D41-4548-936F-F0A348C85C95}" dt="2026-10-09T05:45:02.963" v="95" actId="6938"/>
-          <pc:sldLayoutMkLst>
-            <pc:docMk/>
-            <pc:sldMasterMk cId="461627781" sldId="2147483669"/>
-            <pc:sldLayoutMk cId="3543036653" sldId="2147483677"/>
-          </pc:sldLayoutMkLst>
-        </pc:sldLayoutChg>
-        <pc:sldLayoutChg chg="new del replId">
-          <pc:chgData name="Dave Sushames" userId="ce71797e-895c-47df-af8e-c160254d5cef" providerId="ADAL" clId="{067FCE3D-3D41-4548-936F-F0A348C85C95}" dt="2026-10-09T05:45:02.963" v="95" actId="6938"/>
-          <pc:sldLayoutMkLst>
-            <pc:docMk/>
-            <pc:sldMasterMk cId="461627781" sldId="2147483669"/>
-            <pc:sldLayoutMk cId="3966003969" sldId="2147483678"/>
-          </pc:sldLayoutMkLst>
-        </pc:sldLayoutChg>
-        <pc:sldLayoutChg chg="new del replId">
-          <pc:chgData name="Dave Sushames" userId="ce71797e-895c-47df-af8e-c160254d5cef" providerId="ADAL" clId="{067FCE3D-3D41-4548-936F-F0A348C85C95}" dt="2026-10-09T05:45:02.963" v="95" actId="6938"/>
-          <pc:sldLayoutMkLst>
-            <pc:docMk/>
-            <pc:sldMasterMk cId="461627781" sldId="2147483669"/>
-            <pc:sldLayoutMk cId="4125183501" sldId="2147483679"/>
-          </pc:sldLayoutMkLst>
-        </pc:sldLayoutChg>
-        <pc:sldLayoutChg chg="new del replId">
-          <pc:chgData name="Dave Sushames" userId="ce71797e-895c-47df-af8e-c160254d5cef" providerId="ADAL" clId="{067FCE3D-3D41-4548-936F-F0A348C85C95}" dt="2026-10-09T05:45:02.963" v="95" actId="6938"/>
-          <pc:sldLayoutMkLst>
-            <pc:docMk/>
-            <pc:sldMasterMk cId="461627781" sldId="2147483669"/>
-            <pc:sldLayoutMk cId="1154198826" sldId="2147483680"/>
-          </pc:sldLayoutMkLst>
-        </pc:sldLayoutChg>
+            <ac:picMk id="8" creationId="{FE60D192-9568-AFF6-2338-EB5ECED54EFE}"/>
+          </ac:picMkLst>
+        </pc:picChg>
       </pc:sldMasterChg>
       <pc:sldMasterChg chg="new mod addSldLayout">
         <pc:chgData name="Dave Sushames" userId="ce71797e-895c-47df-af8e-c160254d5cef" providerId="ADAL" clId="{067FCE3D-3D41-4548-936F-F0A348C85C95}" dt="2026-10-09T05:58:14.117" v="159" actId="6014"/>
@@ -1539,14 +854,14 @@
               <a:buNone/>
             </a:pPr>
             <a:r>
-              <a:rPr lang="en-US" sz="4000" dirty="0">
+              <a:rPr lang="en-US" sz="4000">
                 <a:solidFill>
                   <a:schemeClr val="tx1"/>
                 </a:solidFill>
               </a:rPr>
               <a:t>Click to add title</a:t>
             </a:r>
-            <a:endParaRPr lang="en-US" sz="4000" dirty="0"/>
+            <a:endParaRPr lang="en-US" sz="4000"/>
           </a:p>
         </p:txBody>
       </p:sp>
@@ -1618,14 +933,14 @@
               <a:buNone/>
             </a:pPr>
             <a:r>
-              <a:rPr lang="en-US" sz="1300" b="1" kern="0" spc="200" dirty="0">
+              <a:rPr lang="en-US" sz="1300" b="1" kern="0" spc="200">
                 <a:solidFill>
                   <a:schemeClr val="accent2"/>
                 </a:solidFill>
               </a:rPr>
               <a:t>Subtext</a:t>
             </a:r>
-            <a:endParaRPr lang="en-US" sz="1300" dirty="0"/>
+            <a:endParaRPr lang="en-US" sz="1300"/>
           </a:p>
         </p:txBody>
       </p:sp>
@@ -1735,14 +1050,14 @@
               <a:buNone/>
             </a:pPr>
             <a:r>
-              <a:rPr lang="en-US" sz="4000" dirty="0">
+              <a:rPr lang="en-US" sz="4000">
                 <a:solidFill>
                   <a:schemeClr val="tx1"/>
                 </a:solidFill>
               </a:rPr>
               <a:t>Click to add title</a:t>
             </a:r>
-            <a:endParaRPr lang="en-US" sz="4000" dirty="0"/>
+            <a:endParaRPr lang="en-US" sz="4000"/>
           </a:p>
         </p:txBody>
       </p:sp>
@@ -1774,7 +1089,7 @@
             <a:pPr marL="0" indent="0">
               <a:buNone/>
             </a:pPr>
-            <a:endParaRPr lang="en-US" dirty="0"/>
+            <a:endParaRPr lang="en-US"/>
           </a:p>
         </p:txBody>
       </p:sp>
@@ -1812,14 +1127,14 @@
               <a:buNone/>
             </a:pPr>
             <a:r>
-              <a:rPr lang="en-US" dirty="0">
+              <a:rPr lang="en-US">
                 <a:solidFill>
                   <a:srgbClr val="000000"/>
                 </a:solidFill>
               </a:rPr>
               <a:t>Icon</a:t>
             </a:r>
-            <a:endParaRPr lang="en-US" dirty="0"/>
+            <a:endParaRPr lang="en-US"/>
           </a:p>
         </p:txBody>
       </p:sp>
@@ -1861,14 +1176,14 @@
               <a:buNone/>
             </a:pPr>
             <a:r>
-              <a:rPr lang="en-US" sz="2200" dirty="0">
+              <a:rPr lang="en-US" sz="2200">
                 <a:solidFill>
                   <a:schemeClr val="accent1"/>
                 </a:solidFill>
               </a:rPr>
               <a:t>Heading</a:t>
             </a:r>
-            <a:endParaRPr lang="en-US" sz="2200" dirty="0"/>
+            <a:endParaRPr lang="en-US" sz="2200"/>
           </a:p>
         </p:txBody>
       </p:sp>
@@ -1910,14 +1225,14 @@
               <a:buNone/>
             </a:pPr>
             <a:r>
-              <a:rPr lang="en-US" sz="1400" dirty="0">
+              <a:rPr lang="en-US" sz="1400">
                 <a:solidFill>
                   <a:schemeClr val="tx1"/>
                 </a:solidFill>
               </a:rPr>
               <a:t>Card content</a:t>
             </a:r>
-            <a:endParaRPr lang="en-US" sz="1400" dirty="0"/>
+            <a:endParaRPr lang="en-US" sz="1400"/>
           </a:p>
         </p:txBody>
       </p:sp>
@@ -1949,7 +1264,7 @@
             <a:pPr marL="0" indent="0">
               <a:buNone/>
             </a:pPr>
-            <a:endParaRPr lang="en-US" dirty="0"/>
+            <a:endParaRPr lang="en-US"/>
           </a:p>
         </p:txBody>
       </p:sp>
@@ -1987,14 +1302,14 @@
               <a:buNone/>
             </a:pPr>
             <a:r>
-              <a:rPr lang="en-US" dirty="0">
+              <a:rPr lang="en-US">
                 <a:solidFill>
                   <a:srgbClr val="000000"/>
                 </a:solidFill>
               </a:rPr>
               <a:t>Icon</a:t>
             </a:r>
-            <a:endParaRPr lang="en-US" dirty="0"/>
+            <a:endParaRPr lang="en-US"/>
           </a:p>
         </p:txBody>
       </p:sp>
@@ -2036,14 +1351,14 @@
               <a:buNone/>
             </a:pPr>
             <a:r>
-              <a:rPr lang="en-US" sz="2200" dirty="0">
+              <a:rPr lang="en-US" sz="2200">
                 <a:solidFill>
                   <a:schemeClr val="accent1"/>
                 </a:solidFill>
               </a:rPr>
               <a:t>Heading</a:t>
             </a:r>
-            <a:endParaRPr lang="en-US" sz="2200" dirty="0"/>
+            <a:endParaRPr lang="en-US" sz="2200"/>
           </a:p>
         </p:txBody>
       </p:sp>
@@ -2085,14 +1400,14 @@
               <a:buNone/>
             </a:pPr>
             <a:r>
-              <a:rPr lang="en-US" sz="1400" dirty="0">
+              <a:rPr lang="en-US" sz="1400">
                 <a:solidFill>
                   <a:schemeClr val="tx1"/>
                 </a:solidFill>
               </a:rPr>
               <a:t>Card content</a:t>
             </a:r>
-            <a:endParaRPr lang="en-US" sz="1400" dirty="0"/>
+            <a:endParaRPr lang="en-US" sz="1400"/>
           </a:p>
         </p:txBody>
       </p:sp>
@@ -2124,7 +1439,7 @@
             <a:pPr marL="0" indent="0">
               <a:buNone/>
             </a:pPr>
-            <a:endParaRPr lang="en-US" dirty="0"/>
+            <a:endParaRPr lang="en-US"/>
           </a:p>
         </p:txBody>
       </p:sp>
@@ -2162,14 +1477,14 @@
               <a:buNone/>
             </a:pPr>
             <a:r>
-              <a:rPr lang="en-US" dirty="0">
+              <a:rPr lang="en-US">
                 <a:solidFill>
                   <a:srgbClr val="000000"/>
                 </a:solidFill>
               </a:rPr>
               <a:t>Icon</a:t>
             </a:r>
-            <a:endParaRPr lang="en-US" dirty="0"/>
+            <a:endParaRPr lang="en-US"/>
           </a:p>
         </p:txBody>
       </p:sp>
@@ -2211,14 +1526,14 @@
               <a:buNone/>
             </a:pPr>
             <a:r>
-              <a:rPr lang="en-US" sz="2200" dirty="0">
+              <a:rPr lang="en-US" sz="2200">
                 <a:solidFill>
                   <a:schemeClr val="accent1"/>
                 </a:solidFill>
               </a:rPr>
               <a:t>Heading</a:t>
             </a:r>
-            <a:endParaRPr lang="en-US" sz="2200" dirty="0"/>
+            <a:endParaRPr lang="en-US" sz="2200"/>
           </a:p>
         </p:txBody>
       </p:sp>
@@ -2260,14 +1575,14 @@
               <a:buNone/>
             </a:pPr>
             <a:r>
-              <a:rPr lang="en-US" sz="1400" dirty="0">
+              <a:rPr lang="en-US" sz="1400">
                 <a:solidFill>
                   <a:schemeClr val="tx1"/>
                 </a:solidFill>
               </a:rPr>
               <a:t>Card content</a:t>
             </a:r>
-            <a:endParaRPr lang="en-US" sz="1400" dirty="0"/>
+            <a:endParaRPr lang="en-US" sz="1400"/>
           </a:p>
         </p:txBody>
       </p:sp>
@@ -2302,14 +1617,14 @@
               <a:buNone/>
             </a:pPr>
             <a:r>
-              <a:rPr lang="en-US" sz="1000" dirty="0">
+              <a:rPr lang="en-US" sz="1000">
                 <a:solidFill>
                   <a:schemeClr val="accent2"/>
                 </a:solidFill>
               </a:rPr>
               <a:t>Byte Harbor Butchers</a:t>
             </a:r>
-            <a:endParaRPr lang="en-US" sz="1000" dirty="0"/>
+            <a:endParaRPr lang="en-US" sz="1000"/>
           </a:p>
         </p:txBody>
       </p:sp>
@@ -2344,14 +1659,14 @@
               <a:buNone/>
             </a:pPr>
             <a:r>
-              <a:rPr lang="en-US" sz="1000" dirty="0">
+              <a:rPr lang="en-US" sz="1000">
                 <a:solidFill>
                   <a:schemeClr val="accent2"/>
                 </a:solidFill>
               </a:rPr>
               <a:t>AI-Enhanced vs Legacy DFIR Tools: IT7510 Capstone Final Panel</a:t>
             </a:r>
-            <a:endParaRPr lang="en-US" sz="1000" dirty="0"/>
+            <a:endParaRPr lang="en-US" sz="1000"/>
           </a:p>
         </p:txBody>
       </p:sp>
@@ -2381,7 +1696,7 @@
           </a:prstGeom>
           <a:extLst>
             <a:ext uri="{C572A759-6A51-4108-AA02-DFA0A04FC94B}">
-              <ma14:wrappingTextBoxFlag xmlns="" xmlns:ma14="http://schemas.microsoft.com/office/mac/drawingml/2011/main" val="0"/>
+              <ma14:wrappingTextBoxFlag xmlns:ma14="http://schemas.microsoft.com/office/mac/drawingml/2011/main" xmlns="" val="0"/>
             </a:ext>
           </a:extLst>
         </p:spPr>
@@ -2482,14 +1797,14 @@
               <a:buNone/>
             </a:pPr>
             <a:r>
-              <a:rPr lang="en-US" sz="5400" dirty="0">
+              <a:rPr lang="en-US" sz="5400">
                 <a:solidFill>
                   <a:schemeClr val="tx1"/>
                 </a:solidFill>
               </a:rPr>
               <a:t>Click to add title</a:t>
             </a:r>
-            <a:endParaRPr lang="en-US" sz="5400" dirty="0"/>
+            <a:endParaRPr lang="en-US" sz="5400"/>
           </a:p>
         </p:txBody>
       </p:sp>
@@ -2561,14 +1876,14 @@
               <a:buNone/>
             </a:pPr>
             <a:r>
-              <a:rPr lang="en-US" sz="1300" b="1" kern="0" spc="200" dirty="0">
+              <a:rPr lang="en-US" sz="1300" b="1" kern="0" spc="200">
                 <a:solidFill>
                   <a:schemeClr val="accent2"/>
                 </a:solidFill>
               </a:rPr>
               <a:t>Byte Harbor Butchers</a:t>
             </a:r>
-            <a:endParaRPr lang="en-US" sz="1300" dirty="0"/>
+            <a:endParaRPr lang="en-US" sz="1300"/>
           </a:p>
         </p:txBody>
       </p:sp>
@@ -2764,7 +2079,7 @@
           <a:p>
             <a:fld id="{E89A4EF9-459A-41C2-B327-1F466C6C5316}" type="datetimeFigureOut">
               <a:rPr lang="en-NZ" smtClean="0"/>
-              <a:t>9/10/2026</a:t>
+              <a:t>26/10/2026</a:t>
             </a:fld>
             <a:endParaRPr lang="en-NZ"/>
           </a:p>
@@ -2964,7 +2279,7 @@
           <a:p>
             <a:fld id="{E89A4EF9-459A-41C2-B327-1F466C6C5316}" type="datetimeFigureOut">
               <a:rPr lang="en-NZ" smtClean="0"/>
-              <a:t>9/10/2026</a:t>
+              <a:t>26/10/2026</a:t>
             </a:fld>
             <a:endParaRPr lang="en-NZ"/>
           </a:p>
@@ -3240,7 +2555,7 @@
           <a:p>
             <a:fld id="{E89A4EF9-459A-41C2-B327-1F466C6C5316}" type="datetimeFigureOut">
               <a:rPr lang="en-NZ" smtClean="0"/>
-              <a:t>9/10/2026</a:t>
+              <a:t>26/10/2026</a:t>
             </a:fld>
             <a:endParaRPr lang="en-NZ"/>
           </a:p>
@@ -3508,7 +2823,7 @@
           <a:p>
             <a:fld id="{E89A4EF9-459A-41C2-B327-1F466C6C5316}" type="datetimeFigureOut">
               <a:rPr lang="en-NZ" smtClean="0"/>
-              <a:t>9/10/2026</a:t>
+              <a:t>26/10/2026</a:t>
             </a:fld>
             <a:endParaRPr lang="en-NZ"/>
           </a:p>
@@ -3923,7 +3238,7 @@
           <a:p>
             <a:fld id="{E89A4EF9-459A-41C2-B327-1F466C6C5316}" type="datetimeFigureOut">
               <a:rPr lang="en-NZ" smtClean="0"/>
-              <a:t>9/10/2026</a:t>
+              <a:t>26/10/2026</a:t>
             </a:fld>
             <a:endParaRPr lang="en-NZ"/>
           </a:p>
@@ -4065,7 +3380,7 @@
           <a:p>
             <a:fld id="{E89A4EF9-459A-41C2-B327-1F466C6C5316}" type="datetimeFigureOut">
               <a:rPr lang="en-NZ" smtClean="0"/>
-              <a:t>9/10/2026</a:t>
+              <a:t>26/10/2026</a:t>
             </a:fld>
             <a:endParaRPr lang="en-NZ"/>
           </a:p>
@@ -4178,7 +3493,7 @@
           <a:p>
             <a:fld id="{E89A4EF9-459A-41C2-B327-1F466C6C5316}" type="datetimeFigureOut">
               <a:rPr lang="en-NZ" smtClean="0"/>
-              <a:t>9/10/2026</a:t>
+              <a:t>26/10/2026</a:t>
             </a:fld>
             <a:endParaRPr lang="en-NZ"/>
           </a:p>
@@ -4491,7 +3806,7 @@
           <a:p>
             <a:fld id="{E89A4EF9-459A-41C2-B327-1F466C6C5316}" type="datetimeFigureOut">
               <a:rPr lang="en-NZ" smtClean="0"/>
-              <a:t>9/10/2026</a:t>
+              <a:t>26/10/2026</a:t>
             </a:fld>
             <a:endParaRPr lang="en-NZ"/>
           </a:p>
@@ -4682,14 +3997,14 @@
               <a:buNone/>
             </a:pPr>
             <a:r>
-              <a:rPr lang="en-US" sz="4400" dirty="0">
+              <a:rPr lang="en-US" sz="4400">
                 <a:solidFill>
                   <a:schemeClr val="tx1"/>
                 </a:solidFill>
               </a:rPr>
               <a:t>Click to add title</a:t>
             </a:r>
-            <a:endParaRPr lang="en-US" sz="4400" dirty="0"/>
+            <a:endParaRPr lang="en-US" sz="4400"/>
           </a:p>
         </p:txBody>
       </p:sp>
@@ -4731,14 +4046,14 @@
               <a:buNone/>
             </a:pPr>
             <a:r>
-              <a:rPr lang="en-US" sz="1800" dirty="0">
+              <a:rPr lang="en-US" sz="1800">
                 <a:solidFill>
                   <a:schemeClr val="tx1"/>
                 </a:solidFill>
               </a:rPr>
               <a:t>Click to add text</a:t>
             </a:r>
-            <a:endParaRPr lang="en-US" sz="1800" dirty="0"/>
+            <a:endParaRPr lang="en-US" sz="1800"/>
           </a:p>
         </p:txBody>
       </p:sp>
@@ -4767,14 +4082,14 @@
               <a:buNone/>
             </a:pPr>
             <a:r>
-              <a:rPr lang="en-US" sz="1000" dirty="0">
+              <a:rPr lang="en-US" sz="1000">
                 <a:solidFill>
                   <a:schemeClr val="accent2"/>
                 </a:solidFill>
               </a:rPr>
               <a:t>Byte Harbor Butchers</a:t>
             </a:r>
-            <a:endParaRPr lang="en-US" sz="1000" dirty="0"/>
+            <a:endParaRPr lang="en-US" sz="1000"/>
           </a:p>
         </p:txBody>
       </p:sp>
@@ -4803,14 +4118,14 @@
               <a:buNone/>
             </a:pPr>
             <a:r>
-              <a:rPr lang="en-US" sz="1000" dirty="0">
+              <a:rPr lang="en-US" sz="1000">
                 <a:solidFill>
                   <a:schemeClr val="accent2"/>
                 </a:solidFill>
               </a:rPr>
               <a:t>AI-Enhanced vs Legacy DFIR Tools: IT7510 Capstone Final Panel</a:t>
             </a:r>
-            <a:endParaRPr lang="en-US" sz="1000" dirty="0"/>
+            <a:endParaRPr lang="en-US" sz="1000"/>
           </a:p>
         </p:txBody>
       </p:sp>
@@ -4834,7 +4149,7 @@
           </a:prstGeom>
           <a:extLst>
             <a:ext uri="{C572A759-6A51-4108-AA02-DFA0A04FC94B}">
-              <ma14:wrappingTextBoxFlag xmlns="" xmlns:ma14="http://schemas.microsoft.com/office/mac/drawingml/2011/main" val="0"/>
+              <ma14:wrappingTextBoxFlag xmlns:ma14="http://schemas.microsoft.com/office/mac/drawingml/2011/main" xmlns="" val="0"/>
             </a:ext>
           </a:extLst>
         </p:spPr>
@@ -4855,7 +4170,7 @@
               <a:rPr lang="en-US" b="0"/>
               <a:t>‹#›</a:t>
             </a:fld>
-            <a:endParaRPr lang="en-US" dirty="0"/>
+            <a:endParaRPr lang="en-US"/>
           </a:p>
         </p:txBody>
       </p:sp>
@@ -5088,7 +4403,7 @@
           <a:p>
             <a:fld id="{E89A4EF9-459A-41C2-B327-1F466C6C5316}" type="datetimeFigureOut">
               <a:rPr lang="en-NZ" smtClean="0"/>
-              <a:t>9/10/2026</a:t>
+              <a:t>26/10/2026</a:t>
             </a:fld>
             <a:endParaRPr lang="en-NZ"/>
           </a:p>
@@ -5288,7 +4603,7 @@
           <a:p>
             <a:fld id="{E89A4EF9-459A-41C2-B327-1F466C6C5316}" type="datetimeFigureOut">
               <a:rPr lang="en-NZ" smtClean="0"/>
-              <a:t>9/10/2026</a:t>
+              <a:t>26/10/2026</a:t>
             </a:fld>
             <a:endParaRPr lang="en-NZ"/>
           </a:p>
@@ -5498,7 +4813,7 @@
           <a:p>
             <a:fld id="{E89A4EF9-459A-41C2-B327-1F466C6C5316}" type="datetimeFigureOut">
               <a:rPr lang="en-NZ" smtClean="0"/>
-              <a:t>9/10/2026</a:t>
+              <a:t>26/10/2026</a:t>
             </a:fld>
             <a:endParaRPr lang="en-NZ"/>
           </a:p>
@@ -5634,14 +4949,14 @@
               <a:buNone/>
             </a:pPr>
             <a:r>
-              <a:rPr lang="en-US" sz="4000" dirty="0">
+              <a:rPr lang="en-US" sz="4000">
                 <a:solidFill>
                   <a:schemeClr val="tx1"/>
                 </a:solidFill>
               </a:rPr>
               <a:t>Click to add title</a:t>
             </a:r>
-            <a:endParaRPr lang="en-US" sz="4000" dirty="0"/>
+            <a:endParaRPr lang="en-US" sz="4000"/>
           </a:p>
         </p:txBody>
       </p:sp>
@@ -5671,7 +4986,7 @@
           <a:bodyPr/>
           <a:lstStyle/>
           <a:p>
-            <a:endParaRPr lang="en-NZ" dirty="0"/>
+            <a:endParaRPr lang="en-NZ"/>
           </a:p>
         </p:txBody>
       </p:sp>
@@ -5705,7 +5020,7 @@
             <a:pPr marL="0" indent="0">
               <a:buNone/>
             </a:pPr>
-            <a:endParaRPr lang="en-US" dirty="0"/>
+            <a:endParaRPr lang="en-US"/>
           </a:p>
         </p:txBody>
       </p:sp>
@@ -5747,14 +5062,14 @@
               <a:buNone/>
             </a:pPr>
             <a:r>
-              <a:rPr lang="en-US" sz="2800" dirty="0">
+              <a:rPr lang="en-US" sz="2800">
                 <a:solidFill>
                   <a:schemeClr val="accent1"/>
                 </a:solidFill>
               </a:rPr>
               <a:t>Date</a:t>
             </a:r>
-            <a:endParaRPr lang="en-US" sz="2800" dirty="0"/>
+            <a:endParaRPr lang="en-US" sz="2800"/>
           </a:p>
         </p:txBody>
       </p:sp>
@@ -5826,14 +5141,14 @@
               <a:buNone/>
             </a:pPr>
             <a:r>
-              <a:rPr lang="en-US" sz="1200" dirty="0">
+              <a:rPr lang="en-US" sz="1200">
                 <a:solidFill>
                   <a:schemeClr val="tx1"/>
                 </a:solidFill>
               </a:rPr>
               <a:t>What happened</a:t>
             </a:r>
-            <a:endParaRPr lang="en-US" sz="1200" dirty="0"/>
+            <a:endParaRPr lang="en-US" sz="1200"/>
           </a:p>
         </p:txBody>
       </p:sp>
@@ -5867,7 +5182,7 @@
             <a:pPr marL="0" indent="0">
               <a:buNone/>
             </a:pPr>
-            <a:endParaRPr lang="en-US" dirty="0"/>
+            <a:endParaRPr lang="en-US"/>
           </a:p>
         </p:txBody>
       </p:sp>
@@ -5909,14 +5224,14 @@
               <a:buNone/>
             </a:pPr>
             <a:r>
-              <a:rPr lang="en-US" sz="2800" dirty="0">
+              <a:rPr lang="en-US" sz="2800">
                 <a:solidFill>
                   <a:schemeClr val="accent1"/>
                 </a:solidFill>
               </a:rPr>
               <a:t>Date</a:t>
             </a:r>
-            <a:endParaRPr lang="en-US" sz="2800" dirty="0"/>
+            <a:endParaRPr lang="en-US" sz="2800"/>
           </a:p>
         </p:txBody>
       </p:sp>
@@ -5988,14 +5303,14 @@
               <a:buNone/>
             </a:pPr>
             <a:r>
-              <a:rPr lang="en-US" sz="1200" dirty="0">
+              <a:rPr lang="en-US" sz="1200">
                 <a:solidFill>
                   <a:schemeClr val="tx1"/>
                 </a:solidFill>
               </a:rPr>
               <a:t>What happened</a:t>
             </a:r>
-            <a:endParaRPr lang="en-US" sz="1200" dirty="0"/>
+            <a:endParaRPr lang="en-US" sz="1200"/>
           </a:p>
         </p:txBody>
       </p:sp>
@@ -6029,7 +5344,7 @@
             <a:pPr marL="0" indent="0">
               <a:buNone/>
             </a:pPr>
-            <a:endParaRPr lang="en-US" dirty="0"/>
+            <a:endParaRPr lang="en-US"/>
           </a:p>
         </p:txBody>
       </p:sp>
@@ -6071,14 +5386,14 @@
               <a:buNone/>
             </a:pPr>
             <a:r>
-              <a:rPr lang="en-US" sz="2800" dirty="0">
+              <a:rPr lang="en-US" sz="2800">
                 <a:solidFill>
                   <a:schemeClr val="accent1"/>
                 </a:solidFill>
               </a:rPr>
               <a:t>Date</a:t>
             </a:r>
-            <a:endParaRPr lang="en-US" sz="2800" dirty="0"/>
+            <a:endParaRPr lang="en-US" sz="2800"/>
           </a:p>
         </p:txBody>
       </p:sp>
@@ -6150,14 +5465,14 @@
               <a:buNone/>
             </a:pPr>
             <a:r>
-              <a:rPr lang="en-US" sz="1200" dirty="0">
+              <a:rPr lang="en-US" sz="1200">
                 <a:solidFill>
                   <a:schemeClr val="tx1"/>
                 </a:solidFill>
               </a:rPr>
               <a:t>What happened</a:t>
             </a:r>
-            <a:endParaRPr lang="en-US" sz="1200" dirty="0"/>
+            <a:endParaRPr lang="en-US" sz="1200"/>
           </a:p>
         </p:txBody>
       </p:sp>
@@ -6191,7 +5506,7 @@
             <a:pPr marL="0" indent="0">
               <a:buNone/>
             </a:pPr>
-            <a:endParaRPr lang="en-US" dirty="0"/>
+            <a:endParaRPr lang="en-US"/>
           </a:p>
         </p:txBody>
       </p:sp>
@@ -6233,14 +5548,14 @@
               <a:buNone/>
             </a:pPr>
             <a:r>
-              <a:rPr lang="en-US" sz="2800" dirty="0">
+              <a:rPr lang="en-US" sz="2800">
                 <a:solidFill>
                   <a:schemeClr val="accent1"/>
                 </a:solidFill>
               </a:rPr>
               <a:t>Date</a:t>
             </a:r>
-            <a:endParaRPr lang="en-US" sz="2800" dirty="0"/>
+            <a:endParaRPr lang="en-US" sz="2800"/>
           </a:p>
         </p:txBody>
       </p:sp>
@@ -6312,14 +5627,14 @@
               <a:buNone/>
             </a:pPr>
             <a:r>
-              <a:rPr lang="en-US" sz="1200" dirty="0">
+              <a:rPr lang="en-US" sz="1200">
                 <a:solidFill>
                   <a:schemeClr val="tx1"/>
                 </a:solidFill>
               </a:rPr>
               <a:t>What happened</a:t>
             </a:r>
-            <a:endParaRPr lang="en-US" sz="1200" dirty="0"/>
+            <a:endParaRPr lang="en-US" sz="1200"/>
           </a:p>
         </p:txBody>
       </p:sp>
@@ -6348,14 +5663,14 @@
               <a:buNone/>
             </a:pPr>
             <a:r>
-              <a:rPr lang="en-US" sz="1000" dirty="0">
+              <a:rPr lang="en-US" sz="1000">
                 <a:solidFill>
                   <a:schemeClr val="accent2"/>
                 </a:solidFill>
               </a:rPr>
               <a:t>Byte Harbor Butchers</a:t>
             </a:r>
-            <a:endParaRPr lang="en-US" sz="1000" dirty="0"/>
+            <a:endParaRPr lang="en-US" sz="1000"/>
           </a:p>
         </p:txBody>
       </p:sp>
@@ -6384,14 +5699,14 @@
               <a:buNone/>
             </a:pPr>
             <a:r>
-              <a:rPr lang="en-US" sz="1000" dirty="0">
+              <a:rPr lang="en-US" sz="1000">
                 <a:solidFill>
                   <a:schemeClr val="accent2"/>
                 </a:solidFill>
               </a:rPr>
               <a:t>AI-Enhanced vs Legacy DFIR Tools: IT7510 Capstone Final Panel</a:t>
             </a:r>
-            <a:endParaRPr lang="en-US" sz="1000" dirty="0"/>
+            <a:endParaRPr lang="en-US" sz="1000"/>
           </a:p>
         </p:txBody>
       </p:sp>
@@ -6415,7 +5730,7 @@
           </a:prstGeom>
           <a:extLst>
             <a:ext uri="{C572A759-6A51-4108-AA02-DFA0A04FC94B}">
-              <ma14:wrappingTextBoxFlag xmlns="" xmlns:ma14="http://schemas.microsoft.com/office/mac/drawingml/2011/main" val="0"/>
+              <ma14:wrappingTextBoxFlag xmlns:ma14="http://schemas.microsoft.com/office/mac/drawingml/2011/main" xmlns="" val="0"/>
             </a:ext>
           </a:extLst>
         </p:spPr>
@@ -6516,14 +5831,14 @@
               <a:buNone/>
             </a:pPr>
             <a:r>
-              <a:rPr lang="en-US" sz="4000" dirty="0">
+              <a:rPr lang="en-US" sz="4000">
                 <a:solidFill>
                   <a:schemeClr val="tx1"/>
                 </a:solidFill>
               </a:rPr>
               <a:t>Click to add title</a:t>
             </a:r>
-            <a:endParaRPr lang="en-US" sz="4000" dirty="0"/>
+            <a:endParaRPr lang="en-US" sz="4000"/>
           </a:p>
         </p:txBody>
       </p:sp>
@@ -6587,7 +5902,7 @@
             <a:pPr marL="0" indent="0">
               <a:buNone/>
             </a:pPr>
-            <a:endParaRPr lang="en-US" dirty="0"/>
+            <a:endParaRPr lang="en-US"/>
           </a:p>
         </p:txBody>
       </p:sp>
@@ -6659,14 +5974,14 @@
               <a:buNone/>
             </a:pPr>
             <a:r>
-              <a:rPr lang="en-US" sz="2000" dirty="0">
+              <a:rPr lang="en-US" sz="2000">
                 <a:solidFill>
                   <a:schemeClr val="accent1"/>
                 </a:solidFill>
               </a:rPr>
               <a:t>Date</a:t>
             </a:r>
-            <a:endParaRPr lang="en-US" sz="2000" dirty="0"/>
+            <a:endParaRPr lang="en-US" sz="2000"/>
           </a:p>
         </p:txBody>
       </p:sp>
@@ -6708,14 +6023,14 @@
               <a:buNone/>
             </a:pPr>
             <a:r>
-              <a:rPr lang="en-US" sz="1200" dirty="0">
+              <a:rPr lang="en-US" sz="1200">
                 <a:solidFill>
                   <a:schemeClr val="tx1"/>
                 </a:solidFill>
               </a:rPr>
               <a:t>Milestone</a:t>
             </a:r>
-            <a:endParaRPr lang="en-US" sz="1200" dirty="0"/>
+            <a:endParaRPr lang="en-US" sz="1200"/>
           </a:p>
         </p:txBody>
       </p:sp>
@@ -6749,7 +6064,7 @@
             <a:pPr marL="0" indent="0">
               <a:buNone/>
             </a:pPr>
-            <a:endParaRPr lang="en-US" dirty="0"/>
+            <a:endParaRPr lang="en-US"/>
           </a:p>
         </p:txBody>
       </p:sp>
@@ -6821,14 +6136,14 @@
               <a:buNone/>
             </a:pPr>
             <a:r>
-              <a:rPr lang="en-US" sz="2000" dirty="0">
+              <a:rPr lang="en-US" sz="2000">
                 <a:solidFill>
                   <a:schemeClr val="accent1"/>
                 </a:solidFill>
               </a:rPr>
               <a:t>Date</a:t>
             </a:r>
-            <a:endParaRPr lang="en-US" sz="2000" dirty="0"/>
+            <a:endParaRPr lang="en-US" sz="2000"/>
           </a:p>
         </p:txBody>
       </p:sp>
@@ -6870,14 +6185,14 @@
               <a:buNone/>
             </a:pPr>
             <a:r>
-              <a:rPr lang="en-US" sz="1200" dirty="0">
+              <a:rPr lang="en-US" sz="1200">
                 <a:solidFill>
                   <a:schemeClr val="tx1"/>
                 </a:solidFill>
               </a:rPr>
               <a:t>Milestone</a:t>
             </a:r>
-            <a:endParaRPr lang="en-US" sz="1200" dirty="0"/>
+            <a:endParaRPr lang="en-US" sz="1200"/>
           </a:p>
         </p:txBody>
       </p:sp>
@@ -6911,7 +6226,7 @@
             <a:pPr marL="0" indent="0">
               <a:buNone/>
             </a:pPr>
-            <a:endParaRPr lang="en-US" dirty="0"/>
+            <a:endParaRPr lang="en-US"/>
           </a:p>
         </p:txBody>
       </p:sp>
@@ -6983,14 +6298,14 @@
               <a:buNone/>
             </a:pPr>
             <a:r>
-              <a:rPr lang="en-US" sz="2000" dirty="0">
+              <a:rPr lang="en-US" sz="2000">
                 <a:solidFill>
                   <a:schemeClr val="accent1"/>
                 </a:solidFill>
               </a:rPr>
               <a:t>Date</a:t>
             </a:r>
-            <a:endParaRPr lang="en-US" sz="2000" dirty="0"/>
+            <a:endParaRPr lang="en-US" sz="2000"/>
           </a:p>
         </p:txBody>
       </p:sp>
@@ -7032,14 +6347,14 @@
               <a:buNone/>
             </a:pPr>
             <a:r>
-              <a:rPr lang="en-US" sz="1200" dirty="0">
+              <a:rPr lang="en-US" sz="1200">
                 <a:solidFill>
                   <a:schemeClr val="tx1"/>
                 </a:solidFill>
               </a:rPr>
               <a:t>Milestone</a:t>
             </a:r>
-            <a:endParaRPr lang="en-US" sz="1200" dirty="0"/>
+            <a:endParaRPr lang="en-US" sz="1200"/>
           </a:p>
         </p:txBody>
       </p:sp>
@@ -7073,7 +6388,7 @@
             <a:pPr marL="0" indent="0">
               <a:buNone/>
             </a:pPr>
-            <a:endParaRPr lang="en-US" dirty="0"/>
+            <a:endParaRPr lang="en-US"/>
           </a:p>
         </p:txBody>
       </p:sp>
@@ -7145,14 +6460,14 @@
               <a:buNone/>
             </a:pPr>
             <a:r>
-              <a:rPr lang="en-US" sz="2000" dirty="0">
+              <a:rPr lang="en-US" sz="2000">
                 <a:solidFill>
                   <a:schemeClr val="accent1"/>
                 </a:solidFill>
               </a:rPr>
               <a:t>Date</a:t>
             </a:r>
-            <a:endParaRPr lang="en-US" sz="2000" dirty="0"/>
+            <a:endParaRPr lang="en-US" sz="2000"/>
           </a:p>
         </p:txBody>
       </p:sp>
@@ -7194,14 +6509,14 @@
               <a:buNone/>
             </a:pPr>
             <a:r>
-              <a:rPr lang="en-US" sz="1200" dirty="0">
+              <a:rPr lang="en-US" sz="1200">
                 <a:solidFill>
                   <a:schemeClr val="tx1"/>
                 </a:solidFill>
               </a:rPr>
               <a:t>Milestone</a:t>
             </a:r>
-            <a:endParaRPr lang="en-US" sz="1200" dirty="0"/>
+            <a:endParaRPr lang="en-US" sz="1200"/>
           </a:p>
         </p:txBody>
       </p:sp>
@@ -7235,7 +6550,7 @@
             <a:pPr marL="0" indent="0">
               <a:buNone/>
             </a:pPr>
-            <a:endParaRPr lang="en-US" dirty="0"/>
+            <a:endParaRPr lang="en-US"/>
           </a:p>
         </p:txBody>
       </p:sp>
@@ -7307,14 +6622,14 @@
               <a:buNone/>
             </a:pPr>
             <a:r>
-              <a:rPr lang="en-US" sz="2000" dirty="0">
+              <a:rPr lang="en-US" sz="2000">
                 <a:solidFill>
                   <a:schemeClr val="accent1"/>
                 </a:solidFill>
               </a:rPr>
               <a:t>Date</a:t>
             </a:r>
-            <a:endParaRPr lang="en-US" sz="2000" dirty="0"/>
+            <a:endParaRPr lang="en-US" sz="2000"/>
           </a:p>
         </p:txBody>
       </p:sp>
@@ -7356,14 +6671,14 @@
               <a:buNone/>
             </a:pPr>
             <a:r>
-              <a:rPr lang="en-US" sz="1200" dirty="0">
+              <a:rPr lang="en-US" sz="1200">
                 <a:solidFill>
                   <a:schemeClr val="tx1"/>
                 </a:solidFill>
               </a:rPr>
               <a:t>Milestone</a:t>
             </a:r>
-            <a:endParaRPr lang="en-US" sz="1200" dirty="0"/>
+            <a:endParaRPr lang="en-US" sz="1200"/>
           </a:p>
         </p:txBody>
       </p:sp>
@@ -7397,7 +6712,7 @@
             <a:pPr marL="0" indent="0">
               <a:buNone/>
             </a:pPr>
-            <a:endParaRPr lang="en-US" dirty="0"/>
+            <a:endParaRPr lang="en-US"/>
           </a:p>
         </p:txBody>
       </p:sp>
@@ -7469,14 +6784,14 @@
               <a:buNone/>
             </a:pPr>
             <a:r>
-              <a:rPr lang="en-US" sz="2000" dirty="0">
+              <a:rPr lang="en-US" sz="2000">
                 <a:solidFill>
                   <a:schemeClr val="accent1"/>
                 </a:solidFill>
               </a:rPr>
               <a:t>Date</a:t>
             </a:r>
-            <a:endParaRPr lang="en-US" sz="2000" dirty="0"/>
+            <a:endParaRPr lang="en-US" sz="2000"/>
           </a:p>
         </p:txBody>
       </p:sp>
@@ -7518,14 +6833,14 @@
               <a:buNone/>
             </a:pPr>
             <a:r>
-              <a:rPr lang="en-US" sz="1200" dirty="0">
+              <a:rPr lang="en-US" sz="1200">
                 <a:solidFill>
                   <a:schemeClr val="tx1"/>
                 </a:solidFill>
               </a:rPr>
               <a:t>Milestone</a:t>
             </a:r>
-            <a:endParaRPr lang="en-US" sz="1200" dirty="0"/>
+            <a:endParaRPr lang="en-US" sz="1200"/>
           </a:p>
         </p:txBody>
       </p:sp>
@@ -7560,14 +6875,14 @@
               <a:buNone/>
             </a:pPr>
             <a:r>
-              <a:rPr lang="en-US" sz="1000" dirty="0">
+              <a:rPr lang="en-US" sz="1000">
                 <a:solidFill>
                   <a:schemeClr val="accent2"/>
                 </a:solidFill>
               </a:rPr>
               <a:t>Byte Harbor Butchers</a:t>
             </a:r>
-            <a:endParaRPr lang="en-US" sz="1000" dirty="0"/>
+            <a:endParaRPr lang="en-US" sz="1000"/>
           </a:p>
         </p:txBody>
       </p:sp>
@@ -7602,14 +6917,14 @@
               <a:buNone/>
             </a:pPr>
             <a:r>
-              <a:rPr lang="en-US" sz="1000" dirty="0">
+              <a:rPr lang="en-US" sz="1000">
                 <a:solidFill>
                   <a:schemeClr val="accent2"/>
                 </a:solidFill>
               </a:rPr>
               <a:t>AI-Enhanced vs Legacy DFIR Tools: IT7510 Capstone Final Panel</a:t>
             </a:r>
-            <a:endParaRPr lang="en-US" sz="1000" dirty="0"/>
+            <a:endParaRPr lang="en-US" sz="1000"/>
           </a:p>
         </p:txBody>
       </p:sp>
@@ -7639,7 +6954,7 @@
           </a:prstGeom>
           <a:extLst>
             <a:ext uri="{C572A759-6A51-4108-AA02-DFA0A04FC94B}">
-              <ma14:wrappingTextBoxFlag xmlns="" xmlns:ma14="http://schemas.microsoft.com/office/mac/drawingml/2011/main" val="0"/>
+              <ma14:wrappingTextBoxFlag xmlns:ma14="http://schemas.microsoft.com/office/mac/drawingml/2011/main" xmlns="" val="0"/>
             </a:ext>
           </a:extLst>
         </p:spPr>
@@ -7740,14 +7055,14 @@
               <a:buNone/>
             </a:pPr>
             <a:r>
-              <a:rPr lang="en-US" sz="4000" dirty="0">
+              <a:rPr lang="en-US" sz="4000">
                 <a:solidFill>
                   <a:schemeClr val="tx1"/>
                 </a:solidFill>
               </a:rPr>
               <a:t>Click to add title</a:t>
             </a:r>
-            <a:endParaRPr lang="en-US" sz="4000" dirty="0"/>
+            <a:endParaRPr lang="en-US" sz="4000"/>
           </a:p>
         </p:txBody>
       </p:sp>
@@ -7789,14 +7104,14 @@
               <a:buNone/>
             </a:pPr>
             <a:r>
-              <a:rPr lang="en-US" sz="1800" dirty="0">
+              <a:rPr lang="en-US" sz="1800">
                 <a:solidFill>
                   <a:schemeClr val="tx1"/>
                 </a:solidFill>
               </a:rPr>
               <a:t>Click to add text</a:t>
             </a:r>
-            <a:endParaRPr lang="en-US" sz="1800" dirty="0"/>
+            <a:endParaRPr lang="en-US" sz="1800"/>
           </a:p>
         </p:txBody>
       </p:sp>
@@ -7825,14 +7140,14 @@
               <a:buNone/>
             </a:pPr>
             <a:r>
-              <a:rPr lang="en-US" sz="1000" dirty="0">
+              <a:rPr lang="en-US" sz="1000">
                 <a:solidFill>
                   <a:schemeClr val="accent2"/>
                 </a:solidFill>
               </a:rPr>
               <a:t>Byte Harbor Butchers</a:t>
             </a:r>
-            <a:endParaRPr lang="en-US" sz="1000" dirty="0"/>
+            <a:endParaRPr lang="en-US" sz="1000"/>
           </a:p>
         </p:txBody>
       </p:sp>
@@ -7861,14 +7176,14 @@
               <a:buNone/>
             </a:pPr>
             <a:r>
-              <a:rPr lang="en-US" sz="1000" dirty="0">
+              <a:rPr lang="en-US" sz="1000">
                 <a:solidFill>
                   <a:schemeClr val="accent2"/>
                 </a:solidFill>
               </a:rPr>
               <a:t>AI-Enhanced vs Legacy DFIR Tools: IT7510 Capstone Final Panel</a:t>
             </a:r>
-            <a:endParaRPr lang="en-US" sz="1000" dirty="0"/>
+            <a:endParaRPr lang="en-US" sz="1000"/>
           </a:p>
         </p:txBody>
       </p:sp>
@@ -7892,7 +7207,7 @@
           </a:prstGeom>
           <a:extLst>
             <a:ext uri="{C572A759-6A51-4108-AA02-DFA0A04FC94B}">
-              <ma14:wrappingTextBoxFlag xmlns="" xmlns:ma14="http://schemas.microsoft.com/office/mac/drawingml/2011/main" val="0"/>
+              <ma14:wrappingTextBoxFlag xmlns:ma14="http://schemas.microsoft.com/office/mac/drawingml/2011/main" xmlns="" val="0"/>
             </a:ext>
           </a:extLst>
         </p:spPr>
@@ -7993,14 +7308,14 @@
               <a:buNone/>
             </a:pPr>
             <a:r>
-              <a:rPr lang="en-US" sz="3200" dirty="0">
+              <a:rPr lang="en-US" sz="3200">
                 <a:solidFill>
                   <a:schemeClr val="tx1"/>
                 </a:solidFill>
               </a:rPr>
               <a:t>Click to add title</a:t>
             </a:r>
-            <a:endParaRPr lang="en-US" sz="3200" dirty="0"/>
+            <a:endParaRPr lang="en-US" sz="3200"/>
           </a:p>
         </p:txBody>
       </p:sp>
@@ -8038,14 +7353,14 @@
               <a:buNone/>
             </a:pPr>
             <a:r>
-              <a:rPr lang="en-US" dirty="0">
+              <a:rPr lang="en-US">
                 <a:solidFill>
                   <a:srgbClr val="000000"/>
                 </a:solidFill>
               </a:rPr>
               <a:t>Icon</a:t>
             </a:r>
-            <a:endParaRPr lang="en-US" dirty="0"/>
+            <a:endParaRPr lang="en-US"/>
           </a:p>
         </p:txBody>
       </p:sp>
@@ -8087,14 +7402,14 @@
               <a:buNone/>
             </a:pPr>
             <a:r>
-              <a:rPr lang="en-US" sz="1800" dirty="0">
+              <a:rPr lang="en-US" sz="1800">
                 <a:solidFill>
                   <a:schemeClr val="tx1"/>
                 </a:solidFill>
               </a:rPr>
               <a:t>Heading</a:t>
             </a:r>
-            <a:endParaRPr lang="en-US" sz="1800" dirty="0"/>
+            <a:endParaRPr lang="en-US" sz="1800"/>
           </a:p>
         </p:txBody>
       </p:sp>
@@ -8136,14 +7451,14 @@
               <a:buNone/>
             </a:pPr>
             <a:r>
-              <a:rPr lang="en-US" sz="1200" dirty="0">
+              <a:rPr lang="en-US" sz="1200">
                 <a:solidFill>
                   <a:schemeClr val="tx1"/>
                 </a:solidFill>
               </a:rPr>
               <a:t>Short description</a:t>
             </a:r>
-            <a:endParaRPr lang="en-US" sz="1200" dirty="0"/>
+            <a:endParaRPr lang="en-US" sz="1200"/>
           </a:p>
         </p:txBody>
       </p:sp>
@@ -8181,14 +7496,14 @@
               <a:buNone/>
             </a:pPr>
             <a:r>
-              <a:rPr lang="en-US" dirty="0">
+              <a:rPr lang="en-US">
                 <a:solidFill>
                   <a:srgbClr val="000000"/>
                 </a:solidFill>
               </a:rPr>
               <a:t>Icon</a:t>
             </a:r>
-            <a:endParaRPr lang="en-US" dirty="0"/>
+            <a:endParaRPr lang="en-US"/>
           </a:p>
         </p:txBody>
       </p:sp>
@@ -8230,14 +7545,14 @@
               <a:buNone/>
             </a:pPr>
             <a:r>
-              <a:rPr lang="en-US" sz="1800" dirty="0">
+              <a:rPr lang="en-US" sz="1800">
                 <a:solidFill>
                   <a:schemeClr val="tx1"/>
                 </a:solidFill>
               </a:rPr>
               <a:t>Heading</a:t>
             </a:r>
-            <a:endParaRPr lang="en-US" sz="1800" dirty="0"/>
+            <a:endParaRPr lang="en-US" sz="1800"/>
           </a:p>
         </p:txBody>
       </p:sp>
@@ -8279,14 +7594,14 @@
               <a:buNone/>
             </a:pPr>
             <a:r>
-              <a:rPr lang="en-US" sz="1200" dirty="0">
+              <a:rPr lang="en-US" sz="1200">
                 <a:solidFill>
                   <a:schemeClr val="tx1"/>
                 </a:solidFill>
               </a:rPr>
               <a:t>Short description</a:t>
             </a:r>
-            <a:endParaRPr lang="en-US" sz="1200" dirty="0"/>
+            <a:endParaRPr lang="en-US" sz="1200"/>
           </a:p>
         </p:txBody>
       </p:sp>
@@ -8324,14 +7639,14 @@
               <a:buNone/>
             </a:pPr>
             <a:r>
-              <a:rPr lang="en-US" dirty="0">
+              <a:rPr lang="en-US">
                 <a:solidFill>
                   <a:srgbClr val="000000"/>
                 </a:solidFill>
               </a:rPr>
               <a:t>Icon</a:t>
             </a:r>
-            <a:endParaRPr lang="en-US" dirty="0"/>
+            <a:endParaRPr lang="en-US"/>
           </a:p>
         </p:txBody>
       </p:sp>
@@ -8373,14 +7688,14 @@
               <a:buNone/>
             </a:pPr>
             <a:r>
-              <a:rPr lang="en-US" sz="1800" dirty="0">
+              <a:rPr lang="en-US" sz="1800">
                 <a:solidFill>
                   <a:schemeClr val="tx1"/>
                 </a:solidFill>
               </a:rPr>
               <a:t>Heading</a:t>
             </a:r>
-            <a:endParaRPr lang="en-US" sz="1800" dirty="0"/>
+            <a:endParaRPr lang="en-US" sz="1800"/>
           </a:p>
         </p:txBody>
       </p:sp>
@@ -8422,14 +7737,14 @@
               <a:buNone/>
             </a:pPr>
             <a:r>
-              <a:rPr lang="en-US" sz="1200" dirty="0">
+              <a:rPr lang="en-US" sz="1200">
                 <a:solidFill>
                   <a:schemeClr val="tx1"/>
                 </a:solidFill>
               </a:rPr>
               <a:t>Short description</a:t>
             </a:r>
-            <a:endParaRPr lang="en-US" sz="1200" dirty="0"/>
+            <a:endParaRPr lang="en-US" sz="1200"/>
           </a:p>
         </p:txBody>
       </p:sp>
@@ -8467,14 +7782,14 @@
               <a:buNone/>
             </a:pPr>
             <a:r>
-              <a:rPr lang="en-US" dirty="0">
+              <a:rPr lang="en-US">
                 <a:solidFill>
                   <a:srgbClr val="000000"/>
                 </a:solidFill>
               </a:rPr>
               <a:t>Icon</a:t>
             </a:r>
-            <a:endParaRPr lang="en-US" dirty="0"/>
+            <a:endParaRPr lang="en-US"/>
           </a:p>
         </p:txBody>
       </p:sp>
@@ -8516,14 +7831,14 @@
               <a:buNone/>
             </a:pPr>
             <a:r>
-              <a:rPr lang="en-US" sz="1800" dirty="0">
+              <a:rPr lang="en-US" sz="1800">
                 <a:solidFill>
                   <a:schemeClr val="tx1"/>
                 </a:solidFill>
               </a:rPr>
               <a:t>Heading</a:t>
             </a:r>
-            <a:endParaRPr lang="en-US" sz="1800" dirty="0"/>
+            <a:endParaRPr lang="en-US" sz="1800"/>
           </a:p>
         </p:txBody>
       </p:sp>
@@ -8565,14 +7880,14 @@
               <a:buNone/>
             </a:pPr>
             <a:r>
-              <a:rPr lang="en-US" sz="1200" dirty="0">
+              <a:rPr lang="en-US" sz="1200">
                 <a:solidFill>
                   <a:schemeClr val="tx1"/>
                 </a:solidFill>
               </a:rPr>
               <a:t>Short description</a:t>
             </a:r>
-            <a:endParaRPr lang="en-US" sz="1200" dirty="0"/>
+            <a:endParaRPr lang="en-US" sz="1200"/>
           </a:p>
         </p:txBody>
       </p:sp>
@@ -8610,14 +7925,14 @@
               <a:buNone/>
             </a:pPr>
             <a:r>
-              <a:rPr lang="en-US" dirty="0">
+              <a:rPr lang="en-US">
                 <a:solidFill>
                   <a:srgbClr val="000000"/>
                 </a:solidFill>
               </a:rPr>
               <a:t>Drag a picture here</a:t>
             </a:r>
-            <a:endParaRPr lang="en-US" dirty="0"/>
+            <a:endParaRPr lang="en-US"/>
           </a:p>
         </p:txBody>
       </p:sp>
@@ -8652,14 +7967,14 @@
               <a:buNone/>
             </a:pPr>
             <a:r>
-              <a:rPr lang="en-US" sz="1000" dirty="0">
+              <a:rPr lang="en-US" sz="1000">
                 <a:solidFill>
                   <a:schemeClr val="accent2"/>
                 </a:solidFill>
               </a:rPr>
               <a:t>Byte Harbor Butchers</a:t>
             </a:r>
-            <a:endParaRPr lang="en-US" sz="1000" dirty="0"/>
+            <a:endParaRPr lang="en-US" sz="1000"/>
           </a:p>
         </p:txBody>
       </p:sp>
@@ -8694,14 +8009,14 @@
               <a:buNone/>
             </a:pPr>
             <a:r>
-              <a:rPr lang="en-US" sz="1000" dirty="0">
+              <a:rPr lang="en-US" sz="1000">
                 <a:solidFill>
                   <a:schemeClr val="accent2"/>
                 </a:solidFill>
               </a:rPr>
               <a:t>AI-Enhanced vs Legacy DFIR Tools: IT7510 Capstone Final Panel</a:t>
             </a:r>
-            <a:endParaRPr lang="en-US" sz="1000" dirty="0"/>
+            <a:endParaRPr lang="en-US" sz="1000"/>
           </a:p>
         </p:txBody>
       </p:sp>
@@ -8731,7 +8046,7 @@
           </a:prstGeom>
           <a:extLst>
             <a:ext uri="{C572A759-6A51-4108-AA02-DFA0A04FC94B}">
-              <ma14:wrappingTextBoxFlag xmlns="" xmlns:ma14="http://schemas.microsoft.com/office/mac/drawingml/2011/main" val="0"/>
+              <ma14:wrappingTextBoxFlag xmlns:ma14="http://schemas.microsoft.com/office/mac/drawingml/2011/main" xmlns="" val="0"/>
             </a:ext>
           </a:extLst>
         </p:spPr>
@@ -8752,7 +8067,7 @@
               <a:rPr lang="en-US" b="0"/>
               <a:t>‹#›</a:t>
             </a:fld>
-            <a:endParaRPr lang="en-US" dirty="0"/>
+            <a:endParaRPr lang="en-US"/>
           </a:p>
         </p:txBody>
       </p:sp>
@@ -8832,14 +8147,14 @@
               <a:buNone/>
             </a:pPr>
             <a:r>
-              <a:rPr lang="en-US" sz="4000" dirty="0">
+              <a:rPr lang="en-US" sz="4000">
                 <a:solidFill>
                   <a:schemeClr val="tx1"/>
                 </a:solidFill>
               </a:rPr>
               <a:t>Click to add title</a:t>
             </a:r>
-            <a:endParaRPr lang="en-US" sz="4000" dirty="0"/>
+            <a:endParaRPr lang="en-US" sz="4000"/>
           </a:p>
         </p:txBody>
       </p:sp>
@@ -8904,14 +8219,14 @@
               <a:buNone/>
             </a:pPr>
             <a:r>
-              <a:rPr lang="en-US" sz="6000" dirty="0">
+              <a:rPr lang="en-US" sz="6000">
                 <a:solidFill>
                   <a:schemeClr val="tx1"/>
                 </a:solidFill>
               </a:rPr>
               <a:t>00</a:t>
             </a:r>
-            <a:endParaRPr lang="en-US" sz="6000" dirty="0"/>
+            <a:endParaRPr lang="en-US" sz="6000"/>
           </a:p>
         </p:txBody>
       </p:sp>
@@ -8953,14 +8268,14 @@
               <a:buNone/>
             </a:pPr>
             <a:r>
-              <a:rPr lang="en-US" sz="1800" dirty="0">
+              <a:rPr lang="en-US" sz="1800">
                 <a:solidFill>
                   <a:schemeClr val="accent1"/>
                 </a:solidFill>
               </a:rPr>
               <a:t>Label</a:t>
             </a:r>
-            <a:endParaRPr lang="en-US" sz="1800" dirty="0"/>
+            <a:endParaRPr lang="en-US" sz="1800"/>
           </a:p>
         </p:txBody>
       </p:sp>
@@ -9025,14 +8340,14 @@
               <a:buNone/>
             </a:pPr>
             <a:r>
-              <a:rPr lang="en-US" sz="1200" dirty="0">
+              <a:rPr lang="en-US" sz="1200">
                 <a:solidFill>
                   <a:schemeClr val="accent2"/>
                 </a:solidFill>
               </a:rPr>
               <a:t>Optional detail</a:t>
             </a:r>
-            <a:endParaRPr lang="en-US" sz="1200" dirty="0"/>
+            <a:endParaRPr lang="en-US" sz="1200"/>
           </a:p>
         </p:txBody>
       </p:sp>
@@ -9097,14 +8412,14 @@
               <a:buNone/>
             </a:pPr>
             <a:r>
-              <a:rPr lang="en-US" sz="6000" dirty="0">
+              <a:rPr lang="en-US" sz="6000">
                 <a:solidFill>
                   <a:schemeClr val="tx1"/>
                 </a:solidFill>
               </a:rPr>
               <a:t>00</a:t>
             </a:r>
-            <a:endParaRPr lang="en-US" sz="6000" dirty="0"/>
+            <a:endParaRPr lang="en-US" sz="6000"/>
           </a:p>
         </p:txBody>
       </p:sp>
@@ -9146,14 +8461,14 @@
               <a:buNone/>
             </a:pPr>
             <a:r>
-              <a:rPr lang="en-US" sz="1800" dirty="0">
+              <a:rPr lang="en-US" sz="1800">
                 <a:solidFill>
                   <a:schemeClr val="accent1"/>
                 </a:solidFill>
               </a:rPr>
               <a:t>Label</a:t>
             </a:r>
-            <a:endParaRPr lang="en-US" sz="1800" dirty="0"/>
+            <a:endParaRPr lang="en-US" sz="1800"/>
           </a:p>
         </p:txBody>
       </p:sp>
@@ -9218,14 +8533,14 @@
               <a:buNone/>
             </a:pPr>
             <a:r>
-              <a:rPr lang="en-US" sz="1200" dirty="0">
+              <a:rPr lang="en-US" sz="1200">
                 <a:solidFill>
                   <a:schemeClr val="accent2"/>
                 </a:solidFill>
               </a:rPr>
               <a:t>Optional detail</a:t>
             </a:r>
-            <a:endParaRPr lang="en-US" sz="1200" dirty="0"/>
+            <a:endParaRPr lang="en-US" sz="1200"/>
           </a:p>
         </p:txBody>
       </p:sp>
@@ -9290,14 +8605,14 @@
               <a:buNone/>
             </a:pPr>
             <a:r>
-              <a:rPr lang="en-US" sz="6000" dirty="0">
+              <a:rPr lang="en-US" sz="6000">
                 <a:solidFill>
                   <a:schemeClr val="tx1"/>
                 </a:solidFill>
               </a:rPr>
               <a:t>00</a:t>
             </a:r>
-            <a:endParaRPr lang="en-US" sz="6000" dirty="0"/>
+            <a:endParaRPr lang="en-US" sz="6000"/>
           </a:p>
         </p:txBody>
       </p:sp>
@@ -9339,14 +8654,14 @@
               <a:buNone/>
             </a:pPr>
             <a:r>
-              <a:rPr lang="en-US" sz="1800" dirty="0">
+              <a:rPr lang="en-US" sz="1800">
                 <a:solidFill>
                   <a:schemeClr val="accent1"/>
                 </a:solidFill>
               </a:rPr>
               <a:t>Label</a:t>
             </a:r>
-            <a:endParaRPr lang="en-US" sz="1800" dirty="0"/>
+            <a:endParaRPr lang="en-US" sz="1800"/>
           </a:p>
         </p:txBody>
       </p:sp>
@@ -9411,14 +8726,14 @@
               <a:buNone/>
             </a:pPr>
             <a:r>
-              <a:rPr lang="en-US" sz="1200" dirty="0">
+              <a:rPr lang="en-US" sz="1200">
                 <a:solidFill>
                   <a:schemeClr val="accent2"/>
                 </a:solidFill>
               </a:rPr>
               <a:t>Optional detail</a:t>
             </a:r>
-            <a:endParaRPr lang="en-US" sz="1200" dirty="0"/>
+            <a:endParaRPr lang="en-US" sz="1200"/>
           </a:p>
         </p:txBody>
       </p:sp>
@@ -9483,14 +8798,14 @@
               <a:buNone/>
             </a:pPr>
             <a:r>
-              <a:rPr lang="en-US" sz="6000" dirty="0">
+              <a:rPr lang="en-US" sz="6000">
                 <a:solidFill>
                   <a:schemeClr val="tx1"/>
                 </a:solidFill>
               </a:rPr>
               <a:t>00</a:t>
             </a:r>
-            <a:endParaRPr lang="en-US" sz="6000" dirty="0"/>
+            <a:endParaRPr lang="en-US" sz="6000"/>
           </a:p>
         </p:txBody>
       </p:sp>
@@ -9532,14 +8847,14 @@
               <a:buNone/>
             </a:pPr>
             <a:r>
-              <a:rPr lang="en-US" sz="1800" dirty="0">
+              <a:rPr lang="en-US" sz="1800">
                 <a:solidFill>
                   <a:schemeClr val="accent1"/>
                 </a:solidFill>
               </a:rPr>
               <a:t>Label</a:t>
             </a:r>
-            <a:endParaRPr lang="en-US" sz="1800" dirty="0"/>
+            <a:endParaRPr lang="en-US" sz="1800"/>
           </a:p>
         </p:txBody>
       </p:sp>
@@ -9604,14 +8919,14 @@
               <a:buNone/>
             </a:pPr>
             <a:r>
-              <a:rPr lang="en-US" sz="1200" dirty="0">
+              <a:rPr lang="en-US" sz="1200">
                 <a:solidFill>
                   <a:schemeClr val="accent2"/>
                 </a:solidFill>
               </a:rPr>
               <a:t>Optional detail</a:t>
             </a:r>
-            <a:endParaRPr lang="en-US" sz="1200" dirty="0"/>
+            <a:endParaRPr lang="en-US" sz="1200"/>
           </a:p>
         </p:txBody>
       </p:sp>
@@ -9640,14 +8955,14 @@
               <a:buNone/>
             </a:pPr>
             <a:r>
-              <a:rPr lang="en-US" sz="1000" dirty="0">
+              <a:rPr lang="en-US" sz="1000">
                 <a:solidFill>
                   <a:schemeClr val="accent2"/>
                 </a:solidFill>
               </a:rPr>
               <a:t>Byte Harbor Butchers</a:t>
             </a:r>
-            <a:endParaRPr lang="en-US" sz="1000" dirty="0"/>
+            <a:endParaRPr lang="en-US" sz="1000"/>
           </a:p>
         </p:txBody>
       </p:sp>
@@ -9676,14 +8991,14 @@
               <a:buNone/>
             </a:pPr>
             <a:r>
-              <a:rPr lang="en-US" sz="1000" dirty="0">
+              <a:rPr lang="en-US" sz="1000">
                 <a:solidFill>
                   <a:schemeClr val="accent2"/>
                 </a:solidFill>
               </a:rPr>
               <a:t>AI-Enhanced vs Legacy DFIR Tools: IT7510 Capstone Final Panel</a:t>
             </a:r>
-            <a:endParaRPr lang="en-US" sz="1000" dirty="0"/>
+            <a:endParaRPr lang="en-US" sz="1000"/>
           </a:p>
         </p:txBody>
       </p:sp>
@@ -9707,7 +9022,7 @@
           </a:prstGeom>
           <a:extLst>
             <a:ext uri="{C572A759-6A51-4108-AA02-DFA0A04FC94B}">
-              <ma14:wrappingTextBoxFlag xmlns="" xmlns:ma14="http://schemas.microsoft.com/office/mac/drawingml/2011/main" val="0"/>
+              <ma14:wrappingTextBoxFlag xmlns:ma14="http://schemas.microsoft.com/office/mac/drawingml/2011/main" xmlns="" val="0"/>
             </a:ext>
           </a:extLst>
         </p:spPr>
@@ -9808,14 +9123,14 @@
               <a:buNone/>
             </a:pPr>
             <a:r>
-              <a:rPr lang="en-US" sz="4000" dirty="0">
+              <a:rPr lang="en-US" sz="4000">
                 <a:solidFill>
                   <a:schemeClr val="tx1"/>
                 </a:solidFill>
               </a:rPr>
               <a:t>Click to add title</a:t>
             </a:r>
-            <a:endParaRPr lang="en-US" sz="4000" dirty="0"/>
+            <a:endParaRPr lang="en-US" sz="4000"/>
           </a:p>
         </p:txBody>
       </p:sp>
@@ -9857,14 +9172,14 @@
               <a:buNone/>
             </a:pPr>
             <a:r>
-              <a:rPr lang="en-US" sz="2200" dirty="0">
+              <a:rPr lang="en-US" sz="2200">
                 <a:solidFill>
                   <a:schemeClr val="accent1"/>
                 </a:solidFill>
               </a:rPr>
               <a:t>Left heading</a:t>
             </a:r>
-            <a:endParaRPr lang="en-US" sz="2200" dirty="0"/>
+            <a:endParaRPr lang="en-US" sz="2200"/>
           </a:p>
         </p:txBody>
       </p:sp>
@@ -9906,14 +9221,14 @@
               <a:buNone/>
             </a:pPr>
             <a:r>
-              <a:rPr lang="en-US" sz="1600" dirty="0">
+              <a:rPr lang="en-US" sz="1600">
                 <a:solidFill>
                   <a:schemeClr val="tx1"/>
                 </a:solidFill>
               </a:rPr>
               <a:t>Left content</a:t>
             </a:r>
-            <a:endParaRPr lang="en-US" sz="1600" dirty="0"/>
+            <a:endParaRPr lang="en-US" sz="1600"/>
           </a:p>
         </p:txBody>
       </p:sp>
@@ -9985,14 +9300,14 @@
               <a:buNone/>
             </a:pPr>
             <a:r>
-              <a:rPr lang="en-US" sz="2200" dirty="0">
+              <a:rPr lang="en-US" sz="2200">
                 <a:solidFill>
                   <a:schemeClr val="accent1"/>
                 </a:solidFill>
               </a:rPr>
               <a:t>Right heading</a:t>
             </a:r>
-            <a:endParaRPr lang="en-US" sz="2200" dirty="0"/>
+            <a:endParaRPr lang="en-US" sz="2200"/>
           </a:p>
         </p:txBody>
       </p:sp>
@@ -10034,14 +9349,14 @@
               <a:buNone/>
             </a:pPr>
             <a:r>
-              <a:rPr lang="en-US" sz="1600" dirty="0">
+              <a:rPr lang="en-US" sz="1600">
                 <a:solidFill>
                   <a:schemeClr val="tx1"/>
                 </a:solidFill>
               </a:rPr>
               <a:t>Right content</a:t>
             </a:r>
-            <a:endParaRPr lang="en-US" sz="1600" dirty="0"/>
+            <a:endParaRPr lang="en-US" sz="1600"/>
           </a:p>
         </p:txBody>
       </p:sp>
@@ -10070,14 +9385,14 @@
               <a:buNone/>
             </a:pPr>
             <a:r>
-              <a:rPr lang="en-US" sz="1000" dirty="0">
+              <a:rPr lang="en-US" sz="1000">
                 <a:solidFill>
                   <a:schemeClr val="accent2"/>
                 </a:solidFill>
               </a:rPr>
               <a:t>Byte Harbor Butchers</a:t>
             </a:r>
-            <a:endParaRPr lang="en-US" sz="1000" dirty="0"/>
+            <a:endParaRPr lang="en-US" sz="1000"/>
           </a:p>
         </p:txBody>
       </p:sp>
@@ -10106,14 +9421,14 @@
               <a:buNone/>
             </a:pPr>
             <a:r>
-              <a:rPr lang="en-US" sz="1000" dirty="0">
+              <a:rPr lang="en-US" sz="1000">
                 <a:solidFill>
                   <a:schemeClr val="accent2"/>
                 </a:solidFill>
               </a:rPr>
               <a:t>AI-Enhanced vs Legacy DFIR Tools: IT7510 Capstone Final Panel</a:t>
             </a:r>
-            <a:endParaRPr lang="en-US" sz="1000" dirty="0"/>
+            <a:endParaRPr lang="en-US" sz="1000"/>
           </a:p>
         </p:txBody>
       </p:sp>
@@ -10137,7 +9452,7 @@
           </a:prstGeom>
           <a:extLst>
             <a:ext uri="{C572A759-6A51-4108-AA02-DFA0A04FC94B}">
-              <ma14:wrappingTextBoxFlag xmlns="" xmlns:ma14="http://schemas.microsoft.com/office/mac/drawingml/2011/main" val="0"/>
+              <ma14:wrappingTextBoxFlag xmlns:ma14="http://schemas.microsoft.com/office/mac/drawingml/2011/main" xmlns="" val="0"/>
             </a:ext>
           </a:extLst>
         </p:spPr>
@@ -10238,14 +9553,14 @@
               <a:buNone/>
             </a:pPr>
             <a:r>
-              <a:rPr lang="en-US" sz="4000" dirty="0">
+              <a:rPr lang="en-US" sz="4000">
                 <a:solidFill>
                   <a:schemeClr val="tx1"/>
                 </a:solidFill>
               </a:rPr>
               <a:t>Click to add title</a:t>
             </a:r>
-            <a:endParaRPr lang="en-US" sz="4000" dirty="0"/>
+            <a:endParaRPr lang="en-US" sz="4000"/>
           </a:p>
         </p:txBody>
       </p:sp>
@@ -10283,14 +9598,14 @@
               <a:buNone/>
             </a:pPr>
             <a:r>
-              <a:rPr lang="en-US" dirty="0">
+              <a:rPr lang="en-US">
                 <a:solidFill>
                   <a:srgbClr val="000000"/>
                 </a:solidFill>
               </a:rPr>
               <a:t>Drag a picture here</a:t>
             </a:r>
-            <a:endParaRPr lang="en-US" dirty="0"/>
+            <a:endParaRPr lang="en-US"/>
           </a:p>
         </p:txBody>
       </p:sp>
@@ -10332,14 +9647,14 @@
               <a:buNone/>
             </a:pPr>
             <a:r>
-              <a:rPr lang="en-US" sz="1400" dirty="0">
+              <a:rPr lang="en-US" sz="1400">
                 <a:solidFill>
                   <a:schemeClr val="tx1"/>
                 </a:solidFill>
               </a:rPr>
               <a:t>Caption</a:t>
             </a:r>
-            <a:endParaRPr lang="en-US" sz="1400" dirty="0"/>
+            <a:endParaRPr lang="en-US" sz="1400"/>
           </a:p>
         </p:txBody>
       </p:sp>
@@ -10368,14 +9683,14 @@
               <a:buNone/>
             </a:pPr>
             <a:r>
-              <a:rPr lang="en-US" sz="1000" dirty="0">
+              <a:rPr lang="en-US" sz="1000">
                 <a:solidFill>
                   <a:schemeClr val="accent2"/>
                 </a:solidFill>
               </a:rPr>
               <a:t>Byte Harbor Butchers</a:t>
             </a:r>
-            <a:endParaRPr lang="en-US" sz="1000" dirty="0"/>
+            <a:endParaRPr lang="en-US" sz="1000"/>
           </a:p>
         </p:txBody>
       </p:sp>
@@ -10404,14 +9719,14 @@
               <a:buNone/>
             </a:pPr>
             <a:r>
-              <a:rPr lang="en-US" sz="1000" dirty="0">
+              <a:rPr lang="en-US" sz="1000">
                 <a:solidFill>
                   <a:schemeClr val="accent2"/>
                 </a:solidFill>
               </a:rPr>
               <a:t>AI-Enhanced vs Legacy DFIR Tools: IT7510 Capstone Final Panel</a:t>
             </a:r>
-            <a:endParaRPr lang="en-US" sz="1000" dirty="0"/>
+            <a:endParaRPr lang="en-US" sz="1000"/>
           </a:p>
         </p:txBody>
       </p:sp>
@@ -10435,7 +9750,7 @@
           </a:prstGeom>
           <a:extLst>
             <a:ext uri="{C572A759-6A51-4108-AA02-DFA0A04FC94B}">
-              <ma14:wrappingTextBoxFlag xmlns="" xmlns:ma14="http://schemas.microsoft.com/office/mac/drawingml/2011/main" val="0"/>
+              <ma14:wrappingTextBoxFlag xmlns:ma14="http://schemas.microsoft.com/office/mac/drawingml/2011/main" xmlns="" val="0"/>
             </a:ext>
           </a:extLst>
         </p:spPr>
@@ -10643,7 +9958,7 @@
           <a:p>
             <a:fld id="{4A2896E8-5C66-4B03-B6FE-687FFB376EB8}" type="datetimeFigureOut">
               <a:rPr lang="en-NZ" smtClean="0"/>
-              <a:t>9/10/2026</a:t>
+              <a:t>26/10/2026</a:t>
             </a:fld>
             <a:endParaRPr lang="en-NZ"/>
           </a:p>
@@ -10739,6 +10054,43 @@
           </a:p>
         </p:txBody>
       </p:sp>
+      <p:pic>
+        <p:nvPicPr>
+          <p:cNvPr id="8" name="Picture 7">
+            <a:extLst>
+              <a:ext uri="{FF2B5EF4-FFF2-40B4-BE49-F238E27FC236}">
+                <a16:creationId xmlns:a16="http://schemas.microsoft.com/office/drawing/2014/main" id="{FE60D192-9568-AFF6-2338-EB5ECED54EFE}"/>
+              </a:ext>
+            </a:extLst>
+          </p:cNvPr>
+          <p:cNvPicPr>
+            <a:picLocks noChangeAspect="1"/>
+          </p:cNvPicPr>
+          <p:nvPr userDrawn="1"/>
+        </p:nvPicPr>
+        <p:blipFill>
+          <a:blip r:embed="rId13">
+            <a:extLst>
+              <a:ext uri="{28A0092B-C50C-407E-A947-70E740481C1C}">
+                <a14:useLocalDpi xmlns:a14="http://schemas.microsoft.com/office/drawing/2010/main" val="0"/>
+              </a:ext>
+            </a:extLst>
+          </a:blip>
+          <a:srcRect l="6968" t="7352" r="6926" b="12025"/>
+          <a:stretch>
+            <a:fillRect/>
+          </a:stretch>
+        </p:blipFill>
+        <p:spPr>
+          <a:xfrm>
+            <a:off x="11601628" y="159416"/>
+            <a:ext cx="439396" cy="411417"/>
+          </a:xfrm>
+          <a:prstGeom prst="rect">
+            <a:avLst/>
+          </a:prstGeom>
+        </p:spPr>
+      </p:pic>
     </p:spTree>
     <p:extLst>
       <p:ext uri="{BB962C8B-B14F-4D97-AF65-F5344CB8AC3E}">
@@ -11213,7 +10565,7 @@
           <a:p>
             <a:fld id="{E89A4EF9-459A-41C2-B327-1F466C6C5316}" type="datetimeFigureOut">
               <a:rPr lang="en-NZ" smtClean="0"/>
-              <a:t>9/10/2026</a:t>
+              <a:t>26/10/2026</a:t>
             </a:fld>
             <a:endParaRPr lang="en-NZ"/>
           </a:p>
@@ -11654,10 +11006,10 @@
           <a:lstStyle/>
           <a:p>
             <a:r>
-              <a:rPr lang="en-US" dirty="0"/>
+              <a:rPr lang="en-US"/>
               <a:t>AI-Enhanced vs Legacy Digital Forensics and Investigation Tools – A Comparative Efficacy Analysis</a:t>
             </a:r>
-            <a:endParaRPr lang="en-NZ" dirty="0"/>
+            <a:endParaRPr lang="en-NZ"/>
           </a:p>
         </p:txBody>
       </p:sp>
@@ -11685,34 +11037,34 @@
           <a:lstStyle/>
           <a:p>
             <a:r>
-              <a:rPr lang="en-US" dirty="0"/>
+              <a:rPr lang="en-US"/>
               <a:t>Team Name: Byte Harbor Butchers</a:t>
             </a:r>
-            <a:endParaRPr lang="en-NZ" dirty="0"/>
-          </a:p>
-          <a:p>
-            <a:r>
-              <a:rPr lang="en-US" dirty="0"/>
+            <a:endParaRPr lang="en-NZ"/>
+          </a:p>
+          <a:p>
+            <a:r>
+              <a:rPr lang="en-US"/>
               <a:t>Team Members: Dave Sushames, Olivia Hey, Matt Baker, Sam Davies</a:t>
             </a:r>
-            <a:endParaRPr lang="en-NZ" dirty="0"/>
-          </a:p>
-          <a:p>
-            <a:r>
-              <a:rPr lang="en-NZ" dirty="0"/>
+            <a:endParaRPr lang="en-NZ"/>
+          </a:p>
+          <a:p>
+            <a:r>
+              <a:rPr lang="en-NZ"/>
               <a:t>Project Client: Geoff Gordon </a:t>
             </a:r>
           </a:p>
           <a:p>
             <a:r>
-              <a:rPr lang="en-NZ" dirty="0"/>
+              <a:rPr lang="en-NZ"/>
               <a:t>Advisors: Dr Bryce Antony, Clement </a:t>
             </a:r>
             <a:r>
-              <a:rPr lang="en-NZ" dirty="0" err="1"/>
+              <a:rPr lang="en-NZ" err="1"/>
               <a:t>Swarnappa</a:t>
             </a:r>
-            <a:endParaRPr lang="en-NZ" dirty="0"/>
+            <a:endParaRPr lang="en-NZ"/>
           </a:p>
         </p:txBody>
       </p:sp>
@@ -11768,10 +11120,10 @@
           <a:lstStyle/>
           <a:p>
             <a:r>
-              <a:rPr lang="en-US" dirty="0"/>
+              <a:rPr lang="en-US"/>
               <a:t>Testing</a:t>
             </a:r>
-            <a:endParaRPr lang="en-NZ" dirty="0"/>
+            <a:endParaRPr lang="en-NZ"/>
           </a:p>
         </p:txBody>
       </p:sp>
@@ -11800,10 +11152,10 @@
               <a:buNone/>
             </a:pPr>
             <a:r>
-              <a:rPr lang="en-US" dirty="0"/>
+              <a:rPr lang="en-US"/>
               <a:t>NIST CFTT, human reports, comparison metrics, how the reports were scored.</a:t>
             </a:r>
-            <a:endParaRPr lang="en-NZ" dirty="0"/>
+            <a:endParaRPr lang="en-NZ"/>
           </a:p>
         </p:txBody>
       </p:sp>
@@ -11859,10 +11211,10 @@
           <a:lstStyle/>
           <a:p>
             <a:r>
-              <a:rPr lang="en-US" dirty="0"/>
+              <a:rPr lang="en-US"/>
               <a:t>Key Findings and analysis</a:t>
             </a:r>
-            <a:endParaRPr lang="en-NZ" dirty="0"/>
+            <a:endParaRPr lang="en-NZ"/>
           </a:p>
         </p:txBody>
       </p:sp>
@@ -11893,19 +11245,19 @@
               <a:buNone/>
             </a:pPr>
             <a:r>
-              <a:rPr lang="en-US" dirty="0"/>
+              <a:rPr lang="en-US"/>
               <a:t>W</a:t>
             </a:r>
             <a:r>
-              <a:rPr lang="en-NZ" dirty="0"/>
+              <a:rPr lang="en-NZ"/>
               <a:t>hat the AI matched, missed, did wrong. Limitations. With reasons for the results, </a:t>
             </a:r>
             <a:r>
-              <a:rPr lang="en-NZ" dirty="0" err="1"/>
+              <a:rPr lang="en-NZ" err="1"/>
               <a:t>cuz</a:t>
             </a:r>
             <a:r>
-              <a:rPr lang="en-NZ" dirty="0"/>
+              <a:rPr lang="en-NZ"/>
               <a:t> that’s what the marking criteria wants.</a:t>
             </a:r>
           </a:p>
@@ -11932,7 +11284,7 @@
           <a:bodyPr/>
           <a:lstStyle/>
           <a:p>
-            <a:endParaRPr lang="en-NZ" dirty="0"/>
+            <a:endParaRPr lang="en-NZ"/>
           </a:p>
         </p:txBody>
       </p:sp>
@@ -11982,7 +11334,7 @@
           <a:bodyPr/>
           <a:lstStyle/>
           <a:p>
-            <a:endParaRPr lang="en-NZ" dirty="0"/>
+            <a:endParaRPr lang="en-NZ"/>
           </a:p>
         </p:txBody>
       </p:sp>
@@ -12038,10 +11390,10 @@
           <a:lstStyle/>
           <a:p>
             <a:r>
-              <a:rPr lang="en-US" dirty="0"/>
+              <a:rPr lang="en-US"/>
               <a:t>Stats</a:t>
             </a:r>
-            <a:endParaRPr lang="en-NZ" dirty="0"/>
+            <a:endParaRPr lang="en-NZ"/>
           </a:p>
         </p:txBody>
       </p:sp>
@@ -12141,7 +11493,7 @@
           <a:bodyPr/>
           <a:lstStyle/>
           <a:p>
-            <a:endParaRPr lang="en-NZ" dirty="0"/>
+            <a:endParaRPr lang="en-NZ"/>
           </a:p>
         </p:txBody>
       </p:sp>
@@ -12191,7 +11543,7 @@
           <a:bodyPr/>
           <a:lstStyle/>
           <a:p>
-            <a:endParaRPr lang="en-NZ" dirty="0"/>
+            <a:endParaRPr lang="en-NZ"/>
           </a:p>
         </p:txBody>
       </p:sp>
@@ -12397,10 +11749,10 @@
           <a:lstStyle/>
           <a:p>
             <a:r>
-              <a:rPr lang="en-US" dirty="0"/>
+              <a:rPr lang="en-US"/>
               <a:t>Client review and satisfaction</a:t>
             </a:r>
-            <a:endParaRPr lang="en-NZ" dirty="0"/>
+            <a:endParaRPr lang="en-NZ"/>
           </a:p>
         </p:txBody>
       </p:sp>
@@ -12429,10 +11781,10 @@
               <a:buNone/>
             </a:pPr>
             <a:r>
-              <a:rPr lang="en-US" dirty="0"/>
+              <a:rPr lang="en-US"/>
               <a:t>Cover the review with Geoff, what he said about it, how satisfied he was. Haven’t had the review yet, but this slide will be all about that.</a:t>
             </a:r>
-            <a:endParaRPr lang="en-NZ" dirty="0"/>
+            <a:endParaRPr lang="en-NZ"/>
           </a:p>
         </p:txBody>
       </p:sp>
@@ -12488,10 +11840,10 @@
           <a:lstStyle/>
           <a:p>
             <a:r>
-              <a:rPr lang="en-US" dirty="0"/>
+              <a:rPr lang="en-US"/>
               <a:t>Future Work and remaining tasks</a:t>
             </a:r>
-            <a:endParaRPr lang="en-NZ" dirty="0"/>
+            <a:endParaRPr lang="en-NZ"/>
           </a:p>
         </p:txBody>
       </p:sp>
@@ -12520,18 +11872,18 @@
               <a:buNone/>
             </a:pPr>
             <a:r>
-              <a:rPr lang="en-US" dirty="0"/>
+              <a:rPr lang="en-US"/>
               <a:t>Stretch goals (</a:t>
             </a:r>
             <a:r>
-              <a:rPr lang="en-US" dirty="0" err="1"/>
+              <a:rPr lang="en-US" err="1"/>
               <a:t>tenmost</a:t>
             </a:r>
             <a:r>
-              <a:rPr lang="en-US" dirty="0"/>
+              <a:rPr lang="en-US"/>
               <a:t> running decryption tools), doing multiple models, larger datasets, differing PC specs.</a:t>
             </a:r>
-            <a:endParaRPr lang="en-NZ" dirty="0"/>
+            <a:endParaRPr lang="en-NZ"/>
           </a:p>
         </p:txBody>
       </p:sp>
@@ -12587,10 +11939,10 @@
           <a:lstStyle/>
           <a:p>
             <a:r>
-              <a:rPr lang="en-US" dirty="0"/>
+              <a:rPr lang="en-US"/>
               <a:t>Any Questions?</a:t>
             </a:r>
-            <a:endParaRPr lang="en-NZ" dirty="0"/>
+            <a:endParaRPr lang="en-NZ"/>
           </a:p>
         </p:txBody>
       </p:sp>
@@ -12621,23 +11973,23 @@
               <a:buNone/>
             </a:pPr>
             <a:r>
-              <a:rPr lang="en-US" dirty="0"/>
+              <a:rPr lang="en-US"/>
               <a:t>Ones we’re </a:t>
             </a:r>
             <a:r>
-              <a:rPr lang="en-US" dirty="0" err="1"/>
+              <a:rPr lang="en-US" err="1"/>
               <a:t>prolly</a:t>
             </a:r>
             <a:r>
-              <a:rPr lang="en-US" dirty="0"/>
+              <a:rPr lang="en-US"/>
               <a:t> </a:t>
             </a:r>
             <a:r>
-              <a:rPr lang="en-US" dirty="0" err="1"/>
+              <a:rPr lang="en-US" err="1"/>
               <a:t>gonna</a:t>
             </a:r>
             <a:r>
-              <a:rPr lang="en-US" dirty="0"/>
+              <a:rPr lang="en-US"/>
               <a:t> get:</a:t>
             </a:r>
           </a:p>
@@ -12646,7 +11998,7 @@
               <a:buNone/>
             </a:pPr>
             <a:r>
-              <a:rPr lang="en-US" dirty="0"/>
+              <a:rPr lang="en-US"/>
               <a:t>Changing PM</a:t>
             </a:r>
           </a:p>
@@ -12655,7 +12007,7 @@
               <a:buNone/>
             </a:pPr>
             <a:r>
-              <a:rPr lang="en-US" dirty="0"/>
+              <a:rPr lang="en-US"/>
               <a:t>Missed logs</a:t>
             </a:r>
           </a:p>
@@ -12664,7 +12016,7 @@
               <a:buNone/>
             </a:pPr>
             <a:r>
-              <a:rPr lang="en-US" dirty="0"/>
+              <a:rPr lang="en-US"/>
               <a:t>Why the project changed</a:t>
             </a:r>
           </a:p>
@@ -12673,7 +12025,7 @@
               <a:buNone/>
             </a:pPr>
             <a:r>
-              <a:rPr lang="en-US" dirty="0"/>
+              <a:rPr lang="en-US"/>
               <a:t>Anything else Bryce comes up with</a:t>
             </a:r>
           </a:p>
@@ -12681,13 +12033,13 @@
             <a:pPr marL="0" indent="0">
               <a:buNone/>
             </a:pPr>
-            <a:endParaRPr lang="en-US" dirty="0"/>
+            <a:endParaRPr lang="en-US"/>
           </a:p>
           <a:p>
             <a:pPr marL="0" indent="0">
               <a:buNone/>
             </a:pPr>
-            <a:endParaRPr lang="en-NZ" dirty="0"/>
+            <a:endParaRPr lang="en-NZ"/>
           </a:p>
         </p:txBody>
       </p:sp>
@@ -12743,10 +12095,10 @@
           <a:lstStyle/>
           <a:p>
             <a:r>
-              <a:rPr lang="en-US" dirty="0"/>
+              <a:rPr lang="en-US"/>
               <a:t>Background and Problem</a:t>
             </a:r>
-            <a:endParaRPr lang="en-NZ" dirty="0"/>
+            <a:endParaRPr lang="en-NZ"/>
           </a:p>
         </p:txBody>
       </p:sp>
@@ -12775,10 +12127,10 @@
               <a:buNone/>
             </a:pPr>
             <a:r>
-              <a:rPr lang="en-US" dirty="0"/>
-              <a:t>Why AI in DFIR matters. Very brief, we only have 15 minutes.</a:t>
-            </a:r>
-            <a:endParaRPr lang="en-NZ" dirty="0"/>
+              <a:rPr lang="en-US"/>
+              <a:t>Why AI in DFIR matters. Very brief, we have not a big long time.</a:t>
+            </a:r>
+            <a:endParaRPr lang="en-NZ"/>
           </a:p>
         </p:txBody>
       </p:sp>
@@ -12834,10 +12186,10 @@
           <a:lstStyle/>
           <a:p>
             <a:r>
-              <a:rPr lang="en-US" dirty="0"/>
+              <a:rPr lang="en-US"/>
               <a:t>Key milestones</a:t>
             </a:r>
-            <a:endParaRPr lang="en-NZ" dirty="0"/>
+            <a:endParaRPr lang="en-NZ"/>
           </a:p>
         </p:txBody>
       </p:sp>
@@ -12868,18 +12220,18 @@
               <a:buNone/>
             </a:pPr>
             <a:r>
-              <a:rPr lang="en-US" dirty="0"/>
+              <a:rPr lang="en-US"/>
               <a:t>Timeline including proposal, mid </a:t>
             </a:r>
             <a:r>
-              <a:rPr lang="en-US" dirty="0" err="1"/>
+              <a:rPr lang="en-US" err="1"/>
               <a:t>proj</a:t>
             </a:r>
             <a:r>
-              <a:rPr lang="en-US" dirty="0"/>
+              <a:rPr lang="en-US"/>
               <a:t> presentation, development, findings, client demo/report, closeout.</a:t>
             </a:r>
-            <a:endParaRPr lang="en-NZ" dirty="0"/>
+            <a:endParaRPr lang="en-NZ"/>
           </a:p>
         </p:txBody>
       </p:sp>
@@ -12904,7 +12256,7 @@
           <a:bodyPr/>
           <a:lstStyle/>
           <a:p>
-            <a:endParaRPr lang="en-NZ" dirty="0"/>
+            <a:endParaRPr lang="en-NZ"/>
           </a:p>
         </p:txBody>
       </p:sp>
@@ -12954,7 +12306,7 @@
           <a:bodyPr/>
           <a:lstStyle/>
           <a:p>
-            <a:endParaRPr lang="en-NZ" dirty="0"/>
+            <a:endParaRPr lang="en-NZ"/>
           </a:p>
         </p:txBody>
       </p:sp>
@@ -12979,7 +12331,7 @@
           <a:bodyPr/>
           <a:lstStyle/>
           <a:p>
-            <a:endParaRPr lang="en-NZ" dirty="0"/>
+            <a:endParaRPr lang="en-NZ"/>
           </a:p>
         </p:txBody>
       </p:sp>
@@ -13029,7 +12381,7 @@
           <a:bodyPr/>
           <a:lstStyle/>
           <a:p>
-            <a:endParaRPr lang="en-NZ" dirty="0"/>
+            <a:endParaRPr lang="en-NZ"/>
           </a:p>
         </p:txBody>
       </p:sp>
@@ -13079,7 +12431,7 @@
           <a:bodyPr/>
           <a:lstStyle/>
           <a:p>
-            <a:endParaRPr lang="en-NZ" dirty="0"/>
+            <a:endParaRPr lang="en-NZ"/>
           </a:p>
         </p:txBody>
       </p:sp>
@@ -13129,7 +12481,7 @@
           <a:bodyPr/>
           <a:lstStyle/>
           <a:p>
-            <a:endParaRPr lang="en-NZ" dirty="0"/>
+            <a:endParaRPr lang="en-NZ"/>
           </a:p>
         </p:txBody>
       </p:sp>
@@ -13210,10 +12562,10 @@
           <a:lstStyle/>
           <a:p>
             <a:r>
-              <a:rPr lang="en-US" dirty="0"/>
+              <a:rPr lang="en-US"/>
               <a:t>Changes and how they were managed</a:t>
             </a:r>
-            <a:endParaRPr lang="en-NZ" dirty="0"/>
+            <a:endParaRPr lang="en-NZ"/>
           </a:p>
         </p:txBody>
       </p:sp>
@@ -13242,10 +12594,10 @@
               <a:buNone/>
             </a:pPr>
             <a:r>
-              <a:rPr lang="en-US" dirty="0"/>
-              <a:t>Change from AI tools to AI reporting. Gant chart versions. How changes were documented (proposal revisions, meeting minutes with Bryce)</a:t>
-            </a:r>
-            <a:endParaRPr lang="en-NZ" dirty="0"/>
+              <a:rPr lang="en-US"/>
+              <a:t>Change from AI tools to AI reporting. Gantt chart versions. How changes were documented (proposal revisions, meeting minutes with Bryce)</a:t>
+            </a:r>
+            <a:endParaRPr lang="en-NZ"/>
           </a:p>
         </p:txBody>
       </p:sp>
@@ -13301,10 +12653,10 @@
           <a:lstStyle/>
           <a:p>
             <a:r>
-              <a:rPr lang="en-US" dirty="0"/>
+              <a:rPr lang="en-US"/>
               <a:t>Development, research, tools, technologies</a:t>
             </a:r>
-            <a:endParaRPr lang="en-NZ" dirty="0"/>
+            <a:endParaRPr lang="en-NZ"/>
           </a:p>
         </p:txBody>
       </p:sp>
@@ -13333,26 +12685,26 @@
               <a:buNone/>
             </a:pPr>
             <a:r>
-              <a:rPr lang="en-US" dirty="0"/>
+              <a:rPr lang="en-US"/>
               <a:t>DSR, Kali Linux, </a:t>
             </a:r>
             <a:r>
-              <a:rPr lang="en-US" dirty="0" err="1"/>
+              <a:rPr lang="en-US" err="1"/>
               <a:t>Ollama</a:t>
             </a:r>
             <a:r>
-              <a:rPr lang="en-US" dirty="0"/>
+              <a:rPr lang="en-US"/>
               <a:t>, Gemma4-df at specified parameters, Foremost, Nmap, Wireshark. </a:t>
             </a:r>
             <a:r>
-              <a:rPr lang="en-US" dirty="0" err="1"/>
+              <a:rPr lang="en-US" err="1"/>
               <a:t>Tshark</a:t>
             </a:r>
             <a:r>
-              <a:rPr lang="en-US" dirty="0"/>
+              <a:rPr lang="en-US"/>
               <a:t>?</a:t>
             </a:r>
-            <a:endParaRPr lang="en-NZ" dirty="0"/>
+            <a:endParaRPr lang="en-NZ"/>
           </a:p>
         </p:txBody>
       </p:sp>
@@ -13408,10 +12760,10 @@
           <a:lstStyle/>
           <a:p>
             <a:r>
-              <a:rPr lang="en-US" dirty="0"/>
+              <a:rPr lang="en-US"/>
               <a:t>Tools </a:t>
             </a:r>
-            <a:endParaRPr lang="en-NZ" dirty="0"/>
+            <a:endParaRPr lang="en-NZ"/>
           </a:p>
         </p:txBody>
       </p:sp>
@@ -13465,14 +12817,14 @@
           <a:lstStyle/>
           <a:p>
             <a:r>
-              <a:rPr lang="en-US" dirty="0">
+              <a:rPr lang="en-US">
                 <a:solidFill>
                   <a:schemeClr val="tx2"/>
                 </a:solidFill>
               </a:rPr>
               <a:t>Foremost</a:t>
             </a:r>
-            <a:endParaRPr lang="en-NZ" dirty="0">
+            <a:endParaRPr lang="en-NZ">
               <a:solidFill>
                 <a:schemeClr val="tx2"/>
               </a:solidFill>
@@ -13502,14 +12854,9 @@
           <a:lstStyle/>
           <a:p>
             <a:r>
-              <a:rPr lang="en-US" dirty="0"/>
-              <a:t>This is a tool that carves files and </a:t>
-            </a:r>
-            <a:r>
-              <a:rPr lang="en-US" dirty="0" err="1"/>
-              <a:t>shi</a:t>
-            </a:r>
-            <a:endParaRPr lang="en-NZ" dirty="0"/>
+              <a:rPr lang="en-NZ" dirty="0"/>
+              <a:t>A digital forensics tool used to carve files from a forensic disk image. Used to recover data from hard disk storage for investigative purposes.</a:t>
+            </a:r>
           </a:p>
         </p:txBody>
       </p:sp>
@@ -13535,10 +12882,10 @@
           <a:lstStyle/>
           <a:p>
             <a:r>
-              <a:rPr lang="en-US" dirty="0"/>
+              <a:rPr lang="en-US"/>
               <a:t>Nmap</a:t>
             </a:r>
-            <a:endParaRPr lang="en-NZ" dirty="0"/>
+            <a:endParaRPr lang="en-NZ"/>
           </a:p>
         </p:txBody>
       </p:sp>
@@ -13564,17 +12911,17 @@
           <a:lstStyle/>
           <a:p>
             <a:r>
-              <a:rPr lang="en-US" dirty="0"/>
-              <a:t>This is a tool that scans hosts and </a:t>
-            </a:r>
-            <a:r>
-              <a:rPr lang="en-US" dirty="0" err="1"/>
-              <a:t>shi</a:t>
-            </a:r>
-            <a:endParaRPr lang="en-NZ" dirty="0"/>
-          </a:p>
-          <a:p>
-            <a:endParaRPr lang="en-NZ" dirty="0"/>
+              <a:rPr lang="en-NZ" dirty="0"/>
+              <a:t>A</a:t>
+            </a:r>
+            <a:r>
+              <a:rPr lang="en-NZ" b="1" dirty="0"/>
+              <a:t> </a:t>
+            </a:r>
+            <a:r>
+              <a:rPr lang="en-NZ" dirty="0"/>
+              <a:t>network reconnaissance tool that can be used to discover hosts, open ports, services, vulnerabilities, and other technically specific diagnostic information. </a:t>
+            </a:r>
           </a:p>
         </p:txBody>
       </p:sp>
@@ -13628,17 +12975,17 @@
           <a:lstStyle/>
           <a:p>
             <a:r>
-              <a:rPr lang="en-US" dirty="0"/>
+              <a:rPr lang="en-US"/>
               <a:t>W</a:t>
             </a:r>
             <a:r>
-              <a:rPr lang="en-NZ" dirty="0" err="1"/>
+              <a:rPr lang="en-NZ" err="1"/>
               <a:t>ireshark</a:t>
             </a:r>
-            <a:endParaRPr lang="en-NZ" dirty="0"/>
-          </a:p>
-          <a:p>
-            <a:endParaRPr lang="en-NZ" dirty="0"/>
+            <a:endParaRPr lang="en-NZ"/>
+          </a:p>
+          <a:p>
+            <a:endParaRPr lang="en-NZ"/>
           </a:p>
         </p:txBody>
       </p:sp>
@@ -13664,17 +13011,9 @@
           <a:lstStyle/>
           <a:p>
             <a:r>
-              <a:rPr lang="en-US" dirty="0"/>
-              <a:t>This is a tool that captures packets and </a:t>
-            </a:r>
-            <a:r>
-              <a:rPr lang="en-US" dirty="0" err="1"/>
-              <a:t>shi</a:t>
-            </a:r>
-            <a:endParaRPr lang="en-NZ" dirty="0"/>
-          </a:p>
-          <a:p>
-            <a:endParaRPr lang="en-NZ" dirty="0"/>
+              <a:rPr lang="en-NZ" dirty="0"/>
+              <a:t>A packet capturing and packet inspection tool. Used for network analysis.</a:t>
+            </a:r>
           </a:p>
         </p:txBody>
       </p:sp>
@@ -13758,10 +13097,10 @@
           <a:lstStyle/>
           <a:p>
             <a:r>
-              <a:rPr lang="en-US" dirty="0"/>
+              <a:rPr lang="en-US"/>
               <a:t>Methodology</a:t>
             </a:r>
-            <a:endParaRPr lang="en-NZ" dirty="0"/>
+            <a:endParaRPr lang="en-NZ"/>
           </a:p>
         </p:txBody>
       </p:sp>
@@ -13787,10 +13126,10 @@
           <a:lstStyle/>
           <a:p>
             <a:r>
-              <a:rPr lang="en-US" dirty="0"/>
+              <a:rPr lang="en-US"/>
               <a:t>This here be ye olde DSR diagram</a:t>
             </a:r>
-            <a:endParaRPr lang="en-NZ" dirty="0"/>
+            <a:endParaRPr lang="en-NZ"/>
           </a:p>
         </p:txBody>
       </p:sp>
@@ -13878,10 +13217,10 @@
           <a:lstStyle/>
           <a:p>
             <a:r>
-              <a:rPr lang="en-US" dirty="0"/>
+              <a:rPr lang="en-US"/>
               <a:t>Primary artefact</a:t>
             </a:r>
-            <a:endParaRPr lang="en-NZ" dirty="0"/>
+            <a:endParaRPr lang="en-NZ"/>
           </a:p>
         </p:txBody>
       </p:sp>
@@ -13910,7 +13249,7 @@
               <a:buNone/>
             </a:pPr>
             <a:r>
-              <a:rPr lang="en-US" dirty="0"/>
+              <a:rPr lang="en-US"/>
               <a:t>Show Sam’s flowchart diagrams.</a:t>
             </a:r>
           </a:p>
@@ -13919,7 +13258,7 @@
               <a:buNone/>
             </a:pPr>
             <a:r>
-              <a:rPr lang="en-US" dirty="0"/>
+              <a:rPr lang="en-US"/>
               <a:t>Mention how complete it is against Geoff’s requirements</a:t>
             </a:r>
           </a:p>
@@ -13927,21 +13266,17 @@
             <a:pPr marL="0" indent="0">
               <a:buNone/>
             </a:pPr>
-            <a:endParaRPr lang="en-US" dirty="0"/>
+            <a:endParaRPr lang="en-US"/>
           </a:p>
           <a:p>
             <a:pPr marL="0" indent="0">
               <a:buNone/>
             </a:pPr>
             <a:r>
-              <a:rPr lang="en-US" dirty="0"/>
-              <a:t>Maybe a README for </a:t>
-            </a:r>
-            <a:r>
               <a:rPr lang="en-US"/>
-              <a:t>the scripts?</a:t>
-            </a:r>
-            <a:endParaRPr lang="en-NZ" dirty="0"/>
+              <a:t>Maybe a README for the scripts?</a:t>
+            </a:r>
+            <a:endParaRPr lang="en-NZ"/>
           </a:p>
         </p:txBody>
       </p:sp>
@@ -13997,10 +13332,10 @@
           <a:lstStyle/>
           <a:p>
             <a:r>
-              <a:rPr lang="en-US" dirty="0"/>
+              <a:rPr lang="en-US"/>
               <a:t>Demonstration</a:t>
             </a:r>
-            <a:endParaRPr lang="en-NZ" dirty="0"/>
+            <a:endParaRPr lang="en-NZ"/>
           </a:p>
         </p:txBody>
       </p:sp>
@@ -14029,10 +13364,10 @@
               <a:buNone/>
             </a:pPr>
             <a:r>
-              <a:rPr lang="en-US" dirty="0"/>
+              <a:rPr lang="en-US"/>
               <a:t>Either a recording or a live demo. Recording less likely to break. Have two reports we can compare.</a:t>
             </a:r>
-            <a:endParaRPr lang="en-NZ" dirty="0"/>
+            <a:endParaRPr lang="en-NZ"/>
           </a:p>
         </p:txBody>
       </p:sp>

--- a/Academic Documents/Final Panel Presentation/Final Panel Slides 1.1 - DS.pptx
+++ b/Academic Documents/Final Panel Presentation/Final Panel Slides 1.1 - DS.pptx
@@ -119,15 +119,12 @@
       </a:defRPr>
     </a:lvl9pPr>
   </p:defaultTextStyle>
+  <p:extLst>
+    <p:ext uri="{EFAFB233-063F-42B5-8137-9DF3F51BA10A}">
+      <p15:sldGuideLst xmlns:p15="http://schemas.microsoft.com/office/powerpoint/2012/main"/>
+    </p:ext>
+  </p:extLst>
 </p:presentation>
-</file>
-
-<file path=ppt/revisionInfo.xml><?xml version="1.0" encoding="utf-8"?>
-<p1510:revInfo xmlns:a="http://schemas.openxmlformats.org/drawingml/2006/main" xmlns:r="http://schemas.openxmlformats.org/officeDocument/2006/relationships" xmlns:p1510="http://schemas.microsoft.com/office/powerpoint/2015/10/main">
-  <p1510:revLst>
-    <p1510:client id="{3378A5B4-34A5-42AF-8162-FCA3941F24F2}" v="46" dt="2026-10-25T20:13:46.619"/>
-  </p1510:revLst>
-</p1510:revInfo>
 </file>
 
 <file path=ppt/changesInfos/changesInfo1.xml><?xml version="1.0" encoding="utf-8"?>
@@ -135,7 +132,7 @@
   <pc:docChgLst>
     <pc:chgData name="Dave Sushames" userId="ce71797e-895c-47df-af8e-c160254d5cef" providerId="ADAL" clId="{067FCE3D-3D41-4548-936F-F0A348C85C95}"/>
     <pc:docChg chg="undo custSel addSld modSld sldOrd addMainMaster delMainMaster modMainMaster">
-      <pc:chgData name="Dave Sushames" userId="ce71797e-895c-47df-af8e-c160254d5cef" providerId="ADAL" clId="{067FCE3D-3D41-4548-936F-F0A348C85C95}" dt="2026-10-25T20:26:32.758" v="471" actId="1076"/>
+      <pc:chgData name="Dave Sushames" userId="ce71797e-895c-47df-af8e-c160254d5cef" providerId="ADAL" clId="{067FCE3D-3D41-4548-936F-F0A348C85C95}" dt="2026-10-26T20:49:00.732" v="526" actId="20577"/>
       <pc:docMkLst>
         <pc:docMk/>
       </pc:docMkLst>
@@ -480,7 +477,7 @@
         </pc:spChg>
       </pc:sldChg>
       <pc:sldChg chg="addSp delSp modSp new mod ord modClrScheme chgLayout">
-        <pc:chgData name="Dave Sushames" userId="ce71797e-895c-47df-af8e-c160254d5cef" providerId="ADAL" clId="{067FCE3D-3D41-4548-936F-F0A348C85C95}" dt="2026-10-09T05:48:25.795" v="130" actId="20577"/>
+        <pc:chgData name="Dave Sushames" userId="ce71797e-895c-47df-af8e-c160254d5cef" providerId="ADAL" clId="{067FCE3D-3D41-4548-936F-F0A348C85C95}" dt="2026-10-26T20:49:00.732" v="526" actId="20577"/>
         <pc:sldMkLst>
           <pc:docMk/>
           <pc:sldMk cId="4059292594" sldId="273"/>
@@ -493,16 +490,32 @@
             <ac:spMk id="4" creationId="{8C906208-B8D7-7658-BDBB-1F399C091446}"/>
           </ac:spMkLst>
         </pc:spChg>
+        <pc:spChg chg="mod">
+          <ac:chgData name="Dave Sushames" userId="ce71797e-895c-47df-af8e-c160254d5cef" providerId="ADAL" clId="{067FCE3D-3D41-4548-936F-F0A348C85C95}" dt="2026-10-26T20:48:33.731" v="479" actId="20577"/>
+          <ac:spMkLst>
+            <pc:docMk/>
+            <pc:sldMk cId="4059292594" sldId="273"/>
+            <ac:spMk id="5" creationId="{E6CE42E8-9419-3179-0F9D-B8CD142899E2}"/>
+          </ac:spMkLst>
+        </pc:spChg>
         <pc:spChg chg="add mod ord">
-          <ac:chgData name="Dave Sushames" userId="ce71797e-895c-47df-af8e-c160254d5cef" providerId="ADAL" clId="{067FCE3D-3D41-4548-936F-F0A348C85C95}" dt="2026-10-09T05:48:23.214" v="125" actId="700"/>
+          <ac:chgData name="Dave Sushames" userId="ce71797e-895c-47df-af8e-c160254d5cef" providerId="ADAL" clId="{067FCE3D-3D41-4548-936F-F0A348C85C95}" dt="2026-10-26T20:48:43.819" v="497" actId="20577"/>
           <ac:spMkLst>
             <pc:docMk/>
             <pc:sldMk cId="4059292594" sldId="273"/>
             <ac:spMk id="6" creationId="{B8FF18DA-C768-E7E7-97DA-55C316B1706F}"/>
           </ac:spMkLst>
         </pc:spChg>
+        <pc:spChg chg="mod">
+          <ac:chgData name="Dave Sushames" userId="ce71797e-895c-47df-af8e-c160254d5cef" providerId="ADAL" clId="{067FCE3D-3D41-4548-936F-F0A348C85C95}" dt="2026-10-26T20:48:35.698" v="480" actId="20577"/>
+          <ac:spMkLst>
+            <pc:docMk/>
+            <pc:sldMk cId="4059292594" sldId="273"/>
+            <ac:spMk id="8" creationId="{379DD065-03FB-D8B8-DBC4-C9DCF762B477}"/>
+          </ac:spMkLst>
+        </pc:spChg>
         <pc:spChg chg="add mod ord">
-          <ac:chgData name="Dave Sushames" userId="ce71797e-895c-47df-af8e-c160254d5cef" providerId="ADAL" clId="{067FCE3D-3D41-4548-936F-F0A348C85C95}" dt="2026-10-09T05:48:23.214" v="125" actId="700"/>
+          <ac:chgData name="Dave Sushames" userId="ce71797e-895c-47df-af8e-c160254d5cef" providerId="ADAL" clId="{067FCE3D-3D41-4548-936F-F0A348C85C95}" dt="2026-10-26T20:48:51.867" v="510" actId="20577"/>
           <ac:spMkLst>
             <pc:docMk/>
             <pc:sldMk cId="4059292594" sldId="273"/>
@@ -510,7 +523,7 @@
           </ac:spMkLst>
         </pc:spChg>
         <pc:spChg chg="add mod ord">
-          <ac:chgData name="Dave Sushames" userId="ce71797e-895c-47df-af8e-c160254d5cef" providerId="ADAL" clId="{067FCE3D-3D41-4548-936F-F0A348C85C95}" dt="2026-10-09T05:48:23.214" v="125" actId="700"/>
+          <ac:chgData name="Dave Sushames" userId="ce71797e-895c-47df-af8e-c160254d5cef" providerId="ADAL" clId="{067FCE3D-3D41-4548-936F-F0A348C85C95}" dt="2026-10-26T20:48:36.850" v="481" actId="20577"/>
           <ac:spMkLst>
             <pc:docMk/>
             <pc:sldMk cId="4059292594" sldId="273"/>
@@ -518,7 +531,7 @@
           </ac:spMkLst>
         </pc:spChg>
         <pc:spChg chg="add mod ord">
-          <ac:chgData name="Dave Sushames" userId="ce71797e-895c-47df-af8e-c160254d5cef" providerId="ADAL" clId="{067FCE3D-3D41-4548-936F-F0A348C85C95}" dt="2026-10-09T05:48:23.214" v="125" actId="700"/>
+          <ac:chgData name="Dave Sushames" userId="ce71797e-895c-47df-af8e-c160254d5cef" providerId="ADAL" clId="{067FCE3D-3D41-4548-936F-F0A348C85C95}" dt="2026-10-26T20:48:56.515" v="516" actId="20577"/>
           <ac:spMkLst>
             <pc:docMk/>
             <pc:sldMk cId="4059292594" sldId="273"/>
@@ -534,7 +547,7 @@
           </ac:spMkLst>
         </pc:spChg>
         <pc:spChg chg="add mod ord">
-          <ac:chgData name="Dave Sushames" userId="ce71797e-895c-47df-af8e-c160254d5cef" providerId="ADAL" clId="{067FCE3D-3D41-4548-936F-F0A348C85C95}" dt="2026-10-09T05:48:23.214" v="125" actId="700"/>
+          <ac:chgData name="Dave Sushames" userId="ce71797e-895c-47df-af8e-c160254d5cef" providerId="ADAL" clId="{067FCE3D-3D41-4548-936F-F0A348C85C95}" dt="2026-10-26T20:48:37.667" v="482" actId="20577"/>
           <ac:spMkLst>
             <pc:docMk/>
             <pc:sldMk cId="4059292594" sldId="273"/>
@@ -542,7 +555,7 @@
           </ac:spMkLst>
         </pc:spChg>
         <pc:spChg chg="add mod ord">
-          <ac:chgData name="Dave Sushames" userId="ce71797e-895c-47df-af8e-c160254d5cef" providerId="ADAL" clId="{067FCE3D-3D41-4548-936F-F0A348C85C95}" dt="2026-10-09T05:48:23.214" v="125" actId="700"/>
+          <ac:chgData name="Dave Sushames" userId="ce71797e-895c-47df-af8e-c160254d5cef" providerId="ADAL" clId="{067FCE3D-3D41-4548-936F-F0A348C85C95}" dt="2026-10-26T20:49:00.732" v="526" actId="20577"/>
           <ac:spMkLst>
             <pc:docMk/>
             <pc:sldMk cId="4059292594" sldId="273"/>
@@ -1696,7 +1709,7 @@
           </a:prstGeom>
           <a:extLst>
             <a:ext uri="{C572A759-6A51-4108-AA02-DFA0A04FC94B}">
-              <ma14:wrappingTextBoxFlag xmlns:ma14="http://schemas.microsoft.com/office/mac/drawingml/2011/main" xmlns="" val="0"/>
+              <ma14:wrappingTextBoxFlag xmlns="" xmlns:ma14="http://schemas.microsoft.com/office/mac/drawingml/2011/main" val="0"/>
             </a:ext>
           </a:extLst>
         </p:spPr>
@@ -2079,7 +2092,7 @@
           <a:p>
             <a:fld id="{E89A4EF9-459A-41C2-B327-1F466C6C5316}" type="datetimeFigureOut">
               <a:rPr lang="en-NZ" smtClean="0"/>
-              <a:t>26/10/2026</a:t>
+              <a:t>27/10/2026</a:t>
             </a:fld>
             <a:endParaRPr lang="en-NZ"/>
           </a:p>
@@ -2279,7 +2292,7 @@
           <a:p>
             <a:fld id="{E89A4EF9-459A-41C2-B327-1F466C6C5316}" type="datetimeFigureOut">
               <a:rPr lang="en-NZ" smtClean="0"/>
-              <a:t>26/10/2026</a:t>
+              <a:t>27/10/2026</a:t>
             </a:fld>
             <a:endParaRPr lang="en-NZ"/>
           </a:p>
@@ -2555,7 +2568,7 @@
           <a:p>
             <a:fld id="{E89A4EF9-459A-41C2-B327-1F466C6C5316}" type="datetimeFigureOut">
               <a:rPr lang="en-NZ" smtClean="0"/>
-              <a:t>26/10/2026</a:t>
+              <a:t>27/10/2026</a:t>
             </a:fld>
             <a:endParaRPr lang="en-NZ"/>
           </a:p>
@@ -2823,7 +2836,7 @@
           <a:p>
             <a:fld id="{E89A4EF9-459A-41C2-B327-1F466C6C5316}" type="datetimeFigureOut">
               <a:rPr lang="en-NZ" smtClean="0"/>
-              <a:t>26/10/2026</a:t>
+              <a:t>27/10/2026</a:t>
             </a:fld>
             <a:endParaRPr lang="en-NZ"/>
           </a:p>
@@ -3238,7 +3251,7 @@
           <a:p>
             <a:fld id="{E89A4EF9-459A-41C2-B327-1F466C6C5316}" type="datetimeFigureOut">
               <a:rPr lang="en-NZ" smtClean="0"/>
-              <a:t>26/10/2026</a:t>
+              <a:t>27/10/2026</a:t>
             </a:fld>
             <a:endParaRPr lang="en-NZ"/>
           </a:p>
@@ -3380,7 +3393,7 @@
           <a:p>
             <a:fld id="{E89A4EF9-459A-41C2-B327-1F466C6C5316}" type="datetimeFigureOut">
               <a:rPr lang="en-NZ" smtClean="0"/>
-              <a:t>26/10/2026</a:t>
+              <a:t>27/10/2026</a:t>
             </a:fld>
             <a:endParaRPr lang="en-NZ"/>
           </a:p>
@@ -3493,7 +3506,7 @@
           <a:p>
             <a:fld id="{E89A4EF9-459A-41C2-B327-1F466C6C5316}" type="datetimeFigureOut">
               <a:rPr lang="en-NZ" smtClean="0"/>
-              <a:t>26/10/2026</a:t>
+              <a:t>27/10/2026</a:t>
             </a:fld>
             <a:endParaRPr lang="en-NZ"/>
           </a:p>
@@ -3806,7 +3819,7 @@
           <a:p>
             <a:fld id="{E89A4EF9-459A-41C2-B327-1F466C6C5316}" type="datetimeFigureOut">
               <a:rPr lang="en-NZ" smtClean="0"/>
-              <a:t>26/10/2026</a:t>
+              <a:t>27/10/2026</a:t>
             </a:fld>
             <a:endParaRPr lang="en-NZ"/>
           </a:p>
@@ -4149,7 +4162,7 @@
           </a:prstGeom>
           <a:extLst>
             <a:ext uri="{C572A759-6A51-4108-AA02-DFA0A04FC94B}">
-              <ma14:wrappingTextBoxFlag xmlns:ma14="http://schemas.microsoft.com/office/mac/drawingml/2011/main" xmlns="" val="0"/>
+              <ma14:wrappingTextBoxFlag xmlns="" xmlns:ma14="http://schemas.microsoft.com/office/mac/drawingml/2011/main" val="0"/>
             </a:ext>
           </a:extLst>
         </p:spPr>
@@ -4403,7 +4416,7 @@
           <a:p>
             <a:fld id="{E89A4EF9-459A-41C2-B327-1F466C6C5316}" type="datetimeFigureOut">
               <a:rPr lang="en-NZ" smtClean="0"/>
-              <a:t>26/10/2026</a:t>
+              <a:t>27/10/2026</a:t>
             </a:fld>
             <a:endParaRPr lang="en-NZ"/>
           </a:p>
@@ -4603,7 +4616,7 @@
           <a:p>
             <a:fld id="{E89A4EF9-459A-41C2-B327-1F466C6C5316}" type="datetimeFigureOut">
               <a:rPr lang="en-NZ" smtClean="0"/>
-              <a:t>26/10/2026</a:t>
+              <a:t>27/10/2026</a:t>
             </a:fld>
             <a:endParaRPr lang="en-NZ"/>
           </a:p>
@@ -4813,7 +4826,7 @@
           <a:p>
             <a:fld id="{E89A4EF9-459A-41C2-B327-1F466C6C5316}" type="datetimeFigureOut">
               <a:rPr lang="en-NZ" smtClean="0"/>
-              <a:t>26/10/2026</a:t>
+              <a:t>27/10/2026</a:t>
             </a:fld>
             <a:endParaRPr lang="en-NZ"/>
           </a:p>
@@ -5730,7 +5743,7 @@
           </a:prstGeom>
           <a:extLst>
             <a:ext uri="{C572A759-6A51-4108-AA02-DFA0A04FC94B}">
-              <ma14:wrappingTextBoxFlag xmlns:ma14="http://schemas.microsoft.com/office/mac/drawingml/2011/main" xmlns="" val="0"/>
+              <ma14:wrappingTextBoxFlag xmlns="" xmlns:ma14="http://schemas.microsoft.com/office/mac/drawingml/2011/main" val="0"/>
             </a:ext>
           </a:extLst>
         </p:spPr>
@@ -6954,7 +6967,7 @@
           </a:prstGeom>
           <a:extLst>
             <a:ext uri="{C572A759-6A51-4108-AA02-DFA0A04FC94B}">
-              <ma14:wrappingTextBoxFlag xmlns:ma14="http://schemas.microsoft.com/office/mac/drawingml/2011/main" xmlns="" val="0"/>
+              <ma14:wrappingTextBoxFlag xmlns="" xmlns:ma14="http://schemas.microsoft.com/office/mac/drawingml/2011/main" val="0"/>
             </a:ext>
           </a:extLst>
         </p:spPr>
@@ -7207,7 +7220,7 @@
           </a:prstGeom>
           <a:extLst>
             <a:ext uri="{C572A759-6A51-4108-AA02-DFA0A04FC94B}">
-              <ma14:wrappingTextBoxFlag xmlns:ma14="http://schemas.microsoft.com/office/mac/drawingml/2011/main" xmlns="" val="0"/>
+              <ma14:wrappingTextBoxFlag xmlns="" xmlns:ma14="http://schemas.microsoft.com/office/mac/drawingml/2011/main" val="0"/>
             </a:ext>
           </a:extLst>
         </p:spPr>
@@ -8046,7 +8059,7 @@
           </a:prstGeom>
           <a:extLst>
             <a:ext uri="{C572A759-6A51-4108-AA02-DFA0A04FC94B}">
-              <ma14:wrappingTextBoxFlag xmlns:ma14="http://schemas.microsoft.com/office/mac/drawingml/2011/main" xmlns="" val="0"/>
+              <ma14:wrappingTextBoxFlag xmlns="" xmlns:ma14="http://schemas.microsoft.com/office/mac/drawingml/2011/main" val="0"/>
             </a:ext>
           </a:extLst>
         </p:spPr>
@@ -9022,7 +9035,7 @@
           </a:prstGeom>
           <a:extLst>
             <a:ext uri="{C572A759-6A51-4108-AA02-DFA0A04FC94B}">
-              <ma14:wrappingTextBoxFlag xmlns:ma14="http://schemas.microsoft.com/office/mac/drawingml/2011/main" xmlns="" val="0"/>
+              <ma14:wrappingTextBoxFlag xmlns="" xmlns:ma14="http://schemas.microsoft.com/office/mac/drawingml/2011/main" val="0"/>
             </a:ext>
           </a:extLst>
         </p:spPr>
@@ -9452,7 +9465,7 @@
           </a:prstGeom>
           <a:extLst>
             <a:ext uri="{C572A759-6A51-4108-AA02-DFA0A04FC94B}">
-              <ma14:wrappingTextBoxFlag xmlns:ma14="http://schemas.microsoft.com/office/mac/drawingml/2011/main" xmlns="" val="0"/>
+              <ma14:wrappingTextBoxFlag xmlns="" xmlns:ma14="http://schemas.microsoft.com/office/mac/drawingml/2011/main" val="0"/>
             </a:ext>
           </a:extLst>
         </p:spPr>
@@ -9750,7 +9763,7 @@
           </a:prstGeom>
           <a:extLst>
             <a:ext uri="{C572A759-6A51-4108-AA02-DFA0A04FC94B}">
-              <ma14:wrappingTextBoxFlag xmlns:ma14="http://schemas.microsoft.com/office/mac/drawingml/2011/main" xmlns="" val="0"/>
+              <ma14:wrappingTextBoxFlag xmlns="" xmlns:ma14="http://schemas.microsoft.com/office/mac/drawingml/2011/main" val="0"/>
             </a:ext>
           </a:extLst>
         </p:spPr>
@@ -9958,7 +9971,7 @@
           <a:p>
             <a:fld id="{4A2896E8-5C66-4B03-B6FE-687FFB376EB8}" type="datetimeFigureOut">
               <a:rPr lang="en-NZ" smtClean="0"/>
-              <a:t>26/10/2026</a:t>
+              <a:t>27/10/2026</a:t>
             </a:fld>
             <a:endParaRPr lang="en-NZ"/>
           </a:p>
@@ -10565,7 +10578,7 @@
           <a:p>
             <a:fld id="{E89A4EF9-459A-41C2-B327-1F466C6C5316}" type="datetimeFigureOut">
               <a:rPr lang="en-NZ" smtClean="0"/>
-              <a:t>26/10/2026</a:t>
+              <a:t>27/10/2026</a:t>
             </a:fld>
             <a:endParaRPr lang="en-NZ"/>
           </a:p>
@@ -11418,24 +11431,82 @@
           <a:bodyPr/>
           <a:lstStyle/>
           <a:p>
+            <a:r>
+              <a:rPr lang="en-US" dirty="0"/>
+              <a:t>W</a:t>
+            </a:r>
+            <a:endParaRPr lang="en-NZ" dirty="0"/>
+          </a:p>
+        </p:txBody>
+      </p:sp>
+      <p:sp>
+        <p:nvSpPr>
+          <p:cNvPr id="6" name="Text Placeholder 5">
+            <a:extLst>
+              <a:ext uri="{FF2B5EF4-FFF2-40B4-BE49-F238E27FC236}">
+                <a16:creationId xmlns:a16="http://schemas.microsoft.com/office/drawing/2014/main" id="{B8FF18DA-C768-E7E7-97DA-55C316B1706F}"/>
+              </a:ext>
+            </a:extLst>
+          </p:cNvPr>
+          <p:cNvSpPr>
+            <a:spLocks noGrp="1"/>
+          </p:cNvSpPr>
+          <p:nvPr>
+            <p:ph type="body" idx="103"/>
+          </p:nvPr>
+        </p:nvSpPr>
+        <p:spPr/>
+        <p:txBody>
+          <a:bodyPr/>
+          <a:lstStyle/>
+          <a:p>
+            <a:r>
+              <a:rPr lang="en-US" dirty="0"/>
+              <a:t>Human avg</a:t>
+            </a:r>
+            <a:endParaRPr lang="en-NZ" dirty="0"/>
+          </a:p>
+        </p:txBody>
+      </p:sp>
+      <p:sp>
+        <p:nvSpPr>
+          <p:cNvPr id="7" name="Text Placeholder 6">
+            <a:extLst>
+              <a:ext uri="{FF2B5EF4-FFF2-40B4-BE49-F238E27FC236}">
+                <a16:creationId xmlns:a16="http://schemas.microsoft.com/office/drawing/2014/main" id="{A6C19B56-99CB-3114-47D9-6DB73F91AF4F}"/>
+              </a:ext>
+            </a:extLst>
+          </p:cNvPr>
+          <p:cNvSpPr>
+            <a:spLocks noGrp="1"/>
+          </p:cNvSpPr>
+          <p:nvPr>
+            <p:ph type="body" idx="105"/>
+          </p:nvPr>
+        </p:nvSpPr>
+        <p:spPr/>
+        <p:txBody>
+          <a:bodyPr/>
+          <a:lstStyle/>
+          <a:p>
             <a:endParaRPr lang="en-NZ"/>
           </a:p>
         </p:txBody>
       </p:sp>
       <p:sp>
         <p:nvSpPr>
-          <p:cNvPr id="6" name="Text Placeholder 5">
-            <a:extLst>
-              <a:ext uri="{FF2B5EF4-FFF2-40B4-BE49-F238E27FC236}">
-                <a16:creationId xmlns:a16="http://schemas.microsoft.com/office/drawing/2014/main" id="{B8FF18DA-C768-E7E7-97DA-55C316B1706F}"/>
-              </a:ext>
-            </a:extLst>
-          </p:cNvPr>
-          <p:cNvSpPr>
-            <a:spLocks noGrp="1"/>
-          </p:cNvSpPr>
-          <p:nvPr>
-            <p:ph type="body" idx="103"/>
+          <p:cNvPr id="8" name="Text Placeholder 7">
+            <a:extLst>
+              <a:ext uri="{FF2B5EF4-FFF2-40B4-BE49-F238E27FC236}">
+                <a16:creationId xmlns:a16="http://schemas.microsoft.com/office/drawing/2014/main" id="{379DD065-03FB-D8B8-DBC4-C9DCF762B477}"/>
+              </a:ext>
+            </a:extLst>
+          </p:cNvPr>
+          <p:cNvSpPr>
+            <a:spLocks noGrp="1"/>
+          </p:cNvSpPr>
+          <p:nvPr>
+            <p:ph type="body" idx="107"/>
           </p:nvPr>
         </p:nvSpPr>
         <p:spPr/>
@@ -11443,24 +11514,82 @@
           <a:bodyPr/>
           <a:lstStyle/>
           <a:p>
+            <a:r>
+              <a:rPr lang="en-US" dirty="0"/>
+              <a:t>X</a:t>
+            </a:r>
+            <a:endParaRPr lang="en-NZ" dirty="0"/>
+          </a:p>
+        </p:txBody>
+      </p:sp>
+      <p:sp>
+        <p:nvSpPr>
+          <p:cNvPr id="9" name="Text Placeholder 8">
+            <a:extLst>
+              <a:ext uri="{FF2B5EF4-FFF2-40B4-BE49-F238E27FC236}">
+                <a16:creationId xmlns:a16="http://schemas.microsoft.com/office/drawing/2014/main" id="{09A1E740-03EE-F3C5-3EBC-1A6C705859B6}"/>
+              </a:ext>
+            </a:extLst>
+          </p:cNvPr>
+          <p:cNvSpPr>
+            <a:spLocks noGrp="1"/>
+          </p:cNvSpPr>
+          <p:nvPr>
+            <p:ph type="body" idx="108"/>
+          </p:nvPr>
+        </p:nvSpPr>
+        <p:spPr/>
+        <p:txBody>
+          <a:bodyPr/>
+          <a:lstStyle/>
+          <a:p>
+            <a:r>
+              <a:rPr lang="en-US" dirty="0"/>
+              <a:t>Human min/max</a:t>
+            </a:r>
+            <a:endParaRPr lang="en-NZ" dirty="0"/>
+          </a:p>
+        </p:txBody>
+      </p:sp>
+      <p:sp>
+        <p:nvSpPr>
+          <p:cNvPr id="10" name="Text Placeholder 9">
+            <a:extLst>
+              <a:ext uri="{FF2B5EF4-FFF2-40B4-BE49-F238E27FC236}">
+                <a16:creationId xmlns:a16="http://schemas.microsoft.com/office/drawing/2014/main" id="{808887FB-BD43-62EA-1AE9-53E82473ED3F}"/>
+              </a:ext>
+            </a:extLst>
+          </p:cNvPr>
+          <p:cNvSpPr>
+            <a:spLocks noGrp="1"/>
+          </p:cNvSpPr>
+          <p:nvPr>
+            <p:ph type="body" idx="110"/>
+          </p:nvPr>
+        </p:nvSpPr>
+        <p:spPr/>
+        <p:txBody>
+          <a:bodyPr/>
+          <a:lstStyle/>
+          <a:p>
             <a:endParaRPr lang="en-NZ"/>
           </a:p>
         </p:txBody>
       </p:sp>
       <p:sp>
         <p:nvSpPr>
-          <p:cNvPr id="7" name="Text Placeholder 6">
-            <a:extLst>
-              <a:ext uri="{FF2B5EF4-FFF2-40B4-BE49-F238E27FC236}">
-                <a16:creationId xmlns:a16="http://schemas.microsoft.com/office/drawing/2014/main" id="{A6C19B56-99CB-3114-47D9-6DB73F91AF4F}"/>
-              </a:ext>
-            </a:extLst>
-          </p:cNvPr>
-          <p:cNvSpPr>
-            <a:spLocks noGrp="1"/>
-          </p:cNvSpPr>
-          <p:nvPr>
-            <p:ph type="body" idx="105"/>
+          <p:cNvPr id="11" name="Text Placeholder 10">
+            <a:extLst>
+              <a:ext uri="{FF2B5EF4-FFF2-40B4-BE49-F238E27FC236}">
+                <a16:creationId xmlns:a16="http://schemas.microsoft.com/office/drawing/2014/main" id="{8C6B0386-8755-F1E2-3B9C-E5BF007D17C6}"/>
+              </a:ext>
+            </a:extLst>
+          </p:cNvPr>
+          <p:cNvSpPr>
+            <a:spLocks noGrp="1"/>
+          </p:cNvSpPr>
+          <p:nvPr>
+            <p:ph type="body" idx="112"/>
           </p:nvPr>
         </p:nvSpPr>
         <p:spPr/>
@@ -11468,24 +11597,82 @@
           <a:bodyPr/>
           <a:lstStyle/>
           <a:p>
+            <a:r>
+              <a:rPr lang="en-US" dirty="0"/>
+              <a:t>Y</a:t>
+            </a:r>
+            <a:endParaRPr lang="en-NZ" dirty="0"/>
+          </a:p>
+        </p:txBody>
+      </p:sp>
+      <p:sp>
+        <p:nvSpPr>
+          <p:cNvPr id="12" name="Text Placeholder 11">
+            <a:extLst>
+              <a:ext uri="{FF2B5EF4-FFF2-40B4-BE49-F238E27FC236}">
+                <a16:creationId xmlns:a16="http://schemas.microsoft.com/office/drawing/2014/main" id="{DE867941-64F2-B11B-0067-49B13398E00B}"/>
+              </a:ext>
+            </a:extLst>
+          </p:cNvPr>
+          <p:cNvSpPr>
+            <a:spLocks noGrp="1"/>
+          </p:cNvSpPr>
+          <p:nvPr>
+            <p:ph type="body" idx="113"/>
+          </p:nvPr>
+        </p:nvSpPr>
+        <p:spPr/>
+        <p:txBody>
+          <a:bodyPr/>
+          <a:lstStyle/>
+          <a:p>
+            <a:r>
+              <a:rPr lang="en-US" dirty="0"/>
+              <a:t>AI Avg</a:t>
+            </a:r>
+            <a:endParaRPr lang="en-NZ" dirty="0"/>
+          </a:p>
+        </p:txBody>
+      </p:sp>
+      <p:sp>
+        <p:nvSpPr>
+          <p:cNvPr id="13" name="Text Placeholder 12">
+            <a:extLst>
+              <a:ext uri="{FF2B5EF4-FFF2-40B4-BE49-F238E27FC236}">
+                <a16:creationId xmlns:a16="http://schemas.microsoft.com/office/drawing/2014/main" id="{46E068EF-6FD4-F984-0BBD-DB499CEFFCA2}"/>
+              </a:ext>
+            </a:extLst>
+          </p:cNvPr>
+          <p:cNvSpPr>
+            <a:spLocks noGrp="1"/>
+          </p:cNvSpPr>
+          <p:nvPr>
+            <p:ph type="body" idx="115"/>
+          </p:nvPr>
+        </p:nvSpPr>
+        <p:spPr/>
+        <p:txBody>
+          <a:bodyPr/>
+          <a:lstStyle/>
+          <a:p>
             <a:endParaRPr lang="en-NZ"/>
           </a:p>
         </p:txBody>
       </p:sp>
       <p:sp>
         <p:nvSpPr>
-          <p:cNvPr id="8" name="Text Placeholder 7">
-            <a:extLst>
-              <a:ext uri="{FF2B5EF4-FFF2-40B4-BE49-F238E27FC236}">
-                <a16:creationId xmlns:a16="http://schemas.microsoft.com/office/drawing/2014/main" id="{379DD065-03FB-D8B8-DBC4-C9DCF762B477}"/>
-              </a:ext>
-            </a:extLst>
-          </p:cNvPr>
-          <p:cNvSpPr>
-            <a:spLocks noGrp="1"/>
-          </p:cNvSpPr>
-          <p:nvPr>
-            <p:ph type="body" idx="107"/>
+          <p:cNvPr id="14" name="Text Placeholder 13">
+            <a:extLst>
+              <a:ext uri="{FF2B5EF4-FFF2-40B4-BE49-F238E27FC236}">
+                <a16:creationId xmlns:a16="http://schemas.microsoft.com/office/drawing/2014/main" id="{C0DA49E7-E079-0564-DE99-88D761FB2AC0}"/>
+              </a:ext>
+            </a:extLst>
+          </p:cNvPr>
+          <p:cNvSpPr>
+            <a:spLocks noGrp="1"/>
+          </p:cNvSpPr>
+          <p:nvPr>
+            <p:ph type="body" idx="117"/>
           </p:nvPr>
         </p:nvSpPr>
         <p:spPr/>
@@ -11493,24 +11680,28 @@
           <a:bodyPr/>
           <a:lstStyle/>
           <a:p>
-            <a:endParaRPr lang="en-NZ"/>
-          </a:p>
-        </p:txBody>
-      </p:sp>
-      <p:sp>
-        <p:nvSpPr>
-          <p:cNvPr id="9" name="Text Placeholder 8">
-            <a:extLst>
-              <a:ext uri="{FF2B5EF4-FFF2-40B4-BE49-F238E27FC236}">
-                <a16:creationId xmlns:a16="http://schemas.microsoft.com/office/drawing/2014/main" id="{09A1E740-03EE-F3C5-3EBC-1A6C705859B6}"/>
-              </a:ext>
-            </a:extLst>
-          </p:cNvPr>
-          <p:cNvSpPr>
-            <a:spLocks noGrp="1"/>
-          </p:cNvSpPr>
-          <p:nvPr>
-            <p:ph type="body" idx="108"/>
+            <a:r>
+              <a:rPr lang="en-US" dirty="0"/>
+              <a:t>Z</a:t>
+            </a:r>
+            <a:endParaRPr lang="en-NZ" dirty="0"/>
+          </a:p>
+        </p:txBody>
+      </p:sp>
+      <p:sp>
+        <p:nvSpPr>
+          <p:cNvPr id="15" name="Text Placeholder 14">
+            <a:extLst>
+              <a:ext uri="{FF2B5EF4-FFF2-40B4-BE49-F238E27FC236}">
+                <a16:creationId xmlns:a16="http://schemas.microsoft.com/office/drawing/2014/main" id="{267911EF-72B3-5D63-5A28-75CEFA060F3D}"/>
+              </a:ext>
+            </a:extLst>
+          </p:cNvPr>
+          <p:cNvSpPr>
+            <a:spLocks noGrp="1"/>
+          </p:cNvSpPr>
+          <p:nvPr>
+            <p:ph type="body" idx="118"/>
           </p:nvPr>
         </p:nvSpPr>
         <p:spPr/>
@@ -11518,157 +11709,11 @@
           <a:bodyPr/>
           <a:lstStyle/>
           <a:p>
-            <a:endParaRPr lang="en-NZ"/>
-          </a:p>
-        </p:txBody>
-      </p:sp>
-      <p:sp>
-        <p:nvSpPr>
-          <p:cNvPr id="10" name="Text Placeholder 9">
-            <a:extLst>
-              <a:ext uri="{FF2B5EF4-FFF2-40B4-BE49-F238E27FC236}">
-                <a16:creationId xmlns:a16="http://schemas.microsoft.com/office/drawing/2014/main" id="{808887FB-BD43-62EA-1AE9-53E82473ED3F}"/>
-              </a:ext>
-            </a:extLst>
-          </p:cNvPr>
-          <p:cNvSpPr>
-            <a:spLocks noGrp="1"/>
-          </p:cNvSpPr>
-          <p:nvPr>
-            <p:ph type="body" idx="110"/>
-          </p:nvPr>
-        </p:nvSpPr>
-        <p:spPr/>
-        <p:txBody>
-          <a:bodyPr/>
-          <a:lstStyle/>
-          <a:p>
-            <a:endParaRPr lang="en-NZ"/>
-          </a:p>
-        </p:txBody>
-      </p:sp>
-      <p:sp>
-        <p:nvSpPr>
-          <p:cNvPr id="11" name="Text Placeholder 10">
-            <a:extLst>
-              <a:ext uri="{FF2B5EF4-FFF2-40B4-BE49-F238E27FC236}">
-                <a16:creationId xmlns:a16="http://schemas.microsoft.com/office/drawing/2014/main" id="{8C6B0386-8755-F1E2-3B9C-E5BF007D17C6}"/>
-              </a:ext>
-            </a:extLst>
-          </p:cNvPr>
-          <p:cNvSpPr>
-            <a:spLocks noGrp="1"/>
-          </p:cNvSpPr>
-          <p:nvPr>
-            <p:ph type="body" idx="112"/>
-          </p:nvPr>
-        </p:nvSpPr>
-        <p:spPr/>
-        <p:txBody>
-          <a:bodyPr/>
-          <a:lstStyle/>
-          <a:p>
-            <a:endParaRPr lang="en-NZ"/>
-          </a:p>
-        </p:txBody>
-      </p:sp>
-      <p:sp>
-        <p:nvSpPr>
-          <p:cNvPr id="12" name="Text Placeholder 11">
-            <a:extLst>
-              <a:ext uri="{FF2B5EF4-FFF2-40B4-BE49-F238E27FC236}">
-                <a16:creationId xmlns:a16="http://schemas.microsoft.com/office/drawing/2014/main" id="{DE867941-64F2-B11B-0067-49B13398E00B}"/>
-              </a:ext>
-            </a:extLst>
-          </p:cNvPr>
-          <p:cNvSpPr>
-            <a:spLocks noGrp="1"/>
-          </p:cNvSpPr>
-          <p:nvPr>
-            <p:ph type="body" idx="113"/>
-          </p:nvPr>
-        </p:nvSpPr>
-        <p:spPr/>
-        <p:txBody>
-          <a:bodyPr/>
-          <a:lstStyle/>
-          <a:p>
-            <a:endParaRPr lang="en-NZ"/>
-          </a:p>
-        </p:txBody>
-      </p:sp>
-      <p:sp>
-        <p:nvSpPr>
-          <p:cNvPr id="13" name="Text Placeholder 12">
-            <a:extLst>
-              <a:ext uri="{FF2B5EF4-FFF2-40B4-BE49-F238E27FC236}">
-                <a16:creationId xmlns:a16="http://schemas.microsoft.com/office/drawing/2014/main" id="{46E068EF-6FD4-F984-0BBD-DB499CEFFCA2}"/>
-              </a:ext>
-            </a:extLst>
-          </p:cNvPr>
-          <p:cNvSpPr>
-            <a:spLocks noGrp="1"/>
-          </p:cNvSpPr>
-          <p:nvPr>
-            <p:ph type="body" idx="115"/>
-          </p:nvPr>
-        </p:nvSpPr>
-        <p:spPr/>
-        <p:txBody>
-          <a:bodyPr/>
-          <a:lstStyle/>
-          <a:p>
-            <a:endParaRPr lang="en-NZ"/>
-          </a:p>
-        </p:txBody>
-      </p:sp>
-      <p:sp>
-        <p:nvSpPr>
-          <p:cNvPr id="14" name="Text Placeholder 13">
-            <a:extLst>
-              <a:ext uri="{FF2B5EF4-FFF2-40B4-BE49-F238E27FC236}">
-                <a16:creationId xmlns:a16="http://schemas.microsoft.com/office/drawing/2014/main" id="{C0DA49E7-E079-0564-DE99-88D761FB2AC0}"/>
-              </a:ext>
-            </a:extLst>
-          </p:cNvPr>
-          <p:cNvSpPr>
-            <a:spLocks noGrp="1"/>
-          </p:cNvSpPr>
-          <p:nvPr>
-            <p:ph type="body" idx="117"/>
-          </p:nvPr>
-        </p:nvSpPr>
-        <p:spPr/>
-        <p:txBody>
-          <a:bodyPr/>
-          <a:lstStyle/>
-          <a:p>
-            <a:endParaRPr lang="en-NZ"/>
-          </a:p>
-        </p:txBody>
-      </p:sp>
-      <p:sp>
-        <p:nvSpPr>
-          <p:cNvPr id="15" name="Text Placeholder 14">
-            <a:extLst>
-              <a:ext uri="{FF2B5EF4-FFF2-40B4-BE49-F238E27FC236}">
-                <a16:creationId xmlns:a16="http://schemas.microsoft.com/office/drawing/2014/main" id="{267911EF-72B3-5D63-5A28-75CEFA060F3D}"/>
-              </a:ext>
-            </a:extLst>
-          </p:cNvPr>
-          <p:cNvSpPr>
-            <a:spLocks noGrp="1"/>
-          </p:cNvSpPr>
-          <p:nvPr>
-            <p:ph type="body" idx="118"/>
-          </p:nvPr>
-        </p:nvSpPr>
-        <p:spPr/>
-        <p:txBody>
-          <a:bodyPr/>
-          <a:lstStyle/>
-          <a:p>
-            <a:endParaRPr lang="en-NZ"/>
+            <a:r>
+              <a:rPr lang="en-US" dirty="0"/>
+              <a:t>AI min/max</a:t>
+            </a:r>
+            <a:endParaRPr lang="en-NZ" dirty="0"/>
           </a:p>
         </p:txBody>
       </p:sp>

--- a/Academic Documents/Final Panel Presentation/Final Panel Slides 1.1 - DS.pptx
+++ b/Academic Documents/Final Panel Presentation/Final Panel Slides 1.1 - DS.pptx
@@ -132,7 +132,7 @@
   <pc:docChgLst>
     <pc:chgData name="Dave Sushames" userId="ce71797e-895c-47df-af8e-c160254d5cef" providerId="ADAL" clId="{067FCE3D-3D41-4548-936F-F0A348C85C95}"/>
     <pc:docChg chg="undo custSel addSld modSld sldOrd addMainMaster delMainMaster modMainMaster">
-      <pc:chgData name="Dave Sushames" userId="ce71797e-895c-47df-af8e-c160254d5cef" providerId="ADAL" clId="{067FCE3D-3D41-4548-936F-F0A348C85C95}" dt="2026-10-26T20:49:00.732" v="526" actId="20577"/>
+      <pc:chgData name="Dave Sushames" userId="ce71797e-895c-47df-af8e-c160254d5cef" providerId="ADAL" clId="{067FCE3D-3D41-4548-936F-F0A348C85C95}" dt="2026-10-27T04:21:21.163" v="578" actId="20577"/>
       <pc:docMkLst>
         <pc:docMk/>
       </pc:docMkLst>
@@ -391,7 +391,7 @@
         </pc:spChg>
       </pc:sldChg>
       <pc:sldChg chg="modSp mod modClrScheme chgLayout">
-        <pc:chgData name="Dave Sushames" userId="ce71797e-895c-47df-af8e-c160254d5cef" providerId="ADAL" clId="{067FCE3D-3D41-4548-936F-F0A348C85C95}" dt="2026-10-09T05:47:08.792" v="120" actId="27636"/>
+        <pc:chgData name="Dave Sushames" userId="ce71797e-895c-47df-af8e-c160254d5cef" providerId="ADAL" clId="{067FCE3D-3D41-4548-936F-F0A348C85C95}" dt="2026-10-27T04:21:21.163" v="578" actId="20577"/>
         <pc:sldMkLst>
           <pc:docMk/>
           <pc:sldMk cId="3346734016" sldId="271"/>
@@ -405,7 +405,7 @@
           </ac:spMkLst>
         </pc:spChg>
         <pc:spChg chg="mod ord">
-          <ac:chgData name="Dave Sushames" userId="ce71797e-895c-47df-af8e-c160254d5cef" providerId="ADAL" clId="{067FCE3D-3D41-4548-936F-F0A348C85C95}" dt="2026-10-09T05:47:08.792" v="120" actId="27636"/>
+          <ac:chgData name="Dave Sushames" userId="ce71797e-895c-47df-af8e-c160254d5cef" providerId="ADAL" clId="{067FCE3D-3D41-4548-936F-F0A348C85C95}" dt="2026-10-27T04:21:21.163" v="578" actId="20577"/>
           <ac:spMkLst>
             <pc:docMk/>
             <pc:sldMk cId="3346734016" sldId="271"/>
@@ -8193,6 +8193,13 @@
             <a:prstDash val="solid"/>
           </a:ln>
         </p:spPr>
+        <p:txBody>
+          <a:bodyPr/>
+          <a:lstStyle/>
+          <a:p>
+            <a:endParaRPr lang="en-NZ"/>
+          </a:p>
+        </p:txBody>
       </p:sp>
       <p:sp>
         <p:nvSpPr>
@@ -8314,6 +8321,13 @@
             <a:prstDash val="solid"/>
           </a:ln>
         </p:spPr>
+        <p:txBody>
+          <a:bodyPr/>
+          <a:lstStyle/>
+          <a:p>
+            <a:endParaRPr lang="en-NZ"/>
+          </a:p>
+        </p:txBody>
       </p:sp>
       <p:sp>
         <p:nvSpPr>
@@ -8386,6 +8400,13 @@
             <a:prstDash val="solid"/>
           </a:ln>
         </p:spPr>
+        <p:txBody>
+          <a:bodyPr/>
+          <a:lstStyle/>
+          <a:p>
+            <a:endParaRPr lang="en-NZ"/>
+          </a:p>
+        </p:txBody>
       </p:sp>
       <p:sp>
         <p:nvSpPr>
@@ -8507,6 +8528,13 @@
             <a:prstDash val="solid"/>
           </a:ln>
         </p:spPr>
+        <p:txBody>
+          <a:bodyPr/>
+          <a:lstStyle/>
+          <a:p>
+            <a:endParaRPr lang="en-NZ"/>
+          </a:p>
+        </p:txBody>
       </p:sp>
       <p:sp>
         <p:nvSpPr>
@@ -8579,6 +8607,13 @@
             <a:prstDash val="solid"/>
           </a:ln>
         </p:spPr>
+        <p:txBody>
+          <a:bodyPr/>
+          <a:lstStyle/>
+          <a:p>
+            <a:endParaRPr lang="en-NZ"/>
+          </a:p>
+        </p:txBody>
       </p:sp>
       <p:sp>
         <p:nvSpPr>
@@ -8700,6 +8735,13 @@
             <a:prstDash val="solid"/>
           </a:ln>
         </p:spPr>
+        <p:txBody>
+          <a:bodyPr/>
+          <a:lstStyle/>
+          <a:p>
+            <a:endParaRPr lang="en-NZ"/>
+          </a:p>
+        </p:txBody>
       </p:sp>
       <p:sp>
         <p:nvSpPr>
@@ -8772,6 +8814,13 @@
             <a:prstDash val="solid"/>
           </a:ln>
         </p:spPr>
+        <p:txBody>
+          <a:bodyPr/>
+          <a:lstStyle/>
+          <a:p>
+            <a:endParaRPr lang="en-NZ"/>
+          </a:p>
+        </p:txBody>
       </p:sp>
       <p:sp>
         <p:nvSpPr>
@@ -8893,6 +8942,13 @@
             <a:prstDash val="solid"/>
           </a:ln>
         </p:spPr>
+        <p:txBody>
+          <a:bodyPr/>
+          <a:lstStyle/>
+          <a:p>
+            <a:endParaRPr lang="en-NZ"/>
+          </a:p>
+        </p:txBody>
       </p:sp>
       <p:sp>
         <p:nvSpPr>
@@ -12018,23 +12074,23 @@
               <a:buNone/>
             </a:pPr>
             <a:r>
-              <a:rPr lang="en-US"/>
+              <a:rPr lang="en-US" dirty="0"/>
               <a:t>Ones we’re </a:t>
             </a:r>
             <a:r>
-              <a:rPr lang="en-US" err="1"/>
+              <a:rPr lang="en-US" dirty="0" err="1"/>
               <a:t>prolly</a:t>
             </a:r>
             <a:r>
-              <a:rPr lang="en-US"/>
+              <a:rPr lang="en-US" dirty="0"/>
               <a:t> </a:t>
             </a:r>
             <a:r>
-              <a:rPr lang="en-US" err="1"/>
+              <a:rPr lang="en-US" dirty="0" err="1"/>
               <a:t>gonna</a:t>
             </a:r>
             <a:r>
-              <a:rPr lang="en-US"/>
+              <a:rPr lang="en-US" dirty="0"/>
               <a:t> get:</a:t>
             </a:r>
           </a:p>
@@ -12043,7 +12099,7 @@
               <a:buNone/>
             </a:pPr>
             <a:r>
-              <a:rPr lang="en-US"/>
+              <a:rPr lang="en-US" dirty="0"/>
               <a:t>Changing PM</a:t>
             </a:r>
           </a:p>
@@ -12052,7 +12108,7 @@
               <a:buNone/>
             </a:pPr>
             <a:r>
-              <a:rPr lang="en-US"/>
+              <a:rPr lang="en-US" dirty="0"/>
               <a:t>Missed logs</a:t>
             </a:r>
           </a:p>
@@ -12061,7 +12117,7 @@
               <a:buNone/>
             </a:pPr>
             <a:r>
-              <a:rPr lang="en-US"/>
+              <a:rPr lang="en-US" dirty="0"/>
               <a:t>Why the project changed</a:t>
             </a:r>
           </a:p>
@@ -12070,7 +12126,7 @@
               <a:buNone/>
             </a:pPr>
             <a:r>
-              <a:rPr lang="en-US"/>
+              <a:rPr lang="en-US" dirty="0"/>
               <a:t>Anything else Bryce comes up with</a:t>
             </a:r>
           </a:p>
@@ -12078,13 +12134,22 @@
             <a:pPr marL="0" indent="0">
               <a:buNone/>
             </a:pPr>
-            <a:endParaRPr lang="en-US"/>
+            <a:r>
+              <a:rPr lang="en-US" dirty="0"/>
+              <a:t>Why don’t team meetings have agendas/minutes</a:t>
+            </a:r>
           </a:p>
           <a:p>
             <a:pPr marL="0" indent="0">
               <a:buNone/>
             </a:pPr>
-            <a:endParaRPr lang="en-NZ"/>
+            <a:endParaRPr lang="en-US" dirty="0"/>
+          </a:p>
+          <a:p>
+            <a:pPr marL="0" indent="0">
+              <a:buNone/>
+            </a:pPr>
+            <a:endParaRPr lang="en-NZ" dirty="0"/>
           </a:p>
         </p:txBody>
       </p:sp>
